--- a/docs/index.pptx
+++ b/docs/index.pptx
@@ -28,6 +28,7 @@
     <p:sldId id="276" r:id="rId22"/>
     <p:sldId id="277" r:id="rId23"/>
     <p:sldId id="278" r:id="rId24"/>
+    <p:sldId id="279" r:id="rId25"/>
   </p:sldIdLst>
   <p:sldSz cx="9144000" cy="5143500" type="screen16x9"/>
   <p:notesSz cx="6858000" cy="9144000"/>
@@ -3214,7 +3215,7 @@
             </a:pPr>
             <a:r>
               <a:rPr/>
-              <a:t>rix: reproducible development environments with Nix (1/2)</a:t>
+              <a:t>The Nix package manager (2/2)</a:t>
             </a:r>
           </a:p>
         </p:txBody>
@@ -3236,441 +3237,37 @@
           <a:p>
             <a:pPr lvl="0"/>
             <a:r>
-              <a:rPr>
-                <a:latin typeface="Courier"/>
-              </a:rPr>
-              <a:t>{rix}</a:t>
-            </a:r>
-            <a:r>
-              <a:rPr/>
-              <a:t> (</a:t>
-            </a:r>
-            <a:r>
-              <a:rPr>
-                <a:hlinkClick r:id="rId2"/>
-              </a:rPr>
-              <a:t>website</a:t>
-            </a:r>
-            <a:r>
-              <a:rPr/>
-              <a:t>) simplifies writing Nix expressions!</a:t>
+              <a:rPr/>
+              <a:t>To ensure reproducibility: R, R packages, and other dependencies must be explicitly managed</a:t>
             </a:r>
           </a:p>
           <a:p>
             <a:pPr lvl="0"/>
             <a:r>
               <a:rPr/>
-              <a:t>Just use the provided </a:t>
-            </a:r>
-            <a:r>
-              <a:rPr>
-                <a:latin typeface="Courier"/>
-              </a:rPr>
-              <a:t>rix()</a:t>
-            </a:r>
-            <a:r>
-              <a:rPr/>
-              <a:t> function:</a:t>
-            </a:r>
-          </a:p>
-          <a:p>
-            <a:pPr lvl="0" indent="0" marL="0">
-              <a:buNone/>
-            </a:pPr>
-            <a:r>
-              <a:rPr/>
-              <a:t>. . .</a:t>
-            </a:r>
-          </a:p>
-          <a:p>
-            <a:pPr lvl="0" indent="0">
-              <a:buNone/>
-            </a:pPr>
-            <a:r>
-              <a:rPr>
-                <a:solidFill>
-                  <a:srgbClr val="4758AB"/>
-                </a:solidFill>
-                <a:latin typeface="Courier"/>
-              </a:rPr>
-              <a:t>library</a:t>
-            </a:r>
-            <a:r>
-              <a:rPr>
-                <a:solidFill>
-                  <a:srgbClr val="003B4F"/>
-                </a:solidFill>
-                <a:latin typeface="Courier"/>
-              </a:rPr>
-              <a:t>(rix)</a:t>
-            </a:r>
-            <a:br/>
-            <a:br/>
-            <a:r>
-              <a:rPr>
-                <a:solidFill>
-                  <a:srgbClr val="4758AB"/>
-                </a:solidFill>
-                <a:latin typeface="Courier"/>
-              </a:rPr>
-              <a:t>rix</a:t>
-            </a:r>
-            <a:r>
-              <a:rPr>
-                <a:solidFill>
-                  <a:srgbClr val="003B4F"/>
-                </a:solidFill>
-                <a:latin typeface="Courier"/>
-              </a:rPr>
-              <a:t>(</a:t>
-            </a:r>
-            <a:r>
-              <a:rPr>
-                <a:solidFill>
-                  <a:srgbClr val="657422"/>
-                </a:solidFill>
-                <a:latin typeface="Courier"/>
-              </a:rPr>
-              <a:t>date =</a:t>
-            </a:r>
-            <a:r>
-              <a:rPr>
-                <a:solidFill>
-                  <a:srgbClr val="003B4F"/>
-                </a:solidFill>
-                <a:latin typeface="Courier"/>
-              </a:rPr>
-              <a:t> </a:t>
-            </a:r>
-            <a:r>
-              <a:rPr>
-                <a:solidFill>
-                  <a:srgbClr val="20794D"/>
-                </a:solidFill>
-                <a:latin typeface="Courier"/>
-              </a:rPr>
-              <a:t>"2025-06-13"</a:t>
-            </a:r>
-            <a:r>
-              <a:rPr>
-                <a:solidFill>
-                  <a:srgbClr val="003B4F"/>
-                </a:solidFill>
-                <a:latin typeface="Courier"/>
-              </a:rPr>
-              <a:t>,</a:t>
-            </a:r>
-            <a:br/>
-            <a:r>
-              <a:rPr>
-                <a:solidFill>
-                  <a:srgbClr val="003B4F"/>
-                </a:solidFill>
-                <a:latin typeface="Courier"/>
-              </a:rPr>
-              <a:t>    </a:t>
-            </a:r>
-            <a:r>
-              <a:rPr>
-                <a:solidFill>
-                  <a:srgbClr val="657422"/>
-                </a:solidFill>
-                <a:latin typeface="Courier"/>
-              </a:rPr>
-              <a:t>r_pkgs =</a:t>
-            </a:r>
-            <a:r>
-              <a:rPr>
-                <a:solidFill>
-                  <a:srgbClr val="003B4F"/>
-                </a:solidFill>
-                <a:latin typeface="Courier"/>
-              </a:rPr>
-              <a:t> </a:t>
-            </a:r>
-            <a:r>
-              <a:rPr>
-                <a:solidFill>
-                  <a:srgbClr val="4758AB"/>
-                </a:solidFill>
-                <a:latin typeface="Courier"/>
-              </a:rPr>
-              <a:t>c</a:t>
-            </a:r>
-            <a:r>
-              <a:rPr>
-                <a:solidFill>
-                  <a:srgbClr val="003B4F"/>
-                </a:solidFill>
-                <a:latin typeface="Courier"/>
-              </a:rPr>
-              <a:t>(</a:t>
-            </a:r>
-            <a:r>
-              <a:rPr>
-                <a:solidFill>
-                  <a:srgbClr val="20794D"/>
-                </a:solidFill>
-                <a:latin typeface="Courier"/>
-              </a:rPr>
-              <a:t>"dplyr"</a:t>
-            </a:r>
-            <a:r>
-              <a:rPr>
-                <a:solidFill>
-                  <a:srgbClr val="003B4F"/>
-                </a:solidFill>
-                <a:latin typeface="Courier"/>
-              </a:rPr>
-              <a:t>, </a:t>
-            </a:r>
-            <a:r>
-              <a:rPr>
-                <a:solidFill>
-                  <a:srgbClr val="20794D"/>
-                </a:solidFill>
-                <a:latin typeface="Courier"/>
-              </a:rPr>
-              <a:t>"ggplot2"</a:t>
-            </a:r>
-            <a:r>
-              <a:rPr>
-                <a:solidFill>
-                  <a:srgbClr val="003B4F"/>
-                </a:solidFill>
-                <a:latin typeface="Courier"/>
-              </a:rPr>
-              <a:t>),</a:t>
-            </a:r>
-            <a:br/>
-            <a:r>
-              <a:rPr>
-                <a:solidFill>
-                  <a:srgbClr val="003B4F"/>
-                </a:solidFill>
-                <a:latin typeface="Courier"/>
-              </a:rPr>
-              <a:t>    </a:t>
-            </a:r>
-            <a:r>
-              <a:rPr>
-                <a:solidFill>
-                  <a:srgbClr val="657422"/>
-                </a:solidFill>
-                <a:latin typeface="Courier"/>
-              </a:rPr>
-              <a:t>system_pkgs =</a:t>
-            </a:r>
-            <a:r>
-              <a:rPr>
-                <a:solidFill>
-                  <a:srgbClr val="003B4F"/>
-                </a:solidFill>
-                <a:latin typeface="Courier"/>
-              </a:rPr>
-              <a:t> </a:t>
-            </a:r>
-            <a:r>
-              <a:rPr>
-                <a:solidFill>
-                  <a:srgbClr val="8F5902"/>
-                </a:solidFill>
-                <a:latin typeface="Courier"/>
-              </a:rPr>
-              <a:t>NULL</a:t>
-            </a:r>
-            <a:r>
-              <a:rPr>
-                <a:solidFill>
-                  <a:srgbClr val="003B4F"/>
-                </a:solidFill>
-                <a:latin typeface="Courier"/>
-              </a:rPr>
-              <a:t>,</a:t>
-            </a:r>
-            <a:br/>
-            <a:r>
-              <a:rPr>
-                <a:solidFill>
-                  <a:srgbClr val="003B4F"/>
-                </a:solidFill>
-                <a:latin typeface="Courier"/>
-              </a:rPr>
-              <a:t>    </a:t>
-            </a:r>
-            <a:r>
-              <a:rPr>
-                <a:solidFill>
-                  <a:srgbClr val="657422"/>
-                </a:solidFill>
-                <a:latin typeface="Courier"/>
-              </a:rPr>
-              <a:t>git_pkgs =</a:t>
-            </a:r>
-            <a:r>
-              <a:rPr>
-                <a:solidFill>
-                  <a:srgbClr val="003B4F"/>
-                </a:solidFill>
-                <a:latin typeface="Courier"/>
-              </a:rPr>
-              <a:t> </a:t>
-            </a:r>
-            <a:r>
-              <a:rPr>
-                <a:solidFill>
-                  <a:srgbClr val="8F5902"/>
-                </a:solidFill>
-                <a:latin typeface="Courier"/>
-              </a:rPr>
-              <a:t>NULL</a:t>
-            </a:r>
-            <a:r>
-              <a:rPr>
-                <a:solidFill>
-                  <a:srgbClr val="003B4F"/>
-                </a:solidFill>
-                <a:latin typeface="Courier"/>
-              </a:rPr>
-              <a:t>,</a:t>
-            </a:r>
-            <a:br/>
-            <a:r>
-              <a:rPr>
-                <a:solidFill>
-                  <a:srgbClr val="003B4F"/>
-                </a:solidFill>
-                <a:latin typeface="Courier"/>
-              </a:rPr>
-              <a:t>    </a:t>
-            </a:r>
-            <a:r>
-              <a:rPr>
-                <a:solidFill>
-                  <a:srgbClr val="657422"/>
-                </a:solidFill>
-                <a:latin typeface="Courier"/>
-              </a:rPr>
-              <a:t>tex_pkgs =</a:t>
-            </a:r>
-            <a:r>
-              <a:rPr>
-                <a:solidFill>
-                  <a:srgbClr val="003B4F"/>
-                </a:solidFill>
-                <a:latin typeface="Courier"/>
-              </a:rPr>
-              <a:t> </a:t>
-            </a:r>
-            <a:r>
-              <a:rPr>
-                <a:solidFill>
-                  <a:srgbClr val="8F5902"/>
-                </a:solidFill>
-                <a:latin typeface="Courier"/>
-              </a:rPr>
-              <a:t>NULL</a:t>
-            </a:r>
-            <a:r>
-              <a:rPr>
-                <a:solidFill>
-                  <a:srgbClr val="003B4F"/>
-                </a:solidFill>
-                <a:latin typeface="Courier"/>
-              </a:rPr>
-              <a:t>,</a:t>
-            </a:r>
-            <a:br/>
-            <a:r>
-              <a:rPr>
-                <a:solidFill>
-                  <a:srgbClr val="003B4F"/>
-                </a:solidFill>
-                <a:latin typeface="Courier"/>
-              </a:rPr>
-              <a:t>    </a:t>
-            </a:r>
-            <a:r>
-              <a:rPr>
-                <a:solidFill>
-                  <a:srgbClr val="657422"/>
-                </a:solidFill>
-                <a:latin typeface="Courier"/>
-              </a:rPr>
-              <a:t>ide =</a:t>
-            </a:r>
-            <a:r>
-              <a:rPr>
-                <a:solidFill>
-                  <a:srgbClr val="003B4F"/>
-                </a:solidFill>
-                <a:latin typeface="Courier"/>
-              </a:rPr>
-              <a:t> </a:t>
-            </a:r>
-            <a:r>
-              <a:rPr>
-                <a:solidFill>
-                  <a:srgbClr val="20794D"/>
-                </a:solidFill>
-                <a:latin typeface="Courier"/>
-              </a:rPr>
-              <a:t>"code"</a:t>
-            </a:r>
-            <a:r>
-              <a:rPr>
-                <a:solidFill>
-                  <a:srgbClr val="003B4F"/>
-                </a:solidFill>
-                <a:latin typeface="Courier"/>
-              </a:rPr>
-              <a:t>,</a:t>
-            </a:r>
-            <a:br/>
-            <a:r>
-              <a:rPr>
-                <a:solidFill>
-                  <a:srgbClr val="003B4F"/>
-                </a:solidFill>
-                <a:latin typeface="Courier"/>
-              </a:rPr>
-              <a:t>    </a:t>
-            </a:r>
-            <a:r>
-              <a:rPr>
-                <a:solidFill>
-                  <a:srgbClr val="657422"/>
-                </a:solidFill>
-                <a:latin typeface="Courier"/>
-              </a:rPr>
-              <a:t>project_path =</a:t>
-            </a:r>
-            <a:r>
-              <a:rPr>
-                <a:solidFill>
-                  <a:srgbClr val="003B4F"/>
-                </a:solidFill>
-                <a:latin typeface="Courier"/>
-              </a:rPr>
-              <a:t> </a:t>
-            </a:r>
-            <a:r>
-              <a:rPr>
-                <a:solidFill>
-                  <a:srgbClr val="20794D"/>
-                </a:solidFill>
-                <a:latin typeface="Courier"/>
-              </a:rPr>
-              <a:t>"."</a:t>
-            </a:r>
-            <a:r>
-              <a:rPr>
-                <a:solidFill>
-                  <a:srgbClr val="003B4F"/>
-                </a:solidFill>
-                <a:latin typeface="Courier"/>
-              </a:rPr>
-              <a:t>)</a:t>
+              <a:t>Nix is a package manager truly focused on reproducible builds</a:t>
+            </a:r>
+          </a:p>
+          <a:p>
+            <a:pPr lvl="0"/>
+            <a:r>
+              <a:rPr/>
+              <a:t>Nix manages everything using a single text file (called a Nix expression)!</a:t>
+            </a:r>
+          </a:p>
+          <a:p>
+            <a:pPr lvl="0"/>
+            <a:r>
+              <a:rPr/>
+              <a:t>These expressions </a:t>
+            </a:r>
+            <a:r>
+              <a:rPr i="1"/>
+              <a:t>always</a:t>
+            </a:r>
+            <a:r>
+              <a:rPr/>
+              <a:t> produce exactly the same result</a:t>
             </a:r>
           </a:p>
         </p:txBody>
@@ -3717,7 +3314,7 @@
             </a:pPr>
             <a:r>
               <a:rPr/>
-              <a:t>rix: reproducible development environments with Nix (2/2)</a:t>
+              <a:t>rix: reproducible development environments with Nix (1/2)</a:t>
             </a:r>
           </a:p>
         </p:txBody>
@@ -3742,68 +3339,438 @@
               <a:rPr>
                 <a:latin typeface="Courier"/>
               </a:rPr>
-              <a:t>rix::rix()</a:t>
-            </a:r>
-            <a:r>
-              <a:rPr/>
-              <a:t> generates a </a:t>
-            </a:r>
-            <a:r>
-              <a:rPr>
-                <a:latin typeface="Courier"/>
-              </a:rPr>
-              <a:t>default.nix</a:t>
-            </a:r>
-            <a:r>
-              <a:rPr/>
-              <a:t> file</a:t>
+              <a:t>{rix}</a:t>
+            </a:r>
+            <a:r>
+              <a:rPr/>
+              <a:t> (</a:t>
+            </a:r>
+            <a:r>
+              <a:rPr>
+                <a:hlinkClick r:id="rId2"/>
+              </a:rPr>
+              <a:t>website</a:t>
+            </a:r>
+            <a:r>
+              <a:rPr/>
+              <a:t>) simplifies writing Nix expressions!</a:t>
             </a:r>
           </a:p>
           <a:p>
             <a:pPr lvl="0"/>
             <a:r>
               <a:rPr/>
-              <a:t>Build the expressions with </a:t>
-            </a:r>
-            <a:r>
-              <a:rPr>
-                <a:latin typeface="Courier"/>
-              </a:rPr>
-              <a:t>nix-build</a:t>
-            </a:r>
-            <a:r>
-              <a:rPr/>
-              <a:t> (in terminal) or </a:t>
-            </a:r>
-            <a:r>
-              <a:rPr>
-                <a:latin typeface="Courier"/>
-              </a:rPr>
-              <a:t>rix::nix_build()</a:t>
-            </a:r>
-            <a:r>
-              <a:rPr/>
-              <a:t> from R</a:t>
-            </a:r>
-          </a:p>
-          <a:p>
-            <a:pPr lvl="0"/>
-            <a:r>
-              <a:rPr/>
-              <a:t>Access the development environment with </a:t>
-            </a:r>
-            <a:r>
-              <a:rPr>
-                <a:latin typeface="Courier"/>
-              </a:rPr>
-              <a:t>nix-shell</a:t>
-            </a:r>
-          </a:p>
-          <a:p>
-            <a:pPr lvl="0"/>
-            <a:r>
-              <a:rPr/>
-              <a:t>Expressions can be generated even without Nix installed (with some limitations)</a:t>
+              <a:t>Just use the provided </a:t>
+            </a:r>
+            <a:r>
+              <a:rPr>
+                <a:latin typeface="Courier"/>
+              </a:rPr>
+              <a:t>rix()</a:t>
+            </a:r>
+            <a:r>
+              <a:rPr/>
+              <a:t> function:</a:t>
+            </a:r>
+          </a:p>
+          <a:p>
+            <a:pPr lvl="0" indent="0" marL="0">
+              <a:buNone/>
+            </a:pPr>
+            <a:r>
+              <a:rPr/>
+              <a:t>. . .</a:t>
+            </a:r>
+          </a:p>
+          <a:p>
+            <a:pPr lvl="0" indent="0">
+              <a:buNone/>
+            </a:pPr>
+            <a:r>
+              <a:rPr>
+                <a:solidFill>
+                  <a:srgbClr val="4758AB"/>
+                </a:solidFill>
+                <a:latin typeface="Courier"/>
+              </a:rPr>
+              <a:t>library</a:t>
+            </a:r>
+            <a:r>
+              <a:rPr>
+                <a:solidFill>
+                  <a:srgbClr val="003B4F"/>
+                </a:solidFill>
+                <a:latin typeface="Courier"/>
+              </a:rPr>
+              <a:t>(rix)</a:t>
+            </a:r>
+            <a:br/>
+            <a:br/>
+            <a:r>
+              <a:rPr>
+                <a:solidFill>
+                  <a:srgbClr val="4758AB"/>
+                </a:solidFill>
+                <a:latin typeface="Courier"/>
+              </a:rPr>
+              <a:t>rix</a:t>
+            </a:r>
+            <a:r>
+              <a:rPr>
+                <a:solidFill>
+                  <a:srgbClr val="003B4F"/>
+                </a:solidFill>
+                <a:latin typeface="Courier"/>
+              </a:rPr>
+              <a:t>(</a:t>
+            </a:r>
+            <a:r>
+              <a:rPr>
+                <a:solidFill>
+                  <a:srgbClr val="657422"/>
+                </a:solidFill>
+                <a:latin typeface="Courier"/>
+              </a:rPr>
+              <a:t>date =</a:t>
+            </a:r>
+            <a:r>
+              <a:rPr>
+                <a:solidFill>
+                  <a:srgbClr val="003B4F"/>
+                </a:solidFill>
+                <a:latin typeface="Courier"/>
+              </a:rPr>
+              <a:t> </a:t>
+            </a:r>
+            <a:r>
+              <a:rPr>
+                <a:solidFill>
+                  <a:srgbClr val="20794D"/>
+                </a:solidFill>
+                <a:latin typeface="Courier"/>
+              </a:rPr>
+              <a:t>"2025-06-13"</a:t>
+            </a:r>
+            <a:r>
+              <a:rPr>
+                <a:solidFill>
+                  <a:srgbClr val="003B4F"/>
+                </a:solidFill>
+                <a:latin typeface="Courier"/>
+              </a:rPr>
+              <a:t>,</a:t>
+            </a:r>
+            <a:br/>
+            <a:r>
+              <a:rPr>
+                <a:solidFill>
+                  <a:srgbClr val="003B4F"/>
+                </a:solidFill>
+                <a:latin typeface="Courier"/>
+              </a:rPr>
+              <a:t>    </a:t>
+            </a:r>
+            <a:r>
+              <a:rPr>
+                <a:solidFill>
+                  <a:srgbClr val="657422"/>
+                </a:solidFill>
+                <a:latin typeface="Courier"/>
+              </a:rPr>
+              <a:t>r_pkgs =</a:t>
+            </a:r>
+            <a:r>
+              <a:rPr>
+                <a:solidFill>
+                  <a:srgbClr val="003B4F"/>
+                </a:solidFill>
+                <a:latin typeface="Courier"/>
+              </a:rPr>
+              <a:t> </a:t>
+            </a:r>
+            <a:r>
+              <a:rPr>
+                <a:solidFill>
+                  <a:srgbClr val="4758AB"/>
+                </a:solidFill>
+                <a:latin typeface="Courier"/>
+              </a:rPr>
+              <a:t>c</a:t>
+            </a:r>
+            <a:r>
+              <a:rPr>
+                <a:solidFill>
+                  <a:srgbClr val="003B4F"/>
+                </a:solidFill>
+                <a:latin typeface="Courier"/>
+              </a:rPr>
+              <a:t>(</a:t>
+            </a:r>
+            <a:r>
+              <a:rPr>
+                <a:solidFill>
+                  <a:srgbClr val="20794D"/>
+                </a:solidFill>
+                <a:latin typeface="Courier"/>
+              </a:rPr>
+              <a:t>"dplyr"</a:t>
+            </a:r>
+            <a:r>
+              <a:rPr>
+                <a:solidFill>
+                  <a:srgbClr val="003B4F"/>
+                </a:solidFill>
+                <a:latin typeface="Courier"/>
+              </a:rPr>
+              <a:t>, </a:t>
+            </a:r>
+            <a:r>
+              <a:rPr>
+                <a:solidFill>
+                  <a:srgbClr val="20794D"/>
+                </a:solidFill>
+                <a:latin typeface="Courier"/>
+              </a:rPr>
+              <a:t>"ggplot2"</a:t>
+            </a:r>
+            <a:r>
+              <a:rPr>
+                <a:solidFill>
+                  <a:srgbClr val="003B4F"/>
+                </a:solidFill>
+                <a:latin typeface="Courier"/>
+              </a:rPr>
+              <a:t>),</a:t>
+            </a:r>
+            <a:br/>
+            <a:r>
+              <a:rPr>
+                <a:solidFill>
+                  <a:srgbClr val="003B4F"/>
+                </a:solidFill>
+                <a:latin typeface="Courier"/>
+              </a:rPr>
+              <a:t>    </a:t>
+            </a:r>
+            <a:r>
+              <a:rPr>
+                <a:solidFill>
+                  <a:srgbClr val="657422"/>
+                </a:solidFill>
+                <a:latin typeface="Courier"/>
+              </a:rPr>
+              <a:t>system_pkgs =</a:t>
+            </a:r>
+            <a:r>
+              <a:rPr>
+                <a:solidFill>
+                  <a:srgbClr val="003B4F"/>
+                </a:solidFill>
+                <a:latin typeface="Courier"/>
+              </a:rPr>
+              <a:t> </a:t>
+            </a:r>
+            <a:r>
+              <a:rPr>
+                <a:solidFill>
+                  <a:srgbClr val="8F5902"/>
+                </a:solidFill>
+                <a:latin typeface="Courier"/>
+              </a:rPr>
+              <a:t>NULL</a:t>
+            </a:r>
+            <a:r>
+              <a:rPr>
+                <a:solidFill>
+                  <a:srgbClr val="003B4F"/>
+                </a:solidFill>
+                <a:latin typeface="Courier"/>
+              </a:rPr>
+              <a:t>,</a:t>
+            </a:r>
+            <a:br/>
+            <a:r>
+              <a:rPr>
+                <a:solidFill>
+                  <a:srgbClr val="003B4F"/>
+                </a:solidFill>
+                <a:latin typeface="Courier"/>
+              </a:rPr>
+              <a:t>    </a:t>
+            </a:r>
+            <a:r>
+              <a:rPr>
+                <a:solidFill>
+                  <a:srgbClr val="657422"/>
+                </a:solidFill>
+                <a:latin typeface="Courier"/>
+              </a:rPr>
+              <a:t>git_pkgs =</a:t>
+            </a:r>
+            <a:r>
+              <a:rPr>
+                <a:solidFill>
+                  <a:srgbClr val="003B4F"/>
+                </a:solidFill>
+                <a:latin typeface="Courier"/>
+              </a:rPr>
+              <a:t> </a:t>
+            </a:r>
+            <a:r>
+              <a:rPr>
+                <a:solidFill>
+                  <a:srgbClr val="8F5902"/>
+                </a:solidFill>
+                <a:latin typeface="Courier"/>
+              </a:rPr>
+              <a:t>NULL</a:t>
+            </a:r>
+            <a:r>
+              <a:rPr>
+                <a:solidFill>
+                  <a:srgbClr val="003B4F"/>
+                </a:solidFill>
+                <a:latin typeface="Courier"/>
+              </a:rPr>
+              <a:t>,</a:t>
+            </a:r>
+            <a:br/>
+            <a:r>
+              <a:rPr>
+                <a:solidFill>
+                  <a:srgbClr val="003B4F"/>
+                </a:solidFill>
+                <a:latin typeface="Courier"/>
+              </a:rPr>
+              <a:t>    </a:t>
+            </a:r>
+            <a:r>
+              <a:rPr>
+                <a:solidFill>
+                  <a:srgbClr val="657422"/>
+                </a:solidFill>
+                <a:latin typeface="Courier"/>
+              </a:rPr>
+              <a:t>tex_pkgs =</a:t>
+            </a:r>
+            <a:r>
+              <a:rPr>
+                <a:solidFill>
+                  <a:srgbClr val="003B4F"/>
+                </a:solidFill>
+                <a:latin typeface="Courier"/>
+              </a:rPr>
+              <a:t> </a:t>
+            </a:r>
+            <a:r>
+              <a:rPr>
+                <a:solidFill>
+                  <a:srgbClr val="8F5902"/>
+                </a:solidFill>
+                <a:latin typeface="Courier"/>
+              </a:rPr>
+              <a:t>NULL</a:t>
+            </a:r>
+            <a:r>
+              <a:rPr>
+                <a:solidFill>
+                  <a:srgbClr val="003B4F"/>
+                </a:solidFill>
+                <a:latin typeface="Courier"/>
+              </a:rPr>
+              <a:t>,</a:t>
+            </a:r>
+            <a:br/>
+            <a:r>
+              <a:rPr>
+                <a:solidFill>
+                  <a:srgbClr val="003B4F"/>
+                </a:solidFill>
+                <a:latin typeface="Courier"/>
+              </a:rPr>
+              <a:t>    </a:t>
+            </a:r>
+            <a:r>
+              <a:rPr>
+                <a:solidFill>
+                  <a:srgbClr val="657422"/>
+                </a:solidFill>
+                <a:latin typeface="Courier"/>
+              </a:rPr>
+              <a:t>ide =</a:t>
+            </a:r>
+            <a:r>
+              <a:rPr>
+                <a:solidFill>
+                  <a:srgbClr val="003B4F"/>
+                </a:solidFill>
+                <a:latin typeface="Courier"/>
+              </a:rPr>
+              <a:t> </a:t>
+            </a:r>
+            <a:r>
+              <a:rPr>
+                <a:solidFill>
+                  <a:srgbClr val="20794D"/>
+                </a:solidFill>
+                <a:latin typeface="Courier"/>
+              </a:rPr>
+              <a:t>"code"</a:t>
+            </a:r>
+            <a:r>
+              <a:rPr>
+                <a:solidFill>
+                  <a:srgbClr val="003B4F"/>
+                </a:solidFill>
+                <a:latin typeface="Courier"/>
+              </a:rPr>
+              <a:t>,</a:t>
+            </a:r>
+            <a:br/>
+            <a:r>
+              <a:rPr>
+                <a:solidFill>
+                  <a:srgbClr val="003B4F"/>
+                </a:solidFill>
+                <a:latin typeface="Courier"/>
+              </a:rPr>
+              <a:t>    </a:t>
+            </a:r>
+            <a:r>
+              <a:rPr>
+                <a:solidFill>
+                  <a:srgbClr val="657422"/>
+                </a:solidFill>
+                <a:latin typeface="Courier"/>
+              </a:rPr>
+              <a:t>project_path =</a:t>
+            </a:r>
+            <a:r>
+              <a:rPr>
+                <a:solidFill>
+                  <a:srgbClr val="003B4F"/>
+                </a:solidFill>
+                <a:latin typeface="Courier"/>
+              </a:rPr>
+              <a:t> </a:t>
+            </a:r>
+            <a:r>
+              <a:rPr>
+                <a:solidFill>
+                  <a:srgbClr val="20794D"/>
+                </a:solidFill>
+                <a:latin typeface="Courier"/>
+              </a:rPr>
+              <a:t>"."</a:t>
+            </a:r>
+            <a:r>
+              <a:rPr>
+                <a:solidFill>
+                  <a:srgbClr val="003B4F"/>
+                </a:solidFill>
+                <a:latin typeface="Courier"/>
+              </a:rPr>
+              <a:t>)</a:t>
             </a:r>
           </a:p>
         </p:txBody>
@@ -3850,7 +3817,7 @@
             </a:pPr>
             <a:r>
               <a:rPr/>
-              <a:t>Polyglot environments with rix</a:t>
+              <a:t>rix: reproducible development environments with Nix (2/2)</a:t>
             </a:r>
           </a:p>
         </p:txBody>
@@ -3875,545 +3842,68 @@
               <a:rPr>
                 <a:latin typeface="Courier"/>
               </a:rPr>
-              <a:t>rix()</a:t>
-            </a:r>
-            <a:r>
-              <a:rPr/>
-              <a:t> supports Python and Julia alongside R:</a:t>
-            </a:r>
-          </a:p>
-          <a:p>
-            <a:pPr lvl="0" indent="0" marL="0">
-              <a:buNone/>
-            </a:pPr>
-            <a:r>
-              <a:rPr/>
-              <a:t>. . .</a:t>
-            </a:r>
-          </a:p>
-          <a:p>
-            <a:pPr lvl="0" indent="0">
-              <a:buNone/>
-            </a:pPr>
-            <a:r>
-              <a:rPr>
-                <a:solidFill>
-                  <a:srgbClr val="4758AB"/>
-                </a:solidFill>
-                <a:latin typeface="Courier"/>
-              </a:rPr>
-              <a:t>rix</a:t>
-            </a:r>
-            <a:r>
-              <a:rPr>
-                <a:solidFill>
-                  <a:srgbClr val="003B4F"/>
-                </a:solidFill>
-                <a:latin typeface="Courier"/>
-              </a:rPr>
-              <a:t>(</a:t>
-            </a:r>
-            <a:r>
-              <a:rPr>
-                <a:solidFill>
-                  <a:srgbClr val="657422"/>
-                </a:solidFill>
-                <a:latin typeface="Courier"/>
-              </a:rPr>
-              <a:t>date =</a:t>
-            </a:r>
-            <a:r>
-              <a:rPr>
-                <a:solidFill>
-                  <a:srgbClr val="003B4F"/>
-                </a:solidFill>
-                <a:latin typeface="Courier"/>
-              </a:rPr>
-              <a:t> </a:t>
-            </a:r>
-            <a:r>
-              <a:rPr>
-                <a:solidFill>
-                  <a:srgbClr val="20794D"/>
-                </a:solidFill>
-                <a:latin typeface="Courier"/>
-              </a:rPr>
-              <a:t>"2025-06-09"</a:t>
-            </a:r>
-            <a:r>
-              <a:rPr>
-                <a:solidFill>
-                  <a:srgbClr val="003B4F"/>
-                </a:solidFill>
-                <a:latin typeface="Courier"/>
-              </a:rPr>
-              <a:t>,</a:t>
-            </a:r>
-            <a:br/>
-            <a:r>
-              <a:rPr>
-                <a:solidFill>
-                  <a:srgbClr val="003B4F"/>
-                </a:solidFill>
-                <a:latin typeface="Courier"/>
-              </a:rPr>
-              <a:t>    </a:t>
-            </a:r>
-            <a:r>
-              <a:rPr>
-                <a:solidFill>
-                  <a:srgbClr val="657422"/>
-                </a:solidFill>
-                <a:latin typeface="Courier"/>
-              </a:rPr>
-              <a:t>r_pkgs =</a:t>
-            </a:r>
-            <a:r>
-              <a:rPr>
-                <a:solidFill>
-                  <a:srgbClr val="003B4F"/>
-                </a:solidFill>
-                <a:latin typeface="Courier"/>
-              </a:rPr>
-              <a:t> </a:t>
-            </a:r>
-            <a:r>
-              <a:rPr>
-                <a:solidFill>
-                  <a:srgbClr val="4758AB"/>
-                </a:solidFill>
-                <a:latin typeface="Courier"/>
-              </a:rPr>
-              <a:t>c</a:t>
-            </a:r>
-            <a:r>
-              <a:rPr>
-                <a:solidFill>
-                  <a:srgbClr val="003B4F"/>
-                </a:solidFill>
-                <a:latin typeface="Courier"/>
-              </a:rPr>
-              <a:t>(</a:t>
-            </a:r>
-            <a:r>
-              <a:rPr>
-                <a:solidFill>
-                  <a:srgbClr val="20794D"/>
-                </a:solidFill>
-                <a:latin typeface="Courier"/>
-              </a:rPr>
-              <a:t>"tidyr"</a:t>
-            </a:r>
-            <a:r>
-              <a:rPr>
-                <a:solidFill>
-                  <a:srgbClr val="003B4F"/>
-                </a:solidFill>
-                <a:latin typeface="Courier"/>
-              </a:rPr>
-              <a:t>, </a:t>
-            </a:r>
-            <a:r>
-              <a:rPr>
-                <a:solidFill>
-                  <a:srgbClr val="20794D"/>
-                </a:solidFill>
-                <a:latin typeface="Courier"/>
-              </a:rPr>
-              <a:t>"dplyr"</a:t>
-            </a:r>
-            <a:r>
-              <a:rPr>
-                <a:solidFill>
-                  <a:srgbClr val="003B4F"/>
-                </a:solidFill>
-                <a:latin typeface="Courier"/>
-              </a:rPr>
-              <a:t>, </a:t>
-            </a:r>
-            <a:r>
-              <a:rPr>
-                <a:solidFill>
-                  <a:srgbClr val="20794D"/>
-                </a:solidFill>
-                <a:latin typeface="Courier"/>
-              </a:rPr>
-              <a:t>"ggplot2"</a:t>
-            </a:r>
-            <a:r>
-              <a:rPr>
-                <a:solidFill>
-                  <a:srgbClr val="003B4F"/>
-                </a:solidFill>
-                <a:latin typeface="Courier"/>
-              </a:rPr>
-              <a:t>, </a:t>
-            </a:r>
-            <a:r>
-              <a:rPr>
-                <a:solidFill>
-                  <a:srgbClr val="20794D"/>
-                </a:solidFill>
-                <a:latin typeface="Courier"/>
-              </a:rPr>
-              <a:t>"languageserver"</a:t>
-            </a:r>
-            <a:r>
-              <a:rPr>
-                <a:solidFill>
-                  <a:srgbClr val="003B4F"/>
-                </a:solidFill>
-                <a:latin typeface="Courier"/>
-              </a:rPr>
-              <a:t>),</a:t>
-            </a:r>
-            <a:br/>
-            <a:r>
-              <a:rPr>
-                <a:solidFill>
-                  <a:srgbClr val="003B4F"/>
-                </a:solidFill>
-                <a:latin typeface="Courier"/>
-              </a:rPr>
-              <a:t>    </a:t>
-            </a:r>
-            <a:r>
-              <a:rPr>
-                <a:solidFill>
-                  <a:srgbClr val="657422"/>
-                </a:solidFill>
-                <a:latin typeface="Courier"/>
-              </a:rPr>
-              <a:t>py_conf =</a:t>
-            </a:r>
-            <a:r>
-              <a:rPr>
-                <a:solidFill>
-                  <a:srgbClr val="003B4F"/>
-                </a:solidFill>
-                <a:latin typeface="Courier"/>
-              </a:rPr>
-              <a:t> </a:t>
-            </a:r>
-            <a:r>
-              <a:rPr>
-                <a:solidFill>
-                  <a:srgbClr val="4758AB"/>
-                </a:solidFill>
-                <a:latin typeface="Courier"/>
-              </a:rPr>
-              <a:t>list</a:t>
-            </a:r>
-            <a:r>
-              <a:rPr>
-                <a:solidFill>
-                  <a:srgbClr val="003B4F"/>
-                </a:solidFill>
-                <a:latin typeface="Courier"/>
-              </a:rPr>
-              <a:t>(</a:t>
-            </a:r>
-            <a:br/>
-            <a:r>
-              <a:rPr>
-                <a:solidFill>
-                  <a:srgbClr val="003B4F"/>
-                </a:solidFill>
-                <a:latin typeface="Courier"/>
-              </a:rPr>
-              <a:t>      </a:t>
-            </a:r>
-            <a:r>
-              <a:rPr>
-                <a:solidFill>
-                  <a:srgbClr val="657422"/>
-                </a:solidFill>
-                <a:latin typeface="Courier"/>
-              </a:rPr>
-              <a:t>py_version =</a:t>
-            </a:r>
-            <a:r>
-              <a:rPr>
-                <a:solidFill>
-                  <a:srgbClr val="003B4F"/>
-                </a:solidFill>
-                <a:latin typeface="Courier"/>
-              </a:rPr>
-              <a:t> </a:t>
-            </a:r>
-            <a:r>
-              <a:rPr>
-                <a:solidFill>
-                  <a:srgbClr val="20794D"/>
-                </a:solidFill>
-                <a:latin typeface="Courier"/>
-              </a:rPr>
-              <a:t>"3.13"</a:t>
-            </a:r>
-            <a:r>
-              <a:rPr>
-                <a:solidFill>
-                  <a:srgbClr val="003B4F"/>
-                </a:solidFill>
-                <a:latin typeface="Courier"/>
-              </a:rPr>
-              <a:t>, </a:t>
-            </a:r>
-            <a:br/>
-            <a:r>
-              <a:rPr>
-                <a:solidFill>
-                  <a:srgbClr val="003B4F"/>
-                </a:solidFill>
-                <a:latin typeface="Courier"/>
-              </a:rPr>
-              <a:t>      </a:t>
-            </a:r>
-            <a:r>
-              <a:rPr>
-                <a:solidFill>
-                  <a:srgbClr val="657422"/>
-                </a:solidFill>
-                <a:latin typeface="Courier"/>
-              </a:rPr>
-              <a:t>py_pkgs =</a:t>
-            </a:r>
-            <a:r>
-              <a:rPr>
-                <a:solidFill>
-                  <a:srgbClr val="003B4F"/>
-                </a:solidFill>
-                <a:latin typeface="Courier"/>
-              </a:rPr>
-              <a:t> </a:t>
-            </a:r>
-            <a:r>
-              <a:rPr>
-                <a:solidFill>
-                  <a:srgbClr val="4758AB"/>
-                </a:solidFill>
-                <a:latin typeface="Courier"/>
-              </a:rPr>
-              <a:t>c</a:t>
-            </a:r>
-            <a:r>
-              <a:rPr>
-                <a:solidFill>
-                  <a:srgbClr val="003B4F"/>
-                </a:solidFill>
-                <a:latin typeface="Courier"/>
-              </a:rPr>
-              <a:t>(</a:t>
-            </a:r>
-            <a:r>
-              <a:rPr>
-                <a:solidFill>
-                  <a:srgbClr val="20794D"/>
-                </a:solidFill>
-                <a:latin typeface="Courier"/>
-              </a:rPr>
-              <a:t>"polars"</a:t>
-            </a:r>
-            <a:r>
-              <a:rPr>
-                <a:solidFill>
-                  <a:srgbClr val="003B4F"/>
-                </a:solidFill>
-                <a:latin typeface="Courier"/>
-              </a:rPr>
-              <a:t>, </a:t>
-            </a:r>
-            <a:r>
-              <a:rPr>
-                <a:solidFill>
-                  <a:srgbClr val="20794D"/>
-                </a:solidFill>
-                <a:latin typeface="Courier"/>
-              </a:rPr>
-              <a:t>"scikit-learn"</a:t>
-            </a:r>
-            <a:r>
-              <a:rPr>
-                <a:solidFill>
-                  <a:srgbClr val="003B4F"/>
-                </a:solidFill>
-                <a:latin typeface="Courier"/>
-              </a:rPr>
-              <a:t>)</a:t>
-            </a:r>
-            <a:br/>
-            <a:r>
-              <a:rPr>
-                <a:solidFill>
-                  <a:srgbClr val="003B4F"/>
-                </a:solidFill>
-                <a:latin typeface="Courier"/>
-              </a:rPr>
-              <a:t>    ),</a:t>
-            </a:r>
-            <a:br/>
-            <a:r>
-              <a:rPr>
-                <a:solidFill>
-                  <a:srgbClr val="003B4F"/>
-                </a:solidFill>
-                <a:latin typeface="Courier"/>
-              </a:rPr>
-              <a:t>    </a:t>
-            </a:r>
-            <a:r>
-              <a:rPr>
-                <a:solidFill>
-                  <a:srgbClr val="657422"/>
-                </a:solidFill>
-                <a:latin typeface="Courier"/>
-              </a:rPr>
-              <a:t>ide =</a:t>
-            </a:r>
-            <a:r>
-              <a:rPr>
-                <a:solidFill>
-                  <a:srgbClr val="003B4F"/>
-                </a:solidFill>
-                <a:latin typeface="Courier"/>
-              </a:rPr>
-              <a:t> </a:t>
-            </a:r>
-            <a:r>
-              <a:rPr>
-                <a:solidFill>
-                  <a:srgbClr val="20794D"/>
-                </a:solidFill>
-                <a:latin typeface="Courier"/>
-              </a:rPr>
-              <a:t>"none"</a:t>
-            </a:r>
-            <a:r>
-              <a:rPr>
-                <a:solidFill>
-                  <a:srgbClr val="003B4F"/>
-                </a:solidFill>
-                <a:latin typeface="Courier"/>
-              </a:rPr>
-              <a:t>,</a:t>
-            </a:r>
-            <a:br/>
-            <a:r>
-              <a:rPr>
-                <a:solidFill>
-                  <a:srgbClr val="003B4F"/>
-                </a:solidFill>
-                <a:latin typeface="Courier"/>
-              </a:rPr>
-              <a:t>    </a:t>
-            </a:r>
-            <a:r>
-              <a:rPr>
-                <a:solidFill>
-                  <a:srgbClr val="657422"/>
-                </a:solidFill>
-                <a:latin typeface="Courier"/>
-              </a:rPr>
-              <a:t>project_path =</a:t>
-            </a:r>
-            <a:r>
-              <a:rPr>
-                <a:solidFill>
-                  <a:srgbClr val="003B4F"/>
-                </a:solidFill>
-                <a:latin typeface="Courier"/>
-              </a:rPr>
-              <a:t> </a:t>
-            </a:r>
-            <a:r>
-              <a:rPr>
-                <a:solidFill>
-                  <a:srgbClr val="20794D"/>
-                </a:solidFill>
-                <a:latin typeface="Courier"/>
-              </a:rPr>
-              <a:t>"."</a:t>
-            </a:r>
-            <a:r>
-              <a:rPr>
-                <a:solidFill>
-                  <a:srgbClr val="003B4F"/>
-                </a:solidFill>
-                <a:latin typeface="Courier"/>
-              </a:rPr>
-              <a:t>,</a:t>
-            </a:r>
-            <a:br/>
-            <a:r>
-              <a:rPr>
-                <a:solidFill>
-                  <a:srgbClr val="003B4F"/>
-                </a:solidFill>
-                <a:latin typeface="Courier"/>
-              </a:rPr>
-              <a:t>    </a:t>
-            </a:r>
-            <a:r>
-              <a:rPr>
-                <a:solidFill>
-                  <a:srgbClr val="657422"/>
-                </a:solidFill>
-                <a:latin typeface="Courier"/>
-              </a:rPr>
-              <a:t>overwrite =</a:t>
-            </a:r>
-            <a:r>
-              <a:rPr>
-                <a:solidFill>
-                  <a:srgbClr val="003B4F"/>
-                </a:solidFill>
-                <a:latin typeface="Courier"/>
-              </a:rPr>
-              <a:t> </a:t>
-            </a:r>
-            <a:r>
-              <a:rPr>
-                <a:solidFill>
-                  <a:srgbClr val="8F5902"/>
-                </a:solidFill>
-                <a:latin typeface="Courier"/>
-              </a:rPr>
-              <a:t>TRUE</a:t>
-            </a:r>
-            <a:r>
-              <a:rPr>
-                <a:solidFill>
-                  <a:srgbClr val="003B4F"/>
-                </a:solidFill>
-                <a:latin typeface="Courier"/>
-              </a:rPr>
-              <a:t>)</a:t>
+              <a:t>rix::rix()</a:t>
+            </a:r>
+            <a:r>
+              <a:rPr/>
+              <a:t> generates a </a:t>
+            </a:r>
+            <a:r>
+              <a:rPr>
+                <a:latin typeface="Courier"/>
+              </a:rPr>
+              <a:t>default.nix</a:t>
+            </a:r>
+            <a:r>
+              <a:rPr/>
+              <a:t> file</a:t>
             </a:r>
           </a:p>
           <a:p>
             <a:pPr lvl="0"/>
             <a:r>
               <a:rPr/>
-              <a:t>Julia: use </a:t>
-            </a:r>
-            <a:r>
-              <a:rPr>
-                <a:latin typeface="Courier"/>
-              </a:rPr>
-              <a:t>jl_conf = list(jl_version = "1.10", jl_pkgs = c(...))</a:t>
+              <a:t>Build the expressions with </a:t>
+            </a:r>
+            <a:r>
+              <a:rPr>
+                <a:latin typeface="Courier"/>
+              </a:rPr>
+              <a:t>nix-build</a:t>
+            </a:r>
+            <a:r>
+              <a:rPr/>
+              <a:t> (in terminal) or </a:t>
+            </a:r>
+            <a:r>
+              <a:rPr>
+                <a:latin typeface="Courier"/>
+              </a:rPr>
+              <a:t>rix::nix_build()</a:t>
+            </a:r>
+            <a:r>
+              <a:rPr/>
+              <a:t> from R</a:t>
             </a:r>
           </a:p>
           <a:p>
             <a:pPr lvl="0"/>
             <a:r>
               <a:rPr/>
-              <a:t>See: </a:t>
-            </a:r>
-            <a:r>
-              <a:rPr>
-                <a:latin typeface="Courier"/>
-              </a:rPr>
-              <a:t>scripts/nix_expressions/02_native_positron_example/</a:t>
+              <a:t>Access the development environment with </a:t>
+            </a:r>
+            <a:r>
+              <a:rPr>
+                <a:latin typeface="Courier"/>
+              </a:rPr>
+              <a:t>nix-shell</a:t>
+            </a:r>
+          </a:p>
+          <a:p>
+            <a:pPr lvl="0"/>
+            <a:r>
+              <a:rPr/>
+              <a:t>Expressions can be generated even without Nix installed (with some limitations)</a:t>
             </a:r>
           </a:p>
         </p:txBody>
@@ -4460,7 +3950,7 @@
             </a:pPr>
             <a:r>
               <a:rPr/>
-              <a:t>Demo</a:t>
+              <a:t>Polyglot environments with rix</a:t>
             </a:r>
           </a:p>
         </p:txBody>
@@ -4482,99 +3972,548 @@
           <a:p>
             <a:pPr lvl="0"/>
             <a:r>
-              <a:rPr/>
-              <a:t>Basics: </a:t>
-            </a:r>
-            <a:r>
-              <a:rPr>
-                <a:latin typeface="Courier"/>
-              </a:rPr>
-              <a:t>scripts/nix_expressions/01_rix_intro/</a:t>
+              <a:rPr>
+                <a:latin typeface="Courier"/>
+              </a:rPr>
+              <a:t>rix()</a:t>
+            </a:r>
+            <a:r>
+              <a:rPr/>
+              <a:t> supports Python and Julia alongside R:</a:t>
+            </a:r>
+          </a:p>
+          <a:p>
+            <a:pPr lvl="0" indent="0" marL="0">
+              <a:buNone/>
+            </a:pPr>
+            <a:r>
+              <a:rPr/>
+              <a:t>. . .</a:t>
+            </a:r>
+          </a:p>
+          <a:p>
+            <a:pPr lvl="0" indent="0">
+              <a:buNone/>
+            </a:pPr>
+            <a:r>
+              <a:rPr>
+                <a:solidFill>
+                  <a:srgbClr val="4758AB"/>
+                </a:solidFill>
+                <a:latin typeface="Courier"/>
+              </a:rPr>
+              <a:t>rix</a:t>
+            </a:r>
+            <a:r>
+              <a:rPr>
+                <a:solidFill>
+                  <a:srgbClr val="003B4F"/>
+                </a:solidFill>
+                <a:latin typeface="Courier"/>
+              </a:rPr>
+              <a:t>(</a:t>
+            </a:r>
+            <a:r>
+              <a:rPr>
+                <a:solidFill>
+                  <a:srgbClr val="657422"/>
+                </a:solidFill>
+                <a:latin typeface="Courier"/>
+              </a:rPr>
+              <a:t>date =</a:t>
+            </a:r>
+            <a:r>
+              <a:rPr>
+                <a:solidFill>
+                  <a:srgbClr val="003B4F"/>
+                </a:solidFill>
+                <a:latin typeface="Courier"/>
+              </a:rPr>
+              <a:t> </a:t>
+            </a:r>
+            <a:r>
+              <a:rPr>
+                <a:solidFill>
+                  <a:srgbClr val="20794D"/>
+                </a:solidFill>
+                <a:latin typeface="Courier"/>
+              </a:rPr>
+              <a:t>"2025-06-09"</a:t>
+            </a:r>
+            <a:r>
+              <a:rPr>
+                <a:solidFill>
+                  <a:srgbClr val="003B4F"/>
+                </a:solidFill>
+                <a:latin typeface="Courier"/>
+              </a:rPr>
+              <a:t>,</a:t>
+            </a:r>
+            <a:br/>
+            <a:r>
+              <a:rPr>
+                <a:solidFill>
+                  <a:srgbClr val="003B4F"/>
+                </a:solidFill>
+                <a:latin typeface="Courier"/>
+              </a:rPr>
+              <a:t>    </a:t>
+            </a:r>
+            <a:r>
+              <a:rPr>
+                <a:solidFill>
+                  <a:srgbClr val="657422"/>
+                </a:solidFill>
+                <a:latin typeface="Courier"/>
+              </a:rPr>
+              <a:t>r_pkgs =</a:t>
+            </a:r>
+            <a:r>
+              <a:rPr>
+                <a:solidFill>
+                  <a:srgbClr val="003B4F"/>
+                </a:solidFill>
+                <a:latin typeface="Courier"/>
+              </a:rPr>
+              <a:t> </a:t>
+            </a:r>
+            <a:r>
+              <a:rPr>
+                <a:solidFill>
+                  <a:srgbClr val="4758AB"/>
+                </a:solidFill>
+                <a:latin typeface="Courier"/>
+              </a:rPr>
+              <a:t>c</a:t>
+            </a:r>
+            <a:r>
+              <a:rPr>
+                <a:solidFill>
+                  <a:srgbClr val="003B4F"/>
+                </a:solidFill>
+                <a:latin typeface="Courier"/>
+              </a:rPr>
+              <a:t>(</a:t>
+            </a:r>
+            <a:r>
+              <a:rPr>
+                <a:solidFill>
+                  <a:srgbClr val="20794D"/>
+                </a:solidFill>
+                <a:latin typeface="Courier"/>
+              </a:rPr>
+              <a:t>"tidyr"</a:t>
+            </a:r>
+            <a:r>
+              <a:rPr>
+                <a:solidFill>
+                  <a:srgbClr val="003B4F"/>
+                </a:solidFill>
+                <a:latin typeface="Courier"/>
+              </a:rPr>
+              <a:t>, </a:t>
+            </a:r>
+            <a:r>
+              <a:rPr>
+                <a:solidFill>
+                  <a:srgbClr val="20794D"/>
+                </a:solidFill>
+                <a:latin typeface="Courier"/>
+              </a:rPr>
+              <a:t>"dplyr"</a:t>
+            </a:r>
+            <a:r>
+              <a:rPr>
+                <a:solidFill>
+                  <a:srgbClr val="003B4F"/>
+                </a:solidFill>
+                <a:latin typeface="Courier"/>
+              </a:rPr>
+              <a:t>, </a:t>
+            </a:r>
+            <a:r>
+              <a:rPr>
+                <a:solidFill>
+                  <a:srgbClr val="20794D"/>
+                </a:solidFill>
+                <a:latin typeface="Courier"/>
+              </a:rPr>
+              <a:t>"ggplot2"</a:t>
+            </a:r>
+            <a:r>
+              <a:rPr>
+                <a:solidFill>
+                  <a:srgbClr val="003B4F"/>
+                </a:solidFill>
+                <a:latin typeface="Courier"/>
+              </a:rPr>
+              <a:t>, </a:t>
+            </a:r>
+            <a:r>
+              <a:rPr>
+                <a:solidFill>
+                  <a:srgbClr val="20794D"/>
+                </a:solidFill>
+                <a:latin typeface="Courier"/>
+              </a:rPr>
+              <a:t>"languageserver"</a:t>
+            </a:r>
+            <a:r>
+              <a:rPr>
+                <a:solidFill>
+                  <a:srgbClr val="003B4F"/>
+                </a:solidFill>
+                <a:latin typeface="Courier"/>
+              </a:rPr>
+              <a:t>),</a:t>
+            </a:r>
+            <a:br/>
+            <a:r>
+              <a:rPr>
+                <a:solidFill>
+                  <a:srgbClr val="003B4F"/>
+                </a:solidFill>
+                <a:latin typeface="Courier"/>
+              </a:rPr>
+              <a:t>    </a:t>
+            </a:r>
+            <a:r>
+              <a:rPr>
+                <a:solidFill>
+                  <a:srgbClr val="657422"/>
+                </a:solidFill>
+                <a:latin typeface="Courier"/>
+              </a:rPr>
+              <a:t>py_conf =</a:t>
+            </a:r>
+            <a:r>
+              <a:rPr>
+                <a:solidFill>
+                  <a:srgbClr val="003B4F"/>
+                </a:solidFill>
+                <a:latin typeface="Courier"/>
+              </a:rPr>
+              <a:t> </a:t>
+            </a:r>
+            <a:r>
+              <a:rPr>
+                <a:solidFill>
+                  <a:srgbClr val="4758AB"/>
+                </a:solidFill>
+                <a:latin typeface="Courier"/>
+              </a:rPr>
+              <a:t>list</a:t>
+            </a:r>
+            <a:r>
+              <a:rPr>
+                <a:solidFill>
+                  <a:srgbClr val="003B4F"/>
+                </a:solidFill>
+                <a:latin typeface="Courier"/>
+              </a:rPr>
+              <a:t>(</a:t>
+            </a:r>
+            <a:br/>
+            <a:r>
+              <a:rPr>
+                <a:solidFill>
+                  <a:srgbClr val="003B4F"/>
+                </a:solidFill>
+                <a:latin typeface="Courier"/>
+              </a:rPr>
+              <a:t>      </a:t>
+            </a:r>
+            <a:r>
+              <a:rPr>
+                <a:solidFill>
+                  <a:srgbClr val="657422"/>
+                </a:solidFill>
+                <a:latin typeface="Courier"/>
+              </a:rPr>
+              <a:t>py_version =</a:t>
+            </a:r>
+            <a:r>
+              <a:rPr>
+                <a:solidFill>
+                  <a:srgbClr val="003B4F"/>
+                </a:solidFill>
+                <a:latin typeface="Courier"/>
+              </a:rPr>
+              <a:t> </a:t>
+            </a:r>
+            <a:r>
+              <a:rPr>
+                <a:solidFill>
+                  <a:srgbClr val="20794D"/>
+                </a:solidFill>
+                <a:latin typeface="Courier"/>
+              </a:rPr>
+              <a:t>"3.13"</a:t>
+            </a:r>
+            <a:r>
+              <a:rPr>
+                <a:solidFill>
+                  <a:srgbClr val="003B4F"/>
+                </a:solidFill>
+                <a:latin typeface="Courier"/>
+              </a:rPr>
+              <a:t>, </a:t>
+            </a:r>
+            <a:br/>
+            <a:r>
+              <a:rPr>
+                <a:solidFill>
+                  <a:srgbClr val="003B4F"/>
+                </a:solidFill>
+                <a:latin typeface="Courier"/>
+              </a:rPr>
+              <a:t>      </a:t>
+            </a:r>
+            <a:r>
+              <a:rPr>
+                <a:solidFill>
+                  <a:srgbClr val="657422"/>
+                </a:solidFill>
+                <a:latin typeface="Courier"/>
+              </a:rPr>
+              <a:t>py_pkgs =</a:t>
+            </a:r>
+            <a:r>
+              <a:rPr>
+                <a:solidFill>
+                  <a:srgbClr val="003B4F"/>
+                </a:solidFill>
+                <a:latin typeface="Courier"/>
+              </a:rPr>
+              <a:t> </a:t>
+            </a:r>
+            <a:r>
+              <a:rPr>
+                <a:solidFill>
+                  <a:srgbClr val="4758AB"/>
+                </a:solidFill>
+                <a:latin typeface="Courier"/>
+              </a:rPr>
+              <a:t>c</a:t>
+            </a:r>
+            <a:r>
+              <a:rPr>
+                <a:solidFill>
+                  <a:srgbClr val="003B4F"/>
+                </a:solidFill>
+                <a:latin typeface="Courier"/>
+              </a:rPr>
+              <a:t>(</a:t>
+            </a:r>
+            <a:r>
+              <a:rPr>
+                <a:solidFill>
+                  <a:srgbClr val="20794D"/>
+                </a:solidFill>
+                <a:latin typeface="Courier"/>
+              </a:rPr>
+              <a:t>"polars"</a:t>
+            </a:r>
+            <a:r>
+              <a:rPr>
+                <a:solidFill>
+                  <a:srgbClr val="003B4F"/>
+                </a:solidFill>
+                <a:latin typeface="Courier"/>
+              </a:rPr>
+              <a:t>, </a:t>
+            </a:r>
+            <a:r>
+              <a:rPr>
+                <a:solidFill>
+                  <a:srgbClr val="20794D"/>
+                </a:solidFill>
+                <a:latin typeface="Courier"/>
+              </a:rPr>
+              <a:t>"scikit-learn"</a:t>
+            </a:r>
+            <a:r>
+              <a:rPr>
+                <a:solidFill>
+                  <a:srgbClr val="003B4F"/>
+                </a:solidFill>
+                <a:latin typeface="Courier"/>
+              </a:rPr>
+              <a:t>)</a:t>
+            </a:r>
+            <a:br/>
+            <a:r>
+              <a:rPr>
+                <a:solidFill>
+                  <a:srgbClr val="003B4F"/>
+                </a:solidFill>
+                <a:latin typeface="Courier"/>
+              </a:rPr>
+              <a:t>    ),</a:t>
+            </a:r>
+            <a:br/>
+            <a:r>
+              <a:rPr>
+                <a:solidFill>
+                  <a:srgbClr val="003B4F"/>
+                </a:solidFill>
+                <a:latin typeface="Courier"/>
+              </a:rPr>
+              <a:t>    </a:t>
+            </a:r>
+            <a:r>
+              <a:rPr>
+                <a:solidFill>
+                  <a:srgbClr val="657422"/>
+                </a:solidFill>
+                <a:latin typeface="Courier"/>
+              </a:rPr>
+              <a:t>ide =</a:t>
+            </a:r>
+            <a:r>
+              <a:rPr>
+                <a:solidFill>
+                  <a:srgbClr val="003B4F"/>
+                </a:solidFill>
+                <a:latin typeface="Courier"/>
+              </a:rPr>
+              <a:t> </a:t>
+            </a:r>
+            <a:r>
+              <a:rPr>
+                <a:solidFill>
+                  <a:srgbClr val="20794D"/>
+                </a:solidFill>
+                <a:latin typeface="Courier"/>
+              </a:rPr>
+              <a:t>"none"</a:t>
+            </a:r>
+            <a:r>
+              <a:rPr>
+                <a:solidFill>
+                  <a:srgbClr val="003B4F"/>
+                </a:solidFill>
+                <a:latin typeface="Courier"/>
+              </a:rPr>
+              <a:t>,</a:t>
+            </a:r>
+            <a:br/>
+            <a:r>
+              <a:rPr>
+                <a:solidFill>
+                  <a:srgbClr val="003B4F"/>
+                </a:solidFill>
+                <a:latin typeface="Courier"/>
+              </a:rPr>
+              <a:t>    </a:t>
+            </a:r>
+            <a:r>
+              <a:rPr>
+                <a:solidFill>
+                  <a:srgbClr val="657422"/>
+                </a:solidFill>
+                <a:latin typeface="Courier"/>
+              </a:rPr>
+              <a:t>project_path =</a:t>
+            </a:r>
+            <a:r>
+              <a:rPr>
+                <a:solidFill>
+                  <a:srgbClr val="003B4F"/>
+                </a:solidFill>
+                <a:latin typeface="Courier"/>
+              </a:rPr>
+              <a:t> </a:t>
+            </a:r>
+            <a:r>
+              <a:rPr>
+                <a:solidFill>
+                  <a:srgbClr val="20794D"/>
+                </a:solidFill>
+                <a:latin typeface="Courier"/>
+              </a:rPr>
+              <a:t>"."</a:t>
+            </a:r>
+            <a:r>
+              <a:rPr>
+                <a:solidFill>
+                  <a:srgbClr val="003B4F"/>
+                </a:solidFill>
+                <a:latin typeface="Courier"/>
+              </a:rPr>
+              <a:t>,</a:t>
+            </a:r>
+            <a:br/>
+            <a:r>
+              <a:rPr>
+                <a:solidFill>
+                  <a:srgbClr val="003B4F"/>
+                </a:solidFill>
+                <a:latin typeface="Courier"/>
+              </a:rPr>
+              <a:t>    </a:t>
+            </a:r>
+            <a:r>
+              <a:rPr>
+                <a:solidFill>
+                  <a:srgbClr val="657422"/>
+                </a:solidFill>
+                <a:latin typeface="Courier"/>
+              </a:rPr>
+              <a:t>overwrite =</a:t>
+            </a:r>
+            <a:r>
+              <a:rPr>
+                <a:solidFill>
+                  <a:srgbClr val="003B4F"/>
+                </a:solidFill>
+                <a:latin typeface="Courier"/>
+              </a:rPr>
+              <a:t> </a:t>
+            </a:r>
+            <a:r>
+              <a:rPr>
+                <a:solidFill>
+                  <a:srgbClr val="8F5902"/>
+                </a:solidFill>
+                <a:latin typeface="Courier"/>
+              </a:rPr>
+              <a:t>TRUE</a:t>
+            </a:r>
+            <a:r>
+              <a:rPr>
+                <a:solidFill>
+                  <a:srgbClr val="003B4F"/>
+                </a:solidFill>
+                <a:latin typeface="Courier"/>
+              </a:rPr>
+              <a:t>)</a:t>
             </a:r>
           </a:p>
           <a:p>
             <a:pPr lvl="0"/>
             <a:r>
               <a:rPr/>
-              <a:t>Native VS Code/Positron on Windows: </a:t>
+              <a:t>Julia: use </a:t>
+            </a:r>
+            <a:r>
+              <a:rPr>
+                <a:latin typeface="Courier"/>
+              </a:rPr>
+              <a:t>jl_conf = list(jl_version = "1.10", jl_pkgs = c(...))</a:t>
+            </a:r>
+          </a:p>
+          <a:p>
+            <a:pPr lvl="0"/>
+            <a:r>
+              <a:rPr/>
+              <a:t>See: </a:t>
             </a:r>
             <a:r>
               <a:rPr>
                 <a:latin typeface="Courier"/>
               </a:rPr>
               <a:t>scripts/nix_expressions/02_native_positron_example/</a:t>
-            </a:r>
-          </a:p>
-          <a:p>
-            <a:pPr lvl="0"/>
-            <a:r>
-              <a:rPr/>
-              <a:t>Nix and </a:t>
-            </a:r>
-            <a:r>
-              <a:rPr>
-                <a:latin typeface="Courier"/>
-              </a:rPr>
-              <a:t>{targets}</a:t>
-            </a:r>
-            <a:r>
-              <a:rPr/>
-              <a:t>: </a:t>
-            </a:r>
-            <a:r>
-              <a:rPr>
-                <a:latin typeface="Courier"/>
-              </a:rPr>
-              <a:t>scripts/nix_expressions/03_nix_targets_pipeline</a:t>
-            </a:r>
-          </a:p>
-          <a:p>
-            <a:pPr lvl="0"/>
-            <a:r>
-              <a:rPr/>
-              <a:t>Nix and Docker: </a:t>
-            </a:r>
-            <a:r>
-              <a:rPr>
-                <a:latin typeface="Courier"/>
-              </a:rPr>
-              <a:t>scripts/nix_expressions/04_docker/</a:t>
-            </a:r>
-          </a:p>
-          <a:p>
-            <a:pPr lvl="0"/>
-            <a:r>
-              <a:rPr/>
-              <a:t>Nix and </a:t>
-            </a:r>
-            <a:r>
-              <a:rPr>
-                <a:latin typeface="Courier"/>
-              </a:rPr>
-              <a:t>{shiny}</a:t>
-            </a:r>
-            <a:r>
-              <a:rPr/>
-              <a:t>: </a:t>
-            </a:r>
-            <a:r>
-              <a:rPr>
-                <a:latin typeface="Courier"/>
-              </a:rPr>
-              <a:t>scripts/nix_expressions/05_shiny</a:t>
-            </a:r>
-          </a:p>
-          <a:p>
-            <a:pPr lvl="0"/>
-            <a:r>
-              <a:rPr/>
-              <a:t>GitHub Actions: </a:t>
-            </a:r>
-            <a:r>
-              <a:rPr>
-                <a:hlinkClick r:id="rId2"/>
-              </a:rPr>
-              <a:t>see here</a:t>
             </a:r>
           </a:p>
         </p:txBody>
@@ -4621,13 +4560,7 @@
             </a:pPr>
             <a:r>
               <a:rPr/>
-              <a:t>Polyglot pipelines with </a:t>
-            </a:r>
-            <a:r>
-              <a:rPr>
-                <a:latin typeface="Courier"/>
-              </a:rPr>
-              <a:t>{rixpress}</a:t>
+              <a:t>Demo</a:t>
             </a:r>
           </a:p>
         </p:txBody>
@@ -4649,59 +4582,99 @@
           <a:p>
             <a:pPr lvl="0"/>
             <a:r>
-              <a:rPr>
-                <a:latin typeface="Courier"/>
-              </a:rPr>
-              <a:t>{rixpress}</a:t>
-            </a:r>
-            <a:r>
-              <a:rPr/>
-              <a:t> allows chaining processing steps in R, Python and Julia</a:t>
+              <a:rPr/>
+              <a:t>Basics: </a:t>
+            </a:r>
+            <a:r>
+              <a:rPr>
+                <a:latin typeface="Courier"/>
+              </a:rPr>
+              <a:t>scripts/nix_expressions/01_rix_intro/</a:t>
             </a:r>
           </a:p>
           <a:p>
             <a:pPr lvl="0"/>
             <a:r>
               <a:rPr/>
-              <a:t>Uses </a:t>
-            </a:r>
-            <a:r>
-              <a:rPr>
-                <a:latin typeface="Courier"/>
-              </a:rPr>
-              <a:t>{rix}</a:t>
-            </a:r>
-            <a:r>
-              <a:rPr/>
-              <a:t> to create a reproducible (via Nix) execution environment for the pipeline</a:t>
+              <a:t>Native VS Code/Positron on Windows: </a:t>
+            </a:r>
+            <a:r>
+              <a:rPr>
+                <a:latin typeface="Courier"/>
+              </a:rPr>
+              <a:t>scripts/nix_expressions/02_native_positron_example/</a:t>
             </a:r>
           </a:p>
           <a:p>
             <a:pPr lvl="0"/>
             <a:r>
               <a:rPr/>
-              <a:t>Each pipeline step is a </a:t>
-            </a:r>
-            <a:r>
-              <a:rPr b="1"/>
-              <a:t>Nix derivation</a:t>
+              <a:t>Nix and </a:t>
+            </a:r>
+            <a:r>
+              <a:rPr>
+                <a:latin typeface="Courier"/>
+              </a:rPr>
+              <a:t>{targets}</a:t>
+            </a:r>
+            <a:r>
+              <a:rPr/>
+              <a:t>: </a:t>
+            </a:r>
+            <a:r>
+              <a:rPr>
+                <a:latin typeface="Courier"/>
+              </a:rPr>
+              <a:t>scripts/nix_expressions/03_nix_targets_pipeline</a:t>
             </a:r>
           </a:p>
           <a:p>
             <a:pPr lvl="0"/>
             <a:r>
               <a:rPr/>
-              <a:t>Data transfer: automatic via </a:t>
-            </a:r>
-            <a:r>
-              <a:rPr>
-                <a:latin typeface="Courier"/>
-              </a:rPr>
-              <a:t>reticulate</a:t>
-            </a:r>
-            <a:r>
-              <a:rPr/>
-              <a:t> or universal format (JSON)</a:t>
+              <a:t>Nix and Docker: </a:t>
+            </a:r>
+            <a:r>
+              <a:rPr>
+                <a:latin typeface="Courier"/>
+              </a:rPr>
+              <a:t>scripts/nix_expressions/04_docker/</a:t>
+            </a:r>
+          </a:p>
+          <a:p>
+            <a:pPr lvl="0"/>
+            <a:r>
+              <a:rPr/>
+              <a:t>Nix and </a:t>
+            </a:r>
+            <a:r>
+              <a:rPr>
+                <a:latin typeface="Courier"/>
+              </a:rPr>
+              <a:t>{shiny}</a:t>
+            </a:r>
+            <a:r>
+              <a:rPr/>
+              <a:t>: </a:t>
+            </a:r>
+            <a:r>
+              <a:rPr>
+                <a:latin typeface="Courier"/>
+              </a:rPr>
+              <a:t>scripts/nix_expressions/05_shiny</a:t>
+            </a:r>
+          </a:p>
+          <a:p>
+            <a:pPr lvl="0"/>
+            <a:r>
+              <a:rPr/>
+              <a:t>GitHub Actions: </a:t>
+            </a:r>
+            <a:r>
+              <a:rPr>
+                <a:hlinkClick r:id="rId2"/>
+              </a:rPr>
+              <a:t>see here</a:t>
             </a:r>
           </a:p>
         </p:txBody>
@@ -4748,7 +4721,13 @@
             </a:pPr>
             <a:r>
               <a:rPr/>
-              <a:t>An example of a polyglot pipeline</a:t>
+              <a:t>Polyglot pipelines with </a:t>
+            </a:r>
+            <a:r>
+              <a:rPr>
+                <a:latin typeface="Courier"/>
+              </a:rPr>
+              <a:t>{rixpress}</a:t>
             </a:r>
           </a:p>
         </p:txBody>
@@ -4768,422 +4747,61 @@
           <a:bodyPr/>
           <a:lstStyle/>
           <a:p>
-            <a:pPr lvl="0" indent="0">
-              <a:buNone/>
-            </a:pPr>
-            <a:r>
-              <a:rPr>
-                <a:solidFill>
-                  <a:srgbClr val="4758AB"/>
-                </a:solidFill>
-                <a:latin typeface="Courier"/>
-              </a:rPr>
-              <a:t>list</a:t>
-            </a:r>
-            <a:r>
-              <a:rPr>
-                <a:solidFill>
-                  <a:srgbClr val="003B4F"/>
-                </a:solidFill>
-                <a:latin typeface="Courier"/>
-              </a:rPr>
-              <a:t>(</a:t>
-            </a:r>
-            <a:br/>
-            <a:r>
-              <a:rPr>
-                <a:solidFill>
-                  <a:srgbClr val="003B4F"/>
-                </a:solidFill>
-                <a:latin typeface="Courier"/>
-              </a:rPr>
-              <a:t>  </a:t>
-            </a:r>
-            <a:r>
-              <a:rPr>
-                <a:solidFill>
-                  <a:srgbClr val="4758AB"/>
-                </a:solidFill>
-                <a:latin typeface="Courier"/>
-              </a:rPr>
-              <a:t>rxp_py_file</a:t>
-            </a:r>
-            <a:r>
-              <a:rPr>
-                <a:solidFill>
-                  <a:srgbClr val="003B4F"/>
-                </a:solidFill>
-                <a:latin typeface="Courier"/>
-              </a:rPr>
-              <a:t>(…),    </a:t>
-            </a:r>
-            <a:r>
-              <a:rPr>
-                <a:solidFill>
-                  <a:srgbClr val="5E5E5E"/>
-                </a:solidFill>
-                <a:latin typeface="Courier"/>
-              </a:rPr>
-              <a:t># Read a CSV with Python</a:t>
-            </a:r>
-            <a:br/>
-            <a:r>
-              <a:rPr>
-                <a:solidFill>
-                  <a:srgbClr val="003B4F"/>
-                </a:solidFill>
-                <a:latin typeface="Courier"/>
-              </a:rPr>
-              <a:t>  </a:t>
-            </a:r>
-            <a:r>
-              <a:rPr>
-                <a:solidFill>
-                  <a:srgbClr val="4758AB"/>
-                </a:solidFill>
-                <a:latin typeface="Courier"/>
-              </a:rPr>
-              <a:t>rxp_py</a:t>
-            </a:r>
-            <a:r>
-              <a:rPr>
-                <a:solidFill>
-                  <a:srgbClr val="003B4F"/>
-                </a:solidFill>
-                <a:latin typeface="Courier"/>
-              </a:rPr>
-              <a:t>(…),         </a:t>
-            </a:r>
-            <a:r>
-              <a:rPr>
-                <a:solidFill>
-                  <a:srgbClr val="5E5E5E"/>
-                </a:solidFill>
-                <a:latin typeface="Courier"/>
-              </a:rPr>
-              <a:t># Filter with Polars</a:t>
-            </a:r>
-            <a:br/>
-            <a:r>
-              <a:rPr>
-                <a:solidFill>
-                  <a:srgbClr val="003B4F"/>
-                </a:solidFill>
-                <a:latin typeface="Courier"/>
-              </a:rPr>
-              <a:t>  </a:t>
-            </a:r>
-            <a:r>
-              <a:rPr>
-                <a:solidFill>
-                  <a:srgbClr val="4758AB"/>
-                </a:solidFill>
-                <a:latin typeface="Courier"/>
-              </a:rPr>
-              <a:t>rxp_py2r</a:t>
-            </a:r>
-            <a:r>
-              <a:rPr>
-                <a:solidFill>
-                  <a:srgbClr val="003B4F"/>
-                </a:solidFill>
-                <a:latin typeface="Courier"/>
-              </a:rPr>
-              <a:t>(…),       </a:t>
-            </a:r>
-            <a:r>
-              <a:rPr>
-                <a:solidFill>
-                  <a:srgbClr val="5E5E5E"/>
-                </a:solidFill>
-                <a:latin typeface="Courier"/>
-              </a:rPr>
-              <a:t># Python → R transfer</a:t>
-            </a:r>
-            <a:br/>
-            <a:r>
-              <a:rPr>
-                <a:solidFill>
-                  <a:srgbClr val="003B4F"/>
-                </a:solidFill>
-                <a:latin typeface="Courier"/>
-              </a:rPr>
-              <a:t>  </a:t>
-            </a:r>
-            <a:r>
-              <a:rPr>
-                <a:solidFill>
-                  <a:srgbClr val="4758AB"/>
-                </a:solidFill>
-                <a:latin typeface="Courier"/>
-              </a:rPr>
-              <a:t>rxp_r</a:t>
-            </a:r>
-            <a:r>
-              <a:rPr>
-                <a:solidFill>
-                  <a:srgbClr val="003B4F"/>
-                </a:solidFill>
-                <a:latin typeface="Courier"/>
-              </a:rPr>
-              <a:t>(…),          </a:t>
-            </a:r>
-            <a:r>
-              <a:rPr>
-                <a:solidFill>
-                  <a:srgbClr val="5E5E5E"/>
-                </a:solidFill>
-                <a:latin typeface="Courier"/>
-              </a:rPr>
-              <a:t># Transformation in R</a:t>
-            </a:r>
-            <a:br/>
-            <a:r>
-              <a:rPr>
-                <a:solidFill>
-                  <a:srgbClr val="003B4F"/>
-                </a:solidFill>
-                <a:latin typeface="Courier"/>
-              </a:rPr>
-              <a:t>  </a:t>
-            </a:r>
-            <a:r>
-              <a:rPr>
-                <a:solidFill>
-                  <a:srgbClr val="4758AB"/>
-                </a:solidFill>
-                <a:latin typeface="Courier"/>
-              </a:rPr>
-              <a:t>rxp_r2py</a:t>
-            </a:r>
-            <a:r>
-              <a:rPr>
-                <a:solidFill>
-                  <a:srgbClr val="003B4F"/>
-                </a:solidFill>
-                <a:latin typeface="Courier"/>
-              </a:rPr>
-              <a:t>(…),       </a:t>
-            </a:r>
-            <a:r>
-              <a:rPr>
-                <a:solidFill>
-                  <a:srgbClr val="5E5E5E"/>
-                </a:solidFill>
-                <a:latin typeface="Courier"/>
-              </a:rPr>
-              <a:t># R → Python transfer</a:t>
-            </a:r>
-            <a:br/>
-            <a:r>
-              <a:rPr>
-                <a:solidFill>
-                  <a:srgbClr val="003B4F"/>
-                </a:solidFill>
-                <a:latin typeface="Courier"/>
-              </a:rPr>
-              <a:t>  </a:t>
-            </a:r>
-            <a:r>
-              <a:rPr>
-                <a:solidFill>
-                  <a:srgbClr val="4758AB"/>
-                </a:solidFill>
-                <a:latin typeface="Courier"/>
-              </a:rPr>
-              <a:t>rxp_py</a:t>
-            </a:r>
-            <a:r>
-              <a:rPr>
-                <a:solidFill>
-                  <a:srgbClr val="003B4F"/>
-                </a:solidFill>
-                <a:latin typeface="Courier"/>
-              </a:rPr>
-              <a:t>(…),         </a:t>
-            </a:r>
-            <a:r>
-              <a:rPr>
-                <a:solidFill>
-                  <a:srgbClr val="5E5E5E"/>
-                </a:solidFill>
-                <a:latin typeface="Courier"/>
-              </a:rPr>
-              <a:t># Another Python step</a:t>
-            </a:r>
-            <a:br/>
-            <a:r>
-              <a:rPr>
-                <a:solidFill>
-                  <a:srgbClr val="003B4F"/>
-                </a:solidFill>
-                <a:latin typeface="Courier"/>
-              </a:rPr>
-              <a:t>  </a:t>
-            </a:r>
-            <a:r>
-              <a:rPr>
-                <a:solidFill>
-                  <a:srgbClr val="4758AB"/>
-                </a:solidFill>
-                <a:latin typeface="Courier"/>
-              </a:rPr>
-              <a:t>rxp_py2r</a:t>
-            </a:r>
-            <a:r>
-              <a:rPr>
-                <a:solidFill>
-                  <a:srgbClr val="003B4F"/>
-                </a:solidFill>
-                <a:latin typeface="Courier"/>
-              </a:rPr>
-              <a:t>(…),       </a:t>
-            </a:r>
-            <a:r>
-              <a:rPr>
-                <a:solidFill>
-                  <a:srgbClr val="5E5E5E"/>
-                </a:solidFill>
-                <a:latin typeface="Courier"/>
-              </a:rPr>
-              <a:t># Back to R</a:t>
-            </a:r>
-            <a:br/>
-            <a:r>
-              <a:rPr>
-                <a:solidFill>
-                  <a:srgbClr val="003B4F"/>
-                </a:solidFill>
-                <a:latin typeface="Courier"/>
-              </a:rPr>
-              <a:t>  </a:t>
-            </a:r>
-            <a:r>
-              <a:rPr>
-                <a:solidFill>
-                  <a:srgbClr val="4758AB"/>
-                </a:solidFill>
-                <a:latin typeface="Courier"/>
-              </a:rPr>
-              <a:t>rxp_r</a:t>
-            </a:r>
-            <a:r>
-              <a:rPr>
-                <a:solidFill>
-                  <a:srgbClr val="003B4F"/>
-                </a:solidFill>
-                <a:latin typeface="Courier"/>
-              </a:rPr>
-              <a:t>(…)           </a:t>
-            </a:r>
-            <a:r>
-              <a:rPr>
-                <a:solidFill>
-                  <a:srgbClr val="5E5E5E"/>
-                </a:solidFill>
-                <a:latin typeface="Courier"/>
-              </a:rPr>
-              <a:t># Final step</a:t>
-            </a:r>
-            <a:br/>
-            <a:r>
-              <a:rPr>
-                <a:solidFill>
-                  <a:srgbClr val="003B4F"/>
-                </a:solidFill>
-                <a:latin typeface="Courier"/>
-              </a:rPr>
-              <a:t>) </a:t>
-            </a:r>
-            <a:r>
-              <a:rPr>
-                <a:solidFill>
-                  <a:srgbClr val="5E5E5E"/>
-                </a:solidFill>
-                <a:latin typeface="Courier"/>
-              </a:rPr>
-              <a:t>|&gt;</a:t>
-            </a:r>
-            <a:r>
-              <a:rPr>
-                <a:solidFill>
-                  <a:srgbClr val="003B4F"/>
-                </a:solidFill>
-                <a:latin typeface="Courier"/>
-              </a:rPr>
-              <a:t> </a:t>
-            </a:r>
-            <a:r>
-              <a:rPr>
-                <a:solidFill>
-                  <a:srgbClr val="4758AB"/>
-                </a:solidFill>
-                <a:latin typeface="Courier"/>
-              </a:rPr>
-              <a:t>rixpress</a:t>
-            </a:r>
-            <a:r>
-              <a:rPr>
-                <a:solidFill>
-                  <a:srgbClr val="003B4F"/>
-                </a:solidFill>
-                <a:latin typeface="Courier"/>
-              </a:rPr>
-              <a:t>()</a:t>
-            </a:r>
-          </a:p>
-          <a:p>
             <a:pPr lvl="0"/>
             <a:r>
-              <a:rPr/>
-              <a:t>Each step is named and typed (</a:t>
-            </a:r>
-            <a:r>
-              <a:rPr>
-                <a:latin typeface="Courier"/>
-              </a:rPr>
-              <a:t>py</a:t>
-            </a:r>
-            <a:r>
-              <a:rPr/>
-              <a:t>, </a:t>
-            </a:r>
-            <a:r>
-              <a:rPr>
-                <a:latin typeface="Courier"/>
-              </a:rPr>
-              <a:t>r</a:t>
-            </a:r>
-            <a:r>
-              <a:rPr/>
-              <a:t>, </a:t>
-            </a:r>
-            <a:r>
-              <a:rPr>
-                <a:latin typeface="Courier"/>
-              </a:rPr>
-              <a:t>r2py</a:t>
-            </a:r>
-            <a:r>
-              <a:rPr/>
-              <a:t>, etc.)</a:t>
+              <a:rPr>
+                <a:latin typeface="Courier"/>
+              </a:rPr>
+              <a:t>{rixpress}</a:t>
+            </a:r>
+            <a:r>
+              <a:rPr/>
+              <a:t> allows chaining processing steps in R, Python and Julia</a:t>
             </a:r>
           </a:p>
           <a:p>
             <a:pPr lvl="0"/>
             <a:r>
               <a:rPr/>
-              <a:t>Ability to add files (</a:t>
-            </a:r>
-            <a:r>
-              <a:rPr>
-                <a:latin typeface="Courier"/>
-              </a:rPr>
-              <a:t>functions.R</a:t>
-            </a:r>
-            <a:r>
-              <a:rPr/>
-              <a:t>, images…)</a:t>
+              <a:t>Uses </a:t>
+            </a:r>
+            <a:r>
+              <a:rPr>
+                <a:latin typeface="Courier"/>
+              </a:rPr>
+              <a:t>{rix}</a:t>
+            </a:r>
+            <a:r>
+              <a:rPr/>
+              <a:t> to create a reproducible (via Nix) execution environment for the pipeline</a:t>
+            </a:r>
+          </a:p>
+          <a:p>
+            <a:pPr lvl="0"/>
+            <a:r>
+              <a:rPr/>
+              <a:t>Each pipeline step is a </a:t>
+            </a:r>
+            <a:r>
+              <a:rPr b="1"/>
+              <a:t>Nix derivation</a:t>
+            </a:r>
+          </a:p>
+          <a:p>
+            <a:pPr lvl="0"/>
+            <a:r>
+              <a:rPr/>
+              <a:t>Data transfer: automatic via </a:t>
+            </a:r>
+            <a:r>
+              <a:rPr>
+                <a:latin typeface="Courier"/>
+              </a:rPr>
+              <a:t>reticulate</a:t>
+            </a:r>
+            <a:r>
+              <a:rPr/>
+              <a:t> or universal format (JSON)</a:t>
             </a:r>
           </a:p>
         </p:txBody>
@@ -5230,7 +4848,7 @@
             </a:pPr>
             <a:r>
               <a:rPr/>
-              <a:t>To learn more about rixpress:</a:t>
+              <a:t>An example of a polyglot pipeline</a:t>
             </a:r>
           </a:p>
         </p:txBody>
@@ -5250,30 +4868,422 @@
           <a:bodyPr/>
           <a:lstStyle/>
           <a:p>
+            <a:pPr lvl="0" indent="0">
+              <a:buNone/>
+            </a:pPr>
+            <a:r>
+              <a:rPr>
+                <a:solidFill>
+                  <a:srgbClr val="4758AB"/>
+                </a:solidFill>
+                <a:latin typeface="Courier"/>
+              </a:rPr>
+              <a:t>list</a:t>
+            </a:r>
+            <a:r>
+              <a:rPr>
+                <a:solidFill>
+                  <a:srgbClr val="003B4F"/>
+                </a:solidFill>
+                <a:latin typeface="Courier"/>
+              </a:rPr>
+              <a:t>(</a:t>
+            </a:r>
+            <a:br/>
+            <a:r>
+              <a:rPr>
+                <a:solidFill>
+                  <a:srgbClr val="003B4F"/>
+                </a:solidFill>
+                <a:latin typeface="Courier"/>
+              </a:rPr>
+              <a:t>  </a:t>
+            </a:r>
+            <a:r>
+              <a:rPr>
+                <a:solidFill>
+                  <a:srgbClr val="4758AB"/>
+                </a:solidFill>
+                <a:latin typeface="Courier"/>
+              </a:rPr>
+              <a:t>rxp_py_file</a:t>
+            </a:r>
+            <a:r>
+              <a:rPr>
+                <a:solidFill>
+                  <a:srgbClr val="003B4F"/>
+                </a:solidFill>
+                <a:latin typeface="Courier"/>
+              </a:rPr>
+              <a:t>(…),    </a:t>
+            </a:r>
+            <a:r>
+              <a:rPr>
+                <a:solidFill>
+                  <a:srgbClr val="5E5E5E"/>
+                </a:solidFill>
+                <a:latin typeface="Courier"/>
+              </a:rPr>
+              <a:t># Read a CSV with Python</a:t>
+            </a:r>
+            <a:br/>
+            <a:r>
+              <a:rPr>
+                <a:solidFill>
+                  <a:srgbClr val="003B4F"/>
+                </a:solidFill>
+                <a:latin typeface="Courier"/>
+              </a:rPr>
+              <a:t>  </a:t>
+            </a:r>
+            <a:r>
+              <a:rPr>
+                <a:solidFill>
+                  <a:srgbClr val="4758AB"/>
+                </a:solidFill>
+                <a:latin typeface="Courier"/>
+              </a:rPr>
+              <a:t>rxp_py</a:t>
+            </a:r>
+            <a:r>
+              <a:rPr>
+                <a:solidFill>
+                  <a:srgbClr val="003B4F"/>
+                </a:solidFill>
+                <a:latin typeface="Courier"/>
+              </a:rPr>
+              <a:t>(…),         </a:t>
+            </a:r>
+            <a:r>
+              <a:rPr>
+                <a:solidFill>
+                  <a:srgbClr val="5E5E5E"/>
+                </a:solidFill>
+                <a:latin typeface="Courier"/>
+              </a:rPr>
+              <a:t># Filter with Polars</a:t>
+            </a:r>
+            <a:br/>
+            <a:r>
+              <a:rPr>
+                <a:solidFill>
+                  <a:srgbClr val="003B4F"/>
+                </a:solidFill>
+                <a:latin typeface="Courier"/>
+              </a:rPr>
+              <a:t>  </a:t>
+            </a:r>
+            <a:r>
+              <a:rPr>
+                <a:solidFill>
+                  <a:srgbClr val="4758AB"/>
+                </a:solidFill>
+                <a:latin typeface="Courier"/>
+              </a:rPr>
+              <a:t>rxp_py2r</a:t>
+            </a:r>
+            <a:r>
+              <a:rPr>
+                <a:solidFill>
+                  <a:srgbClr val="003B4F"/>
+                </a:solidFill>
+                <a:latin typeface="Courier"/>
+              </a:rPr>
+              <a:t>(…),       </a:t>
+            </a:r>
+            <a:r>
+              <a:rPr>
+                <a:solidFill>
+                  <a:srgbClr val="5E5E5E"/>
+                </a:solidFill>
+                <a:latin typeface="Courier"/>
+              </a:rPr>
+              <a:t># Python → R transfer</a:t>
+            </a:r>
+            <a:br/>
+            <a:r>
+              <a:rPr>
+                <a:solidFill>
+                  <a:srgbClr val="003B4F"/>
+                </a:solidFill>
+                <a:latin typeface="Courier"/>
+              </a:rPr>
+              <a:t>  </a:t>
+            </a:r>
+            <a:r>
+              <a:rPr>
+                <a:solidFill>
+                  <a:srgbClr val="4758AB"/>
+                </a:solidFill>
+                <a:latin typeface="Courier"/>
+              </a:rPr>
+              <a:t>rxp_r</a:t>
+            </a:r>
+            <a:r>
+              <a:rPr>
+                <a:solidFill>
+                  <a:srgbClr val="003B4F"/>
+                </a:solidFill>
+                <a:latin typeface="Courier"/>
+              </a:rPr>
+              <a:t>(…),          </a:t>
+            </a:r>
+            <a:r>
+              <a:rPr>
+                <a:solidFill>
+                  <a:srgbClr val="5E5E5E"/>
+                </a:solidFill>
+                <a:latin typeface="Courier"/>
+              </a:rPr>
+              <a:t># Transformation in R</a:t>
+            </a:r>
+            <a:br/>
+            <a:r>
+              <a:rPr>
+                <a:solidFill>
+                  <a:srgbClr val="003B4F"/>
+                </a:solidFill>
+                <a:latin typeface="Courier"/>
+              </a:rPr>
+              <a:t>  </a:t>
+            </a:r>
+            <a:r>
+              <a:rPr>
+                <a:solidFill>
+                  <a:srgbClr val="4758AB"/>
+                </a:solidFill>
+                <a:latin typeface="Courier"/>
+              </a:rPr>
+              <a:t>rxp_r2py</a:t>
+            </a:r>
+            <a:r>
+              <a:rPr>
+                <a:solidFill>
+                  <a:srgbClr val="003B4F"/>
+                </a:solidFill>
+                <a:latin typeface="Courier"/>
+              </a:rPr>
+              <a:t>(…),       </a:t>
+            </a:r>
+            <a:r>
+              <a:rPr>
+                <a:solidFill>
+                  <a:srgbClr val="5E5E5E"/>
+                </a:solidFill>
+                <a:latin typeface="Courier"/>
+              </a:rPr>
+              <a:t># R → Python transfer</a:t>
+            </a:r>
+            <a:br/>
+            <a:r>
+              <a:rPr>
+                <a:solidFill>
+                  <a:srgbClr val="003B4F"/>
+                </a:solidFill>
+                <a:latin typeface="Courier"/>
+              </a:rPr>
+              <a:t>  </a:t>
+            </a:r>
+            <a:r>
+              <a:rPr>
+                <a:solidFill>
+                  <a:srgbClr val="4758AB"/>
+                </a:solidFill>
+                <a:latin typeface="Courier"/>
+              </a:rPr>
+              <a:t>rxp_py</a:t>
+            </a:r>
+            <a:r>
+              <a:rPr>
+                <a:solidFill>
+                  <a:srgbClr val="003B4F"/>
+                </a:solidFill>
+                <a:latin typeface="Courier"/>
+              </a:rPr>
+              <a:t>(…),         </a:t>
+            </a:r>
+            <a:r>
+              <a:rPr>
+                <a:solidFill>
+                  <a:srgbClr val="5E5E5E"/>
+                </a:solidFill>
+                <a:latin typeface="Courier"/>
+              </a:rPr>
+              <a:t># Another Python step</a:t>
+            </a:r>
+            <a:br/>
+            <a:r>
+              <a:rPr>
+                <a:solidFill>
+                  <a:srgbClr val="003B4F"/>
+                </a:solidFill>
+                <a:latin typeface="Courier"/>
+              </a:rPr>
+              <a:t>  </a:t>
+            </a:r>
+            <a:r>
+              <a:rPr>
+                <a:solidFill>
+                  <a:srgbClr val="4758AB"/>
+                </a:solidFill>
+                <a:latin typeface="Courier"/>
+              </a:rPr>
+              <a:t>rxp_py2r</a:t>
+            </a:r>
+            <a:r>
+              <a:rPr>
+                <a:solidFill>
+                  <a:srgbClr val="003B4F"/>
+                </a:solidFill>
+                <a:latin typeface="Courier"/>
+              </a:rPr>
+              <a:t>(…),       </a:t>
+            </a:r>
+            <a:r>
+              <a:rPr>
+                <a:solidFill>
+                  <a:srgbClr val="5E5E5E"/>
+                </a:solidFill>
+                <a:latin typeface="Courier"/>
+              </a:rPr>
+              <a:t># Back to R</a:t>
+            </a:r>
+            <a:br/>
+            <a:r>
+              <a:rPr>
+                <a:solidFill>
+                  <a:srgbClr val="003B4F"/>
+                </a:solidFill>
+                <a:latin typeface="Courier"/>
+              </a:rPr>
+              <a:t>  </a:t>
+            </a:r>
+            <a:r>
+              <a:rPr>
+                <a:solidFill>
+                  <a:srgbClr val="4758AB"/>
+                </a:solidFill>
+                <a:latin typeface="Courier"/>
+              </a:rPr>
+              <a:t>rxp_r</a:t>
+            </a:r>
+            <a:r>
+              <a:rPr>
+                <a:solidFill>
+                  <a:srgbClr val="003B4F"/>
+                </a:solidFill>
+                <a:latin typeface="Courier"/>
+              </a:rPr>
+              <a:t>(…)           </a:t>
+            </a:r>
+            <a:r>
+              <a:rPr>
+                <a:solidFill>
+                  <a:srgbClr val="5E5E5E"/>
+                </a:solidFill>
+                <a:latin typeface="Courier"/>
+              </a:rPr>
+              <a:t># Final step</a:t>
+            </a:r>
+            <a:br/>
+            <a:r>
+              <a:rPr>
+                <a:solidFill>
+                  <a:srgbClr val="003B4F"/>
+                </a:solidFill>
+                <a:latin typeface="Courier"/>
+              </a:rPr>
+              <a:t>) </a:t>
+            </a:r>
+            <a:r>
+              <a:rPr>
+                <a:solidFill>
+                  <a:srgbClr val="5E5E5E"/>
+                </a:solidFill>
+                <a:latin typeface="Courier"/>
+              </a:rPr>
+              <a:t>|&gt;</a:t>
+            </a:r>
+            <a:r>
+              <a:rPr>
+                <a:solidFill>
+                  <a:srgbClr val="003B4F"/>
+                </a:solidFill>
+                <a:latin typeface="Courier"/>
+              </a:rPr>
+              <a:t> </a:t>
+            </a:r>
+            <a:r>
+              <a:rPr>
+                <a:solidFill>
+                  <a:srgbClr val="4758AB"/>
+                </a:solidFill>
+                <a:latin typeface="Courier"/>
+              </a:rPr>
+              <a:t>rixpress</a:t>
+            </a:r>
+            <a:r>
+              <a:rPr>
+                <a:solidFill>
+                  <a:srgbClr val="003B4F"/>
+                </a:solidFill>
+                <a:latin typeface="Courier"/>
+              </a:rPr>
+              <a:t>()</a:t>
+            </a:r>
+          </a:p>
+          <a:p>
             <a:pPr lvl="0"/>
             <a:r>
-              <a:rPr>
-                <a:hlinkClick r:id="rId2"/>
-              </a:rPr>
-              <a:t>GitHub Repository</a:t>
+              <a:rPr/>
+              <a:t>Each step is named and typed (</a:t>
+            </a:r>
+            <a:r>
+              <a:rPr>
+                <a:latin typeface="Courier"/>
+              </a:rPr>
+              <a:t>py</a:t>
+            </a:r>
+            <a:r>
+              <a:rPr/>
+              <a:t>, </a:t>
+            </a:r>
+            <a:r>
+              <a:rPr>
+                <a:latin typeface="Courier"/>
+              </a:rPr>
+              <a:t>r</a:t>
+            </a:r>
+            <a:r>
+              <a:rPr/>
+              <a:t>, </a:t>
+            </a:r>
+            <a:r>
+              <a:rPr>
+                <a:latin typeface="Courier"/>
+              </a:rPr>
+              <a:t>r2py</a:t>
+            </a:r>
+            <a:r>
+              <a:rPr/>
+              <a:t>, etc.)</a:t>
             </a:r>
           </a:p>
           <a:p>
             <a:pPr lvl="0"/>
             <a:r>
-              <a:rPr>
-                <a:hlinkClick r:id="rId3"/>
-              </a:rPr>
-              <a:t>Website</a:t>
-            </a:r>
-          </a:p>
-          <a:p>
-            <a:pPr lvl="0"/>
-            <a:r>
-              <a:rPr>
-                <a:hlinkClick r:id="rId4"/>
-              </a:rPr>
-              <a:t>Repository of demos</a:t>
+              <a:rPr/>
+              <a:t>Ability to add files (</a:t>
+            </a:r>
+            <a:r>
+              <a:rPr>
+                <a:latin typeface="Courier"/>
+              </a:rPr>
+              <a:t>functions.R</a:t>
+            </a:r>
+            <a:r>
+              <a:rPr/>
+              <a:t>, images…)</a:t>
             </a:r>
           </a:p>
         </p:txBody>
@@ -5320,7 +5330,7 @@
             </a:pPr>
             <a:r>
               <a:rPr/>
-              <a:t>T, a new DSL for polyglot data science</a:t>
+              <a:t>To learn more about rixpress:</a:t>
             </a:r>
           </a:p>
         </p:txBody>
@@ -5342,29 +5352,28 @@
           <a:p>
             <a:pPr lvl="0"/>
             <a:r>
-              <a:rPr/>
-              <a:t>Reproducibility is often an afterthought, with ad-hoc tools</a:t>
+              <a:rPr>
+                <a:hlinkClick r:id="rId2"/>
+              </a:rPr>
+              <a:t>GitHub Repository</a:t>
             </a:r>
           </a:p>
           <a:p>
             <a:pPr lvl="0"/>
             <a:r>
-              <a:rPr/>
-              <a:t>Nix eases the pain, but humans have to play ball! (biggest challenge)</a:t>
+              <a:rPr>
+                <a:hlinkClick r:id="rId3"/>
+              </a:rPr>
+              <a:t>Website</a:t>
             </a:r>
           </a:p>
           <a:p>
             <a:pPr lvl="0"/>
             <a:r>
-              <a:rPr/>
-              <a:t>What could a “reproducible by design” language look like?</a:t>
-            </a:r>
-          </a:p>
-          <a:p>
-            <a:pPr lvl="0"/>
-            <a:r>
-              <a:rPr/>
-              <a:t>This is T, a language whose package manager is Nix and pipelines are first-class citizens</a:t>
+              <a:rPr>
+                <a:hlinkClick r:id="rId4"/>
+              </a:rPr>
+              <a:t>Repository of demos</a:t>
             </a:r>
           </a:p>
         </p:txBody>
@@ -5411,7 +5420,7 @@
             </a:pPr>
             <a:r>
               <a:rPr/>
-              <a:t>T is reproducible by design</a:t>
+              <a:t>T, a new DSL for polyglot data science</a:t>
             </a:r>
           </a:p>
         </p:txBody>
@@ -5434,62 +5443,28 @@
             <a:pPr lvl="0"/>
             <a:r>
               <a:rPr/>
-              <a:t>A new T project is a Nix project:</a:t>
-            </a:r>
-          </a:p>
-          <a:p>
-            <a:pPr lvl="0" indent="0" marL="0">
-              <a:buNone/>
-            </a:pPr>
-            <a:r>
-              <a:rPr/>
-              <a:t>. . .</a:t>
-            </a:r>
-          </a:p>
-          <a:p>
-            <a:pPr lvl="0" indent="0">
-              <a:buNone/>
-            </a:pPr>
-            <a:r>
-              <a:rPr>
-                <a:solidFill>
-                  <a:srgbClr val="003B4F"/>
-                </a:solidFill>
-                <a:latin typeface="Courier"/>
-              </a:rPr>
-              <a:t>nix shell github:b-rodrigues/tlang codex/wire-agents.md-and-t-language-reference.md-in-init</a:t>
-            </a:r>
-          </a:p>
-          <a:p>
-            <a:pPr lvl="0" indent="0" marL="0">
-              <a:buNone/>
-            </a:pPr>
-            <a:r>
-              <a:rPr/>
-              <a:t>. . .</a:t>
-            </a:r>
-          </a:p>
-          <a:p>
-            <a:pPr lvl="0" indent="0">
-              <a:buNone/>
-            </a:pPr>
-            <a:r>
-              <a:rPr>
-                <a:solidFill>
-                  <a:srgbClr val="003B4F"/>
-                </a:solidFill>
-                <a:latin typeface="Courier"/>
-              </a:rPr>
-              <a:t>t init </a:t>
-            </a:r>
-            <a:r>
-              <a:rPr>
-                <a:solidFill>
-                  <a:srgbClr val="657422"/>
-                </a:solidFill>
-                <a:latin typeface="Courier"/>
-              </a:rPr>
-              <a:t>--project</a:t>
+              <a:t>Reproducibility is often an afterthought, with ad-hoc tools</a:t>
+            </a:r>
+          </a:p>
+          <a:p>
+            <a:pPr lvl="0"/>
+            <a:r>
+              <a:rPr/>
+              <a:t>Nix eases the pain, but humans have to play ball! (biggest challenge)</a:t>
+            </a:r>
+          </a:p>
+          <a:p>
+            <a:pPr lvl="0"/>
+            <a:r>
+              <a:rPr/>
+              <a:t>What could a “reproducible by design” language look like?</a:t>
+            </a:r>
+          </a:p>
+          <a:p>
+            <a:pPr lvl="0"/>
+            <a:r>
+              <a:rPr/>
+              <a:t>This is T, a language whose package manager is Nix and pipelines are first-class citizens</a:t>
             </a:r>
           </a:p>
         </p:txBody>
@@ -5556,24 +5531,65 @@
           <a:bodyPr/>
           <a:lstStyle/>
           <a:p>
+            <a:pPr lvl="0"/>
+            <a:r>
+              <a:rPr/>
+              <a:t>A new T project is a Nix project:</a:t>
+            </a:r>
+          </a:p>
+          <a:p>
+            <a:pPr lvl="0" indent="0" marL="0">
+              <a:buNone/>
+            </a:pPr>
+            <a:r>
+              <a:rPr/>
+              <a:t>. . .</a:t>
+            </a:r>
+          </a:p>
+          <a:p>
             <a:pPr lvl="0" indent="0">
               <a:buNone/>
             </a:pPr>
             <a:r>
               <a:rPr>
-                <a:latin typeface="Courier"/>
-              </a:rPr>
-              <a:t>my_analysis/
-├── tproject.toml       # Project configuration and dependencies
-├── flake.nix           # Reproducible environment definition
-├── README.md           # Project overview
-├── AGENTS.md           # Onboarding guide for AI Agents
-├── T-LANGUAGE-REFERENCE.md # Tiered language reference for LLMs (git-ignored)
-├── src/
-│   └── pipeline.t      # Your main analysis script
-├── data/               # Place your raw data files here
-├── outputs/            # Output directory for results
-└── tests/              # Unit tests for your analysis</a:t>
+                <a:solidFill>
+                  <a:srgbClr val="003B4F"/>
+                </a:solidFill>
+                <a:latin typeface="Courier"/>
+              </a:rPr>
+              <a:t>nix shell github:b-rodrigues/tlang</a:t>
+            </a:r>
+          </a:p>
+          <a:p>
+            <a:pPr lvl="0" indent="0" marL="0">
+              <a:buNone/>
+            </a:pPr>
+            <a:r>
+              <a:rPr/>
+              <a:t>. . .</a:t>
+            </a:r>
+          </a:p>
+          <a:p>
+            <a:pPr lvl="0" indent="0">
+              <a:buNone/>
+            </a:pPr>
+            <a:r>
+              <a:rPr>
+                <a:solidFill>
+                  <a:srgbClr val="003B4F"/>
+                </a:solidFill>
+                <a:latin typeface="Courier"/>
+              </a:rPr>
+              <a:t>t init </a:t>
+            </a:r>
+            <a:r>
+              <a:rPr>
+                <a:solidFill>
+                  <a:srgbClr val="657422"/>
+                </a:solidFill>
+                <a:latin typeface="Courier"/>
+              </a:rPr>
+              <a:t>--project</a:t>
             </a:r>
           </a:p>
         </p:txBody>
@@ -5712,62 +5728,24 @@
           <a:bodyPr/>
           <a:lstStyle/>
           <a:p>
-            <a:pPr lvl="0"/>
-            <a:r>
-              <a:rPr/>
-              <a:t>Add R, Python or Julia dependecies to </a:t>
-            </a:r>
-            <a:r>
-              <a:rPr>
-                <a:latin typeface="Courier"/>
-              </a:rPr>
-              <a:t>tproject.toml</a:t>
-            </a:r>
-          </a:p>
-          <a:p>
-            <a:pPr lvl="0"/>
-            <a:r>
-              <a:rPr/>
-              <a:t>Run </a:t>
-            </a:r>
-            <a:r>
-              <a:rPr>
-                <a:latin typeface="Courier"/>
-              </a:rPr>
-              <a:t>t update</a:t>
-            </a:r>
-          </a:p>
-          <a:p>
-            <a:pPr lvl="0"/>
-            <a:r>
-              <a:rPr/>
-              <a:t>Exit the temporary shell and run </a:t>
-            </a:r>
-            <a:r>
-              <a:rPr>
-                <a:latin typeface="Courier"/>
-              </a:rPr>
-              <a:t>nix develop</a:t>
-            </a:r>
-          </a:p>
-          <a:p>
-            <a:pPr lvl="0"/>
-            <a:r>
-              <a:rPr/>
-              <a:t>Environment is set up, ready to use!</a:t>
-            </a:r>
-          </a:p>
-          <a:p>
-            <a:pPr lvl="0"/>
-            <a:r>
-              <a:rPr/>
-              <a:t>What pipelines look like </a:t>
-            </a:r>
-            <a:r>
-              <a:rPr>
-                <a:hlinkClick r:id="rId2"/>
-              </a:rPr>
-              <a:t>see here</a:t>
+            <a:pPr lvl="0" indent="0">
+              <a:buNone/>
+            </a:pPr>
+            <a:r>
+              <a:rPr>
+                <a:latin typeface="Courier"/>
+              </a:rPr>
+              <a:t>my_analysis/
+├── tproject.toml       # Project configuration and dependencies
+├── flake.nix           # Reproducible environment definition
+├── README.md           # Project overview
+├── AGENTS.md           # Onboarding guide for AI Agents
+├── T-LANGUAGE-REFERENCE.md # Tiered language reference for LLMs (git-ignored)
+├── src/
+│   └── pipeline.t      # Your main analysis script
+├── data/               # Place your raw data files here
+├── outputs/            # Output directory for results
+└── tests/              # Unit tests for your analysis</a:t>
             </a:r>
           </a:p>
         </p:txBody>
@@ -5814,7 +5792,7 @@
             </a:pPr>
             <a:r>
               <a:rPr/>
-              <a:t>Learning a new language in 2026?!</a:t>
+              <a:t>T is reproducible by design</a:t>
             </a:r>
           </a:p>
         </p:txBody>
@@ -5837,62 +5815,59 @@
             <a:pPr lvl="0"/>
             <a:r>
               <a:rPr/>
-              <a:t>Learning a new language just for pipelines? Never!!</a:t>
+              <a:t>Add R, Python or Julia dependecies to </a:t>
+            </a:r>
+            <a:r>
+              <a:rPr>
+                <a:latin typeface="Courier"/>
+              </a:rPr>
+              <a:t>tproject.toml</a:t>
             </a:r>
           </a:p>
           <a:p>
             <a:pPr lvl="0"/>
             <a:r>
               <a:rPr/>
-              <a:t>T is built to be </a:t>
-            </a:r>
-            <a:r>
-              <a:rPr i="1"/>
-              <a:t>llm-friendly</a:t>
+              <a:t>Run </a:t>
+            </a:r>
+            <a:r>
+              <a:rPr>
+                <a:latin typeface="Courier"/>
+              </a:rPr>
+              <a:t>t update</a:t>
             </a:r>
           </a:p>
           <a:p>
             <a:pPr lvl="0"/>
             <a:r>
               <a:rPr/>
-              <a:t>Projects ship </a:t>
-            </a:r>
-            <a:r>
-              <a:rPr>
-                <a:latin typeface="Courier"/>
-              </a:rPr>
-              <a:t>AGENTS.md</a:t>
-            </a:r>
-            <a:r>
-              <a:rPr/>
-              <a:t>, </a:t>
-            </a:r>
-            <a:r>
-              <a:rPr>
-                <a:latin typeface="Courier"/>
-              </a:rPr>
-              <a:t>T-LANGUAGE-REFERENCE.md</a:t>
-            </a:r>
-            <a:r>
-              <a:rPr/>
-              <a:t> and </a:t>
-            </a:r>
-            <a:r>
-              <a:rPr>
-                <a:latin typeface="Courier"/>
-              </a:rPr>
-              <a:t>src/pipeline.t</a:t>
-            </a:r>
-            <a:r>
-              <a:rPr/>
-              <a:t> itself is a cheatsheet</a:t>
+              <a:t>Exit the temporary shell and run </a:t>
+            </a:r>
+            <a:r>
+              <a:rPr>
+                <a:latin typeface="Courier"/>
+              </a:rPr>
+              <a:t>nix develop</a:t>
             </a:r>
           </a:p>
           <a:p>
             <a:pPr lvl="0"/>
             <a:r>
               <a:rPr/>
-              <a:t>LLMs should be able to wire your project using T without much issue!</a:t>
+              <a:t>Environment is set up, ready to use!</a:t>
+            </a:r>
+          </a:p>
+          <a:p>
+            <a:pPr lvl="0"/>
+            <a:r>
+              <a:rPr/>
+              <a:t>What pipelines look like </a:t>
+            </a:r>
+            <a:r>
+              <a:rPr>
+                <a:hlinkClick r:id="rId2"/>
+              </a:rPr>
+              <a:t>see here</a:t>
             </a:r>
           </a:p>
         </p:txBody>
@@ -5939,7 +5914,7 @@
             </a:pPr>
             <a:r>
               <a:rPr/>
-              <a:t>Caveat Emptor</a:t>
+              <a:t>Learning a new language in 2026?!</a:t>
             </a:r>
           </a:p>
         </p:txBody>
@@ -5962,28 +5937,62 @@
             <a:pPr lvl="0"/>
             <a:r>
               <a:rPr/>
-              <a:t>This is a 100% vibe-coded side-project by yours truly…</a:t>
+              <a:t>Learning a new language just for pipelines? Never!!</a:t>
             </a:r>
           </a:p>
           <a:p>
             <a:pPr lvl="0"/>
             <a:r>
               <a:rPr/>
-              <a:t>…but throughly tested (2000+ unit tests and 60+ end-to-end tests)</a:t>
+              <a:t>T is built to be </a:t>
+            </a:r>
+            <a:r>
+              <a:rPr i="1"/>
+              <a:t>llm-friendly</a:t>
             </a:r>
           </a:p>
           <a:p>
             <a:pPr lvl="0"/>
             <a:r>
               <a:rPr/>
-              <a:t>I wanted to stress-test the idea of a “reproducible by design” language</a:t>
+              <a:t>Projects ship </a:t>
+            </a:r>
+            <a:r>
+              <a:rPr>
+                <a:latin typeface="Courier"/>
+              </a:rPr>
+              <a:t>AGENTS.md</a:t>
+            </a:r>
+            <a:r>
+              <a:rPr/>
+              <a:t>, </a:t>
+            </a:r>
+            <a:r>
+              <a:rPr>
+                <a:latin typeface="Courier"/>
+              </a:rPr>
+              <a:t>T-LANGUAGE-REFERENCE.md</a:t>
+            </a:r>
+            <a:r>
+              <a:rPr/>
+              <a:t> and </a:t>
+            </a:r>
+            <a:r>
+              <a:rPr>
+                <a:latin typeface="Courier"/>
+              </a:rPr>
+              <a:t>src/pipeline.t</a:t>
+            </a:r>
+            <a:r>
+              <a:rPr/>
+              <a:t> itself is a cheatsheet</a:t>
             </a:r>
           </a:p>
           <a:p>
             <a:pPr lvl="0"/>
             <a:r>
               <a:rPr/>
-              <a:t>Challenges: input/output between languages</a:t>
+              <a:t>LLMs should be able to wire your project using T without much issue!</a:t>
             </a:r>
           </a:p>
         </p:txBody>
@@ -5994,6 +6003,97 @@
 </file>
 
 <file path=ppt/slides/slide23.xml><?xml version="1.0" encoding="utf-8"?>
+<p:sld xmlns:a="http://schemas.openxmlformats.org/drawingml/2006/main" xmlns:r="http://schemas.openxmlformats.org/officeDocument/2006/relationships" xmlns:p="http://schemas.openxmlformats.org/presentationml/2006/main">
+  <p:cSld>
+    <p:spTree>
+      <p:nvGrpSpPr>
+        <p:cNvPr id="1" name=""/>
+        <p:cNvGrpSpPr/>
+        <p:nvPr/>
+      </p:nvGrpSpPr>
+      <p:grpSpPr>
+        <a:xfrm>
+          <a:off x="0" y="0"/>
+          <a:ext cx="0" cy="0"/>
+          <a:chOff x="0" y="0"/>
+          <a:chExt cx="0" cy="0"/>
+        </a:xfrm>
+      </p:grpSpPr>
+      <p:sp>
+        <p:nvSpPr>
+          <p:cNvPr id="2" name="Title 1"/>
+          <p:cNvSpPr>
+            <a:spLocks noGrp="1"/>
+          </p:cNvSpPr>
+          <p:nvPr>
+            <p:ph type="title"/>
+          </p:nvPr>
+        </p:nvSpPr>
+        <p:spPr/>
+        <p:txBody>
+          <a:bodyPr/>
+          <a:lstStyle/>
+          <a:p>
+            <a:pPr lvl="0" indent="0" marL="0">
+              <a:buNone/>
+            </a:pPr>
+            <a:r>
+              <a:rPr/>
+              <a:t>Caveat Emptor</a:t>
+            </a:r>
+          </a:p>
+        </p:txBody>
+      </p:sp>
+      <p:sp>
+        <p:nvSpPr>
+          <p:cNvPr id="3" name="Content Placeholder 2"/>
+          <p:cNvSpPr>
+            <a:spLocks noGrp="1"/>
+          </p:cNvSpPr>
+          <p:nvPr>
+            <p:ph idx="1"/>
+          </p:nvPr>
+        </p:nvSpPr>
+        <p:spPr/>
+        <p:txBody>
+          <a:bodyPr/>
+          <a:lstStyle/>
+          <a:p>
+            <a:pPr lvl="0"/>
+            <a:r>
+              <a:rPr/>
+              <a:t>This is a 100% vibe-coded side-project by yours truly…</a:t>
+            </a:r>
+          </a:p>
+          <a:p>
+            <a:pPr lvl="0"/>
+            <a:r>
+              <a:rPr/>
+              <a:t>…but throughly tested (2000+ unit tests and 60+ end-to-end tests)</a:t>
+            </a:r>
+          </a:p>
+          <a:p>
+            <a:pPr lvl="0"/>
+            <a:r>
+              <a:rPr/>
+              <a:t>I wanted to stress-test the idea of a “reproducible by design” language</a:t>
+            </a:r>
+          </a:p>
+          <a:p>
+            <a:pPr lvl="0"/>
+            <a:r>
+              <a:rPr/>
+              <a:t>Challenges: input/output between languages</a:t>
+            </a:r>
+          </a:p>
+        </p:txBody>
+      </p:sp>
+    </p:spTree>
+  </p:cSld>
+</p:sld>
+</file>
+
+<file path=ppt/slides/slide24.xml><?xml version="1.0" encoding="utf-8"?>
 <p:sld xmlns:a="http://schemas.openxmlformats.org/drawingml/2006/main" xmlns:r="http://schemas.openxmlformats.org/officeDocument/2006/relationships" xmlns:p="http://schemas.openxmlformats.org/presentationml/2006/main">
   <p:cSld>
     <p:spTree>
@@ -6367,7 +6467,7 @@
             </a:pPr>
             <a:r>
               <a:rPr/>
-              <a:t>Intro: where to find the code</a:t>
+              <a:t>Intro: Luxembourg?</a:t>
             </a:r>
           </a:p>
         </p:txBody>
@@ -6387,43 +6487,31 @@
           <a:bodyPr/>
           <a:lstStyle/>
           <a:p>
-            <a:pPr lvl="0" indent="0" marL="0">
-              <a:buNone/>
-            </a:pPr>
-            <a:r>
-              <a:rPr/>
-              <a:t>Slides available online:</a:t>
-            </a:r>
-          </a:p>
-          <a:p>
-            <a:pPr lvl="0" indent="0" marL="0">
-              <a:buNone/>
-            </a:pPr>
-            <a:r>
-              <a:rPr>
-                <a:hlinkClick r:id="rId2"/>
-              </a:rPr>
-              <a:t>https://b-rodrigues.github.io/repro_r_pharma</a:t>
-            </a:r>
-          </a:p>
-          <a:p>
-            <a:pPr lvl="0" indent="0" marL="0">
-              <a:buNone/>
-            </a:pPr>
-            <a:r>
-              <a:rPr/>
-              <a:t>Code available here:</a:t>
-            </a:r>
-          </a:p>
-          <a:p>
-            <a:pPr lvl="0" indent="0" marL="0">
-              <a:buNone/>
-            </a:pPr>
-            <a:r>
-              <a:rPr>
-                <a:hlinkClick r:id="rId3"/>
-              </a:rPr>
-              <a:t>https://github.com/b-rodrigues/repro_r_pharma</a:t>
+            <a:pPr lvl="0"/>
+            <a:r>
+              <a:rPr/>
+              <a:t>Sole Grand-Duchy in the World</a:t>
+            </a:r>
+          </a:p>
+          <a:p>
+            <a:pPr lvl="0"/>
+            <a:r>
+              <a:rPr/>
+              <a:t>3 official languages (Luxembourguish, German, French)</a:t>
+            </a:r>
+          </a:p>
+          <a:p>
+            <a:pPr lvl="0"/>
+            <a:r>
+              <a:rPr/>
+              <a:t>A founder of the European Union</a:t>
+            </a:r>
+          </a:p>
+          <a:p>
+            <a:pPr lvl="0"/>
+            <a:r>
+              <a:rPr/>
+              <a:t>René Arend, a luxembourguish chef invented the McNugget and McRib</a:t>
             </a:r>
           </a:p>
         </p:txBody>
@@ -6470,7 +6558,7 @@
             </a:pPr>
             <a:r>
               <a:rPr/>
-              <a:t>What I’ll be talking about</a:t>
+              <a:t>Intro: where to find the code</a:t>
             </a:r>
           </a:p>
         </p:txBody>
@@ -6490,10 +6578,43 @@
           <a:bodyPr/>
           <a:lstStyle/>
           <a:p>
-            <a:pPr lvl="0"/>
-            <a:r>
-              <a:rPr/>
-              <a:t>Reproducibility of data projects</a:t>
+            <a:pPr lvl="0" indent="0" marL="0">
+              <a:buNone/>
+            </a:pPr>
+            <a:r>
+              <a:rPr/>
+              <a:t>Slides available online:</a:t>
+            </a:r>
+          </a:p>
+          <a:p>
+            <a:pPr lvl="0" indent="0" marL="0">
+              <a:buNone/>
+            </a:pPr>
+            <a:r>
+              <a:rPr>
+                <a:hlinkClick r:id="rId2"/>
+              </a:rPr>
+              <a:t>https://b-rodrigues.github.io/repro_r_pharma</a:t>
+            </a:r>
+          </a:p>
+          <a:p>
+            <a:pPr lvl="0" indent="0" marL="0">
+              <a:buNone/>
+            </a:pPr>
+            <a:r>
+              <a:rPr/>
+              <a:t>Code available here:</a:t>
+            </a:r>
+          </a:p>
+          <a:p>
+            <a:pPr lvl="0" indent="0" marL="0">
+              <a:buNone/>
+            </a:pPr>
+            <a:r>
+              <a:rPr>
+                <a:hlinkClick r:id="rId3"/>
+              </a:rPr>
+              <a:t>https://github.com/b-rodrigues/repro_r_pharma</a:t>
             </a:r>
           </a:p>
         </p:txBody>
@@ -6540,7 +6661,7 @@
             </a:pPr>
             <a:r>
               <a:rPr/>
-              <a:t>Available solutions for R</a:t>
+              <a:t>What I’ll be talking about</a:t>
             </a:r>
           </a:p>
         </p:txBody>
@@ -6562,81 +6683,8 @@
           <a:p>
             <a:pPr lvl="0"/>
             <a:r>
-              <a:rPr>
-                <a:latin typeface="Courier"/>
-              </a:rPr>
-              <a:t>{renv}</a:t>
-            </a:r>
-            <a:r>
-              <a:rPr/>
-              <a:t> or </a:t>
-            </a:r>
-            <a:r>
-              <a:rPr>
-                <a:latin typeface="Courier"/>
-              </a:rPr>
-              <a:t>{groundhog}</a:t>
-            </a:r>
-            <a:r>
-              <a:rPr/>
-              <a:t>: simple to use, but:</a:t>
-            </a:r>
-          </a:p>
-          <a:p>
-            <a:pPr lvl="1"/>
-            <a:r>
-              <a:rPr/>
-              <a:t>Doesn’t save the R version</a:t>
-            </a:r>
-          </a:p>
-          <a:p>
-            <a:pPr lvl="1"/>
-            <a:r>
-              <a:rPr/>
-              <a:t>Installing old packages may fail (system dependencies)</a:t>
-            </a:r>
-          </a:p>
-          <a:p>
-            <a:pPr lvl="0"/>
-            <a:r>
-              <a:rPr/>
-              <a:t>Docker goes further:</a:t>
-            </a:r>
-          </a:p>
-          <a:p>
-            <a:pPr lvl="1"/>
-            <a:r>
-              <a:rPr/>
-              <a:t>Manages R </a:t>
-            </a:r>
-            <a:r>
-              <a:rPr i="1"/>
-              <a:t>and</a:t>
-            </a:r>
-            <a:r>
-              <a:rPr/>
-              <a:t> system dependencies</a:t>
-            </a:r>
-          </a:p>
-          <a:p>
-            <a:pPr lvl="1"/>
-            <a:r>
-              <a:rPr/>
-              <a:t>Containers executable anywhere</a:t>
-            </a:r>
-          </a:p>
-          <a:p>
-            <a:pPr lvl="0"/>
-            <a:r>
-              <a:rPr/>
-              <a:t>But:</a:t>
-            </a:r>
-          </a:p>
-          <a:p>
-            <a:pPr lvl="1"/>
-            <a:r>
-              <a:rPr/>
-              <a:t>Not inherently reproducible</a:t>
+              <a:rPr/>
+              <a:t>Reproducibility of data projects</a:t>
             </a:r>
           </a:p>
         </p:txBody>
@@ -6647,6 +6695,149 @@
 </file>
 
 <file path=ppt/slides/slide8.xml><?xml version="1.0" encoding="utf-8"?>
+<p:sld xmlns:a="http://schemas.openxmlformats.org/drawingml/2006/main" xmlns:r="http://schemas.openxmlformats.org/officeDocument/2006/relationships" xmlns:p="http://schemas.openxmlformats.org/presentationml/2006/main">
+  <p:cSld>
+    <p:spTree>
+      <p:nvGrpSpPr>
+        <p:cNvPr id="1" name=""/>
+        <p:cNvGrpSpPr/>
+        <p:nvPr/>
+      </p:nvGrpSpPr>
+      <p:grpSpPr>
+        <a:xfrm>
+          <a:off x="0" y="0"/>
+          <a:ext cx="0" cy="0"/>
+          <a:chOff x="0" y="0"/>
+          <a:chExt cx="0" cy="0"/>
+        </a:xfrm>
+      </p:grpSpPr>
+      <p:sp>
+        <p:nvSpPr>
+          <p:cNvPr id="2" name="Title 1"/>
+          <p:cNvSpPr>
+            <a:spLocks noGrp="1"/>
+          </p:cNvSpPr>
+          <p:nvPr>
+            <p:ph type="title"/>
+          </p:nvPr>
+        </p:nvSpPr>
+        <p:spPr/>
+        <p:txBody>
+          <a:bodyPr/>
+          <a:lstStyle/>
+          <a:p>
+            <a:pPr lvl="0" indent="0" marL="0">
+              <a:buNone/>
+            </a:pPr>
+            <a:r>
+              <a:rPr/>
+              <a:t>Available solutions for R</a:t>
+            </a:r>
+          </a:p>
+        </p:txBody>
+      </p:sp>
+      <p:sp>
+        <p:nvSpPr>
+          <p:cNvPr id="3" name="Content Placeholder 2"/>
+          <p:cNvSpPr>
+            <a:spLocks noGrp="1"/>
+          </p:cNvSpPr>
+          <p:nvPr>
+            <p:ph idx="1"/>
+          </p:nvPr>
+        </p:nvSpPr>
+        <p:spPr/>
+        <p:txBody>
+          <a:bodyPr/>
+          <a:lstStyle/>
+          <a:p>
+            <a:pPr lvl="0"/>
+            <a:r>
+              <a:rPr>
+                <a:latin typeface="Courier"/>
+              </a:rPr>
+              <a:t>{renv}</a:t>
+            </a:r>
+            <a:r>
+              <a:rPr/>
+              <a:t> or </a:t>
+            </a:r>
+            <a:r>
+              <a:rPr>
+                <a:latin typeface="Courier"/>
+              </a:rPr>
+              <a:t>{groundhog}</a:t>
+            </a:r>
+            <a:r>
+              <a:rPr/>
+              <a:t>: simple to use, but:</a:t>
+            </a:r>
+          </a:p>
+          <a:p>
+            <a:pPr lvl="1"/>
+            <a:r>
+              <a:rPr/>
+              <a:t>Doesn’t save the R version</a:t>
+            </a:r>
+          </a:p>
+          <a:p>
+            <a:pPr lvl="1"/>
+            <a:r>
+              <a:rPr/>
+              <a:t>Installing old packages may fail (system dependencies)</a:t>
+            </a:r>
+          </a:p>
+          <a:p>
+            <a:pPr lvl="0"/>
+            <a:r>
+              <a:rPr/>
+              <a:t>Docker goes further:</a:t>
+            </a:r>
+          </a:p>
+          <a:p>
+            <a:pPr lvl="1"/>
+            <a:r>
+              <a:rPr/>
+              <a:t>Manages R </a:t>
+            </a:r>
+            <a:r>
+              <a:rPr i="1"/>
+              <a:t>and</a:t>
+            </a:r>
+            <a:r>
+              <a:rPr/>
+              <a:t> system dependencies</a:t>
+            </a:r>
+          </a:p>
+          <a:p>
+            <a:pPr lvl="1"/>
+            <a:r>
+              <a:rPr/>
+              <a:t>Containers executable anywhere</a:t>
+            </a:r>
+          </a:p>
+          <a:p>
+            <a:pPr lvl="0"/>
+            <a:r>
+              <a:rPr/>
+              <a:t>But:</a:t>
+            </a:r>
+          </a:p>
+          <a:p>
+            <a:pPr lvl="1"/>
+            <a:r>
+              <a:rPr/>
+              <a:t>Not inherently reproducible</a:t>
+            </a:r>
+          </a:p>
+        </p:txBody>
+      </p:sp>
+    </p:spTree>
+  </p:cSld>
+</p:sld>
+</file>
+
+<file path=ppt/slides/slide9.xml><?xml version="1.0" encoding="utf-8"?>
 <p:sld xmlns:a="http://schemas.openxmlformats.org/drawingml/2006/main" xmlns:r="http://schemas.openxmlformats.org/officeDocument/2006/relationships" xmlns:p="http://schemas.openxmlformats.org/presentationml/2006/main">
   <p:cSld>
     <p:spTree>
@@ -6807,105 +6998,6 @@
             <a:r>
               <a:rPr/>
               <a:t>Google Play Store</a:t>
-            </a:r>
-          </a:p>
-        </p:txBody>
-      </p:sp>
-    </p:spTree>
-  </p:cSld>
-</p:sld>
-</file>
-
-<file path=ppt/slides/slide9.xml><?xml version="1.0" encoding="utf-8"?>
-<p:sld xmlns:a="http://schemas.openxmlformats.org/drawingml/2006/main" xmlns:r="http://schemas.openxmlformats.org/officeDocument/2006/relationships" xmlns:p="http://schemas.openxmlformats.org/presentationml/2006/main">
-  <p:cSld>
-    <p:spTree>
-      <p:nvGrpSpPr>
-        <p:cNvPr id="1" name=""/>
-        <p:cNvGrpSpPr/>
-        <p:nvPr/>
-      </p:nvGrpSpPr>
-      <p:grpSpPr>
-        <a:xfrm>
-          <a:off x="0" y="0"/>
-          <a:ext cx="0" cy="0"/>
-          <a:chOff x="0" y="0"/>
-          <a:chExt cx="0" cy="0"/>
-        </a:xfrm>
-      </p:grpSpPr>
-      <p:sp>
-        <p:nvSpPr>
-          <p:cNvPr id="2" name="Title 1"/>
-          <p:cNvSpPr>
-            <a:spLocks noGrp="1"/>
-          </p:cNvSpPr>
-          <p:nvPr>
-            <p:ph type="title"/>
-          </p:nvPr>
-        </p:nvSpPr>
-        <p:spPr/>
-        <p:txBody>
-          <a:bodyPr/>
-          <a:lstStyle/>
-          <a:p>
-            <a:pPr lvl="0" indent="0" marL="0">
-              <a:buNone/>
-            </a:pPr>
-            <a:r>
-              <a:rPr/>
-              <a:t>The Nix package manager (2/2)</a:t>
-            </a:r>
-          </a:p>
-        </p:txBody>
-      </p:sp>
-      <p:sp>
-        <p:nvSpPr>
-          <p:cNvPr id="3" name="Content Placeholder 2"/>
-          <p:cNvSpPr>
-            <a:spLocks noGrp="1"/>
-          </p:cNvSpPr>
-          <p:nvPr>
-            <p:ph idx="1"/>
-          </p:nvPr>
-        </p:nvSpPr>
-        <p:spPr/>
-        <p:txBody>
-          <a:bodyPr/>
-          <a:lstStyle/>
-          <a:p>
-            <a:pPr lvl="0"/>
-            <a:r>
-              <a:rPr/>
-              <a:t>To ensure reproducibility: R, R packages, and other dependencies must be explicitly managed</a:t>
-            </a:r>
-          </a:p>
-          <a:p>
-            <a:pPr lvl="0"/>
-            <a:r>
-              <a:rPr/>
-              <a:t>Nix is a package manager truly focused on reproducible builds</a:t>
-            </a:r>
-          </a:p>
-          <a:p>
-            <a:pPr lvl="0"/>
-            <a:r>
-              <a:rPr/>
-              <a:t>Nix manages everything using a single text file (called a Nix expression)!</a:t>
-            </a:r>
-          </a:p>
-          <a:p>
-            <a:pPr lvl="0"/>
-            <a:r>
-              <a:rPr/>
-              <a:t>These expressions </a:t>
-            </a:r>
-            <a:r>
-              <a:rPr i="1"/>
-              <a:t>always</a:t>
-            </a:r>
-            <a:r>
-              <a:rPr/>
-              <a:t> produce exactly the same result</a:t>
             </a:r>
           </a:p>
         </p:txBody>

--- a/docs/index.pptx
+++ b/docs/index.pptx
@@ -6457,7 +6457,12 @@
             <p:ph type="title"/>
           </p:nvPr>
         </p:nvSpPr>
-        <p:spPr/>
+        <p:spPr>
+          <a:xfrm>
+            <a:off x="457201" y="204787"/>
+            <a:ext cx="3008313" cy="871538"/>
+          </a:xfrm>
+        </p:spPr>
         <p:txBody>
           <a:bodyPr/>
           <a:lstStyle/>
@@ -6474,12 +6479,12 @@
       </p:sp>
       <p:sp>
         <p:nvSpPr>
-          <p:cNvPr id="3" name="Content Placeholder 2"/>
-          <p:cNvSpPr>
-            <a:spLocks noGrp="1"/>
-          </p:cNvSpPr>
-          <p:nvPr>
-            <p:ph idx="1"/>
+          <p:cNvPr id="4" name="Text Placeholder 3"/>
+          <p:cNvSpPr>
+            <a:spLocks noGrp="1"/>
+          </p:cNvSpPr>
+          <p:nvPr>
+            <p:ph idx="2" sz="half" type="body"/>
           </p:nvPr>
         </p:nvSpPr>
         <p:spPr/>
@@ -6514,8 +6519,47 @@
               <a:t>René Arend, a luxembourguish chef invented the McNugget and McRib</a:t>
             </a:r>
           </a:p>
-        </p:txBody>
-      </p:sp>
+          <a:p>
+            <a:pPr lvl="0" indent="0" marL="0">
+              <a:buNone/>
+            </a:pPr>
+            <a:r>
+              <a:rPr/>
+              <a:t>. . .</a:t>
+            </a:r>
+          </a:p>
+        </p:txBody>
+      </p:sp>
+      <p:pic>
+        <p:nvPicPr>
+          <p:cNvPr descr="img/rene_arend.jpg" id="0" name="Picture 1"/>
+          <p:cNvPicPr>
+            <a:picLocks noGrp="1" noChangeAspect="1"/>
+          </p:cNvPicPr>
+          <p:nvPr/>
+        </p:nvPicPr>
+        <p:blipFill>
+          <a:blip r:embed="rId2"/>
+          <a:stretch>
+            <a:fillRect/>
+          </a:stretch>
+        </p:blipFill>
+        <p:spPr bwMode="auto">
+          <a:xfrm>
+            <a:off x="4368800" y="203200"/>
+            <a:ext cx="3505200" cy="4381500"/>
+          </a:xfrm>
+          <a:prstGeom prst="rect">
+            <a:avLst/>
+          </a:prstGeom>
+          <a:noFill/>
+          <a:ln w="9525">
+            <a:noFill/>
+            <a:headEnd/>
+            <a:tailEnd/>
+          </a:ln>
+        </p:spPr>
+      </p:pic>
     </p:spTree>
   </p:cSld>
 </p:sld>

--- a/docs/index.pptx
+++ b/docs/index.pptx
@@ -29,6 +29,8 @@
     <p:sldId id="277" r:id="rId23"/>
     <p:sldId id="278" r:id="rId24"/>
     <p:sldId id="279" r:id="rId25"/>
+    <p:sldId id="280" r:id="rId26"/>
+    <p:sldId id="281" r:id="rId27"/>
   </p:sldIdLst>
   <p:sldSz cx="9144000" cy="5143500" type="screen16x9"/>
   <p:notesSz cx="6858000" cy="9144000"/>
@@ -3215,7 +3217,7 @@
             </a:pPr>
             <a:r>
               <a:rPr/>
-              <a:t>The Nix package manager (2/2)</a:t>
+              <a:t>Available solutions for R</a:t>
             </a:r>
           </a:p>
         </p:txBody>
@@ -3237,37 +3239,81 @@
           <a:p>
             <a:pPr lvl="0"/>
             <a:r>
-              <a:rPr/>
-              <a:t>To ensure reproducibility: R, R packages, and other dependencies must be explicitly managed</a:t>
-            </a:r>
-          </a:p>
-          <a:p>
-            <a:pPr lvl="0"/>
-            <a:r>
-              <a:rPr/>
-              <a:t>Nix is a package manager truly focused on reproducible builds</a:t>
-            </a:r>
-          </a:p>
-          <a:p>
-            <a:pPr lvl="0"/>
-            <a:r>
-              <a:rPr/>
-              <a:t>Nix manages everything using a single text file (called a Nix expression)!</a:t>
-            </a:r>
-          </a:p>
-          <a:p>
-            <a:pPr lvl="0"/>
-            <a:r>
-              <a:rPr/>
-              <a:t>These expressions </a:t>
+              <a:rPr>
+                <a:latin typeface="Courier"/>
+              </a:rPr>
+              <a:t>{renv}</a:t>
+            </a:r>
+            <a:r>
+              <a:rPr/>
+              <a:t> or </a:t>
+            </a:r>
+            <a:r>
+              <a:rPr>
+                <a:latin typeface="Courier"/>
+              </a:rPr>
+              <a:t>{groundhog}</a:t>
+            </a:r>
+            <a:r>
+              <a:rPr/>
+              <a:t>: simple to use, but:</a:t>
+            </a:r>
+          </a:p>
+          <a:p>
+            <a:pPr lvl="1"/>
+            <a:r>
+              <a:rPr/>
+              <a:t>Doesn’t save the R version</a:t>
+            </a:r>
+          </a:p>
+          <a:p>
+            <a:pPr lvl="1"/>
+            <a:r>
+              <a:rPr/>
+              <a:t>Installing old packages may fail (system dependencies)</a:t>
+            </a:r>
+          </a:p>
+          <a:p>
+            <a:pPr lvl="0"/>
+            <a:r>
+              <a:rPr/>
+              <a:t>Docker goes further:</a:t>
+            </a:r>
+          </a:p>
+          <a:p>
+            <a:pPr lvl="1"/>
+            <a:r>
+              <a:rPr/>
+              <a:t>Manages R </a:t>
             </a:r>
             <a:r>
               <a:rPr i="1"/>
-              <a:t>always</a:t>
-            </a:r>
-            <a:r>
-              <a:rPr/>
-              <a:t> produce exactly the same result</a:t>
+              <a:t>and</a:t>
+            </a:r>
+            <a:r>
+              <a:rPr/>
+              <a:t> system dependencies</a:t>
+            </a:r>
+          </a:p>
+          <a:p>
+            <a:pPr lvl="1"/>
+            <a:r>
+              <a:rPr/>
+              <a:t>Containers executable anywhere</a:t>
+            </a:r>
+          </a:p>
+          <a:p>
+            <a:pPr lvl="0"/>
+            <a:r>
+              <a:rPr/>
+              <a:t>But:</a:t>
+            </a:r>
+          </a:p>
+          <a:p>
+            <a:pPr lvl="1"/>
+            <a:r>
+              <a:rPr/>
+              <a:t>Not inherently reproducible</a:t>
             </a:r>
           </a:p>
         </p:txBody>
@@ -3304,7 +3350,12 @@
             <p:ph type="title"/>
           </p:nvPr>
         </p:nvSpPr>
-        <p:spPr/>
+        <p:spPr>
+          <a:xfrm>
+            <a:off x="457201" y="204787"/>
+            <a:ext cx="3008313" cy="871538"/>
+          </a:xfrm>
+        </p:spPr>
         <p:txBody>
           <a:bodyPr/>
           <a:lstStyle/>
@@ -3314,463 +3365,125 @@
             </a:pPr>
             <a:r>
               <a:rPr/>
-              <a:t>rix: reproducible development environments with Nix (1/2)</a:t>
-            </a:r>
-          </a:p>
-        </p:txBody>
-      </p:sp>
-      <p:sp>
-        <p:nvSpPr>
-          <p:cNvPr id="3" name="Content Placeholder 2"/>
-          <p:cNvSpPr>
-            <a:spLocks noGrp="1"/>
-          </p:cNvSpPr>
+              <a:t>The Nix package manager (1/2)</a:t>
+            </a:r>
+          </a:p>
+        </p:txBody>
+      </p:sp>
+      <p:sp>
+        <p:nvSpPr>
+          <p:cNvPr id="4" name="Text Placeholder 3"/>
+          <p:cNvSpPr>
+            <a:spLocks noGrp="1"/>
+          </p:cNvSpPr>
+          <p:nvPr>
+            <p:ph idx="2" sz="half" type="body"/>
+          </p:nvPr>
+        </p:nvSpPr>
+        <p:spPr/>
+        <p:txBody>
+          <a:bodyPr/>
+          <a:lstStyle/>
+          <a:p>
+            <a:pPr lvl="0" indent="0" marL="0">
+              <a:buNone/>
+            </a:pPr>
+            <a:r>
+              <a:rPr/>
+              <a:t>Package manager: tool for installing and managing </a:t>
+            </a:r>
+            <a:r>
+              <a:rPr i="1"/>
+              <a:t>packages</a:t>
+            </a:r>
+          </a:p>
+          <a:p>
+            <a:pPr lvl="0" indent="0" marL="0">
+              <a:buNone/>
+            </a:pPr>
+            <a:r>
+              <a:rPr/>
+              <a:t>Package: any software (not just R packages)</a:t>
+            </a:r>
+          </a:p>
+          <a:p>
+            <a:pPr lvl="0" indent="0" marL="0">
+              <a:buNone/>
+            </a:pPr>
+            <a:r>
+              <a:rPr/>
+              <a:t>A popular package manager:</a:t>
+            </a:r>
+          </a:p>
+          <a:p>
+            <a:pPr lvl="0" indent="0" marL="0">
+              <a:buNone/>
+            </a:pPr>
+            <a:r>
+              <a:rPr/>
+              <a:t>. . .</a:t>
+            </a:r>
+          </a:p>
+        </p:txBody>
+      </p:sp>
+      <p:pic>
+        <p:nvPicPr>
+          <p:cNvPr descr="img/play_store.png" id="0" name="Picture 1"/>
+          <p:cNvPicPr>
+            <a:picLocks noGrp="1" noChangeAspect="1"/>
+          </p:cNvPicPr>
+          <p:nvPr/>
+        </p:nvPicPr>
+        <p:blipFill>
+          <a:blip r:embed="rId2"/>
+          <a:stretch>
+            <a:fillRect/>
+          </a:stretch>
+        </p:blipFill>
+        <p:spPr bwMode="auto">
+          <a:xfrm>
+            <a:off x="5245100" y="203200"/>
+            <a:ext cx="1739900" cy="3873500"/>
+          </a:xfrm>
+          <a:prstGeom prst="rect">
+            <a:avLst/>
+          </a:prstGeom>
+          <a:noFill/>
+          <a:ln w="9525">
+            <a:noFill/>
+            <a:headEnd/>
+            <a:tailEnd/>
+          </a:ln>
+        </p:spPr>
+      </p:pic>
+      <p:sp>
+        <p:nvSpPr>
+          <p:cNvPr id="1" name="TextBox 3"/>
+          <p:cNvSpPr txBox="1"/>
           <p:nvPr>
             <p:ph idx="1"/>
           </p:nvPr>
         </p:nvSpPr>
-        <p:spPr/>
-        <p:txBody>
-          <a:bodyPr/>
-          <a:lstStyle/>
-          <a:p>
-            <a:pPr lvl="0"/>
-            <a:r>
-              <a:rPr>
-                <a:latin typeface="Courier"/>
-              </a:rPr>
-              <a:t>{rix}</a:t>
-            </a:r>
-            <a:r>
-              <a:rPr/>
-              <a:t> (</a:t>
-            </a:r>
-            <a:r>
-              <a:rPr>
-                <a:hlinkClick r:id="rId2"/>
-              </a:rPr>
-              <a:t>website</a:t>
-            </a:r>
-            <a:r>
-              <a:rPr/>
-              <a:t>) simplifies writing Nix expressions!</a:t>
-            </a:r>
-          </a:p>
-          <a:p>
-            <a:pPr lvl="0"/>
-            <a:r>
-              <a:rPr/>
-              <a:t>Just use the provided </a:t>
-            </a:r>
-            <a:r>
-              <a:rPr>
-                <a:latin typeface="Courier"/>
-              </a:rPr>
-              <a:t>rix()</a:t>
-            </a:r>
-            <a:r>
-              <a:rPr/>
-              <a:t> function:</a:t>
-            </a:r>
-          </a:p>
-          <a:p>
-            <a:pPr lvl="0" indent="0" marL="0">
+        <p:spPr>
+          <a:xfrm>
+            <a:off x="3568700" y="4076700"/>
+            <a:ext cx="5105400" cy="508000"/>
+          </a:xfrm>
+          <a:prstGeom prst="rect">
+            <a:avLst/>
+          </a:prstGeom>
+          <a:noFill/>
+        </p:spPr>
+        <p:txBody>
+          <a:bodyPr/>
+          <a:lstStyle/>
+          <a:p>
+            <a:pPr lvl="0" indent="0" marL="0" algn="ctr">
               <a:buNone/>
             </a:pPr>
             <a:r>
               <a:rPr/>
-              <a:t>. . .</a:t>
-            </a:r>
-          </a:p>
-          <a:p>
-            <a:pPr lvl="0" indent="0">
-              <a:buNone/>
-            </a:pPr>
-            <a:r>
-              <a:rPr>
-                <a:solidFill>
-                  <a:srgbClr val="4758AB"/>
-                </a:solidFill>
-                <a:latin typeface="Courier"/>
-              </a:rPr>
-              <a:t>library</a:t>
-            </a:r>
-            <a:r>
-              <a:rPr>
-                <a:solidFill>
-                  <a:srgbClr val="003B4F"/>
-                </a:solidFill>
-                <a:latin typeface="Courier"/>
-              </a:rPr>
-              <a:t>(rix)</a:t>
-            </a:r>
-            <a:br/>
-            <a:br/>
-            <a:r>
-              <a:rPr>
-                <a:solidFill>
-                  <a:srgbClr val="4758AB"/>
-                </a:solidFill>
-                <a:latin typeface="Courier"/>
-              </a:rPr>
-              <a:t>rix</a:t>
-            </a:r>
-            <a:r>
-              <a:rPr>
-                <a:solidFill>
-                  <a:srgbClr val="003B4F"/>
-                </a:solidFill>
-                <a:latin typeface="Courier"/>
-              </a:rPr>
-              <a:t>(</a:t>
-            </a:r>
-            <a:r>
-              <a:rPr>
-                <a:solidFill>
-                  <a:srgbClr val="657422"/>
-                </a:solidFill>
-                <a:latin typeface="Courier"/>
-              </a:rPr>
-              <a:t>date =</a:t>
-            </a:r>
-            <a:r>
-              <a:rPr>
-                <a:solidFill>
-                  <a:srgbClr val="003B4F"/>
-                </a:solidFill>
-                <a:latin typeface="Courier"/>
-              </a:rPr>
-              <a:t> </a:t>
-            </a:r>
-            <a:r>
-              <a:rPr>
-                <a:solidFill>
-                  <a:srgbClr val="20794D"/>
-                </a:solidFill>
-                <a:latin typeface="Courier"/>
-              </a:rPr>
-              <a:t>"2025-06-13"</a:t>
-            </a:r>
-            <a:r>
-              <a:rPr>
-                <a:solidFill>
-                  <a:srgbClr val="003B4F"/>
-                </a:solidFill>
-                <a:latin typeface="Courier"/>
-              </a:rPr>
-              <a:t>,</a:t>
-            </a:r>
-            <a:br/>
-            <a:r>
-              <a:rPr>
-                <a:solidFill>
-                  <a:srgbClr val="003B4F"/>
-                </a:solidFill>
-                <a:latin typeface="Courier"/>
-              </a:rPr>
-              <a:t>    </a:t>
-            </a:r>
-            <a:r>
-              <a:rPr>
-                <a:solidFill>
-                  <a:srgbClr val="657422"/>
-                </a:solidFill>
-                <a:latin typeface="Courier"/>
-              </a:rPr>
-              <a:t>r_pkgs =</a:t>
-            </a:r>
-            <a:r>
-              <a:rPr>
-                <a:solidFill>
-                  <a:srgbClr val="003B4F"/>
-                </a:solidFill>
-                <a:latin typeface="Courier"/>
-              </a:rPr>
-              <a:t> </a:t>
-            </a:r>
-            <a:r>
-              <a:rPr>
-                <a:solidFill>
-                  <a:srgbClr val="4758AB"/>
-                </a:solidFill>
-                <a:latin typeface="Courier"/>
-              </a:rPr>
-              <a:t>c</a:t>
-            </a:r>
-            <a:r>
-              <a:rPr>
-                <a:solidFill>
-                  <a:srgbClr val="003B4F"/>
-                </a:solidFill>
-                <a:latin typeface="Courier"/>
-              </a:rPr>
-              <a:t>(</a:t>
-            </a:r>
-            <a:r>
-              <a:rPr>
-                <a:solidFill>
-                  <a:srgbClr val="20794D"/>
-                </a:solidFill>
-                <a:latin typeface="Courier"/>
-              </a:rPr>
-              <a:t>"dplyr"</a:t>
-            </a:r>
-            <a:r>
-              <a:rPr>
-                <a:solidFill>
-                  <a:srgbClr val="003B4F"/>
-                </a:solidFill>
-                <a:latin typeface="Courier"/>
-              </a:rPr>
-              <a:t>, </a:t>
-            </a:r>
-            <a:r>
-              <a:rPr>
-                <a:solidFill>
-                  <a:srgbClr val="20794D"/>
-                </a:solidFill>
-                <a:latin typeface="Courier"/>
-              </a:rPr>
-              <a:t>"ggplot2"</a:t>
-            </a:r>
-            <a:r>
-              <a:rPr>
-                <a:solidFill>
-                  <a:srgbClr val="003B4F"/>
-                </a:solidFill>
-                <a:latin typeface="Courier"/>
-              </a:rPr>
-              <a:t>),</a:t>
-            </a:r>
-            <a:br/>
-            <a:r>
-              <a:rPr>
-                <a:solidFill>
-                  <a:srgbClr val="003B4F"/>
-                </a:solidFill>
-                <a:latin typeface="Courier"/>
-              </a:rPr>
-              <a:t>    </a:t>
-            </a:r>
-            <a:r>
-              <a:rPr>
-                <a:solidFill>
-                  <a:srgbClr val="657422"/>
-                </a:solidFill>
-                <a:latin typeface="Courier"/>
-              </a:rPr>
-              <a:t>system_pkgs =</a:t>
-            </a:r>
-            <a:r>
-              <a:rPr>
-                <a:solidFill>
-                  <a:srgbClr val="003B4F"/>
-                </a:solidFill>
-                <a:latin typeface="Courier"/>
-              </a:rPr>
-              <a:t> </a:t>
-            </a:r>
-            <a:r>
-              <a:rPr>
-                <a:solidFill>
-                  <a:srgbClr val="8F5902"/>
-                </a:solidFill>
-                <a:latin typeface="Courier"/>
-              </a:rPr>
-              <a:t>NULL</a:t>
-            </a:r>
-            <a:r>
-              <a:rPr>
-                <a:solidFill>
-                  <a:srgbClr val="003B4F"/>
-                </a:solidFill>
-                <a:latin typeface="Courier"/>
-              </a:rPr>
-              <a:t>,</a:t>
-            </a:r>
-            <a:br/>
-            <a:r>
-              <a:rPr>
-                <a:solidFill>
-                  <a:srgbClr val="003B4F"/>
-                </a:solidFill>
-                <a:latin typeface="Courier"/>
-              </a:rPr>
-              <a:t>    </a:t>
-            </a:r>
-            <a:r>
-              <a:rPr>
-                <a:solidFill>
-                  <a:srgbClr val="657422"/>
-                </a:solidFill>
-                <a:latin typeface="Courier"/>
-              </a:rPr>
-              <a:t>git_pkgs =</a:t>
-            </a:r>
-            <a:r>
-              <a:rPr>
-                <a:solidFill>
-                  <a:srgbClr val="003B4F"/>
-                </a:solidFill>
-                <a:latin typeface="Courier"/>
-              </a:rPr>
-              <a:t> </a:t>
-            </a:r>
-            <a:r>
-              <a:rPr>
-                <a:solidFill>
-                  <a:srgbClr val="8F5902"/>
-                </a:solidFill>
-                <a:latin typeface="Courier"/>
-              </a:rPr>
-              <a:t>NULL</a:t>
-            </a:r>
-            <a:r>
-              <a:rPr>
-                <a:solidFill>
-                  <a:srgbClr val="003B4F"/>
-                </a:solidFill>
-                <a:latin typeface="Courier"/>
-              </a:rPr>
-              <a:t>,</a:t>
-            </a:r>
-            <a:br/>
-            <a:r>
-              <a:rPr>
-                <a:solidFill>
-                  <a:srgbClr val="003B4F"/>
-                </a:solidFill>
-                <a:latin typeface="Courier"/>
-              </a:rPr>
-              <a:t>    </a:t>
-            </a:r>
-            <a:r>
-              <a:rPr>
-                <a:solidFill>
-                  <a:srgbClr val="657422"/>
-                </a:solidFill>
-                <a:latin typeface="Courier"/>
-              </a:rPr>
-              <a:t>tex_pkgs =</a:t>
-            </a:r>
-            <a:r>
-              <a:rPr>
-                <a:solidFill>
-                  <a:srgbClr val="003B4F"/>
-                </a:solidFill>
-                <a:latin typeface="Courier"/>
-              </a:rPr>
-              <a:t> </a:t>
-            </a:r>
-            <a:r>
-              <a:rPr>
-                <a:solidFill>
-                  <a:srgbClr val="8F5902"/>
-                </a:solidFill>
-                <a:latin typeface="Courier"/>
-              </a:rPr>
-              <a:t>NULL</a:t>
-            </a:r>
-            <a:r>
-              <a:rPr>
-                <a:solidFill>
-                  <a:srgbClr val="003B4F"/>
-                </a:solidFill>
-                <a:latin typeface="Courier"/>
-              </a:rPr>
-              <a:t>,</a:t>
-            </a:r>
-            <a:br/>
-            <a:r>
-              <a:rPr>
-                <a:solidFill>
-                  <a:srgbClr val="003B4F"/>
-                </a:solidFill>
-                <a:latin typeface="Courier"/>
-              </a:rPr>
-              <a:t>    </a:t>
-            </a:r>
-            <a:r>
-              <a:rPr>
-                <a:solidFill>
-                  <a:srgbClr val="657422"/>
-                </a:solidFill>
-                <a:latin typeface="Courier"/>
-              </a:rPr>
-              <a:t>ide =</a:t>
-            </a:r>
-            <a:r>
-              <a:rPr>
-                <a:solidFill>
-                  <a:srgbClr val="003B4F"/>
-                </a:solidFill>
-                <a:latin typeface="Courier"/>
-              </a:rPr>
-              <a:t> </a:t>
-            </a:r>
-            <a:r>
-              <a:rPr>
-                <a:solidFill>
-                  <a:srgbClr val="20794D"/>
-                </a:solidFill>
-                <a:latin typeface="Courier"/>
-              </a:rPr>
-              <a:t>"code"</a:t>
-            </a:r>
-            <a:r>
-              <a:rPr>
-                <a:solidFill>
-                  <a:srgbClr val="003B4F"/>
-                </a:solidFill>
-                <a:latin typeface="Courier"/>
-              </a:rPr>
-              <a:t>,</a:t>
-            </a:r>
-            <a:br/>
-            <a:r>
-              <a:rPr>
-                <a:solidFill>
-                  <a:srgbClr val="003B4F"/>
-                </a:solidFill>
-                <a:latin typeface="Courier"/>
-              </a:rPr>
-              <a:t>    </a:t>
-            </a:r>
-            <a:r>
-              <a:rPr>
-                <a:solidFill>
-                  <a:srgbClr val="657422"/>
-                </a:solidFill>
-                <a:latin typeface="Courier"/>
-              </a:rPr>
-              <a:t>project_path =</a:t>
-            </a:r>
-            <a:r>
-              <a:rPr>
-                <a:solidFill>
-                  <a:srgbClr val="003B4F"/>
-                </a:solidFill>
-                <a:latin typeface="Courier"/>
-              </a:rPr>
-              <a:t> </a:t>
-            </a:r>
-            <a:r>
-              <a:rPr>
-                <a:solidFill>
-                  <a:srgbClr val="20794D"/>
-                </a:solidFill>
-                <a:latin typeface="Courier"/>
-              </a:rPr>
-              <a:t>"."</a:t>
-            </a:r>
-            <a:r>
-              <a:rPr>
-                <a:solidFill>
-                  <a:srgbClr val="003B4F"/>
-                </a:solidFill>
-                <a:latin typeface="Courier"/>
-              </a:rPr>
-              <a:t>)</a:t>
+              <a:t>Google Play Store</a:t>
             </a:r>
           </a:p>
         </p:txBody>
@@ -3817,7 +3530,7 @@
             </a:pPr>
             <a:r>
               <a:rPr/>
-              <a:t>rix: reproducible development environments with Nix (2/2)</a:t>
+              <a:t>The Nix package manager (2/2)</a:t>
             </a:r>
           </a:p>
         </p:txBody>
@@ -3839,71 +3552,37 @@
           <a:p>
             <a:pPr lvl="0"/>
             <a:r>
-              <a:rPr>
-                <a:latin typeface="Courier"/>
-              </a:rPr>
-              <a:t>rix::rix()</a:t>
-            </a:r>
-            <a:r>
-              <a:rPr/>
-              <a:t> generates a </a:t>
-            </a:r>
-            <a:r>
-              <a:rPr>
-                <a:latin typeface="Courier"/>
-              </a:rPr>
-              <a:t>default.nix</a:t>
-            </a:r>
-            <a:r>
-              <a:rPr/>
-              <a:t> file</a:t>
-            </a:r>
-          </a:p>
-          <a:p>
-            <a:pPr lvl="0"/>
-            <a:r>
-              <a:rPr/>
-              <a:t>Build the expressions with </a:t>
-            </a:r>
-            <a:r>
-              <a:rPr>
-                <a:latin typeface="Courier"/>
-              </a:rPr>
-              <a:t>nix-build</a:t>
-            </a:r>
-            <a:r>
-              <a:rPr/>
-              <a:t> (in terminal) or </a:t>
-            </a:r>
-            <a:r>
-              <a:rPr>
-                <a:latin typeface="Courier"/>
-              </a:rPr>
-              <a:t>rix::nix_build()</a:t>
-            </a:r>
-            <a:r>
-              <a:rPr/>
-              <a:t> from R</a:t>
-            </a:r>
-          </a:p>
-          <a:p>
-            <a:pPr lvl="0"/>
-            <a:r>
-              <a:rPr/>
-              <a:t>Access the development environment with </a:t>
-            </a:r>
-            <a:r>
-              <a:rPr>
-                <a:latin typeface="Courier"/>
-              </a:rPr>
-              <a:t>nix-shell</a:t>
-            </a:r>
-          </a:p>
-          <a:p>
-            <a:pPr lvl="0"/>
-            <a:r>
-              <a:rPr/>
-              <a:t>Expressions can be generated even without Nix installed (with some limitations)</a:t>
+              <a:rPr/>
+              <a:t>To ensure reproducibility: R, R packages, and other dependencies must be explicitly managed</a:t>
+            </a:r>
+          </a:p>
+          <a:p>
+            <a:pPr lvl="0"/>
+            <a:r>
+              <a:rPr/>
+              <a:t>Nix is a package manager truly focused on reproducible builds</a:t>
+            </a:r>
+          </a:p>
+          <a:p>
+            <a:pPr lvl="0"/>
+            <a:r>
+              <a:rPr/>
+              <a:t>Nix manages everything using a single text file (called a Nix expression)!</a:t>
+            </a:r>
+          </a:p>
+          <a:p>
+            <a:pPr lvl="0"/>
+            <a:r>
+              <a:rPr/>
+              <a:t>These expressions </a:t>
+            </a:r>
+            <a:r>
+              <a:rPr i="1"/>
+              <a:t>always</a:t>
+            </a:r>
+            <a:r>
+              <a:rPr/>
+              <a:t> produce exactly the same result</a:t>
             </a:r>
           </a:p>
         </p:txBody>
@@ -3950,7 +3629,7 @@
             </a:pPr>
             <a:r>
               <a:rPr/>
-              <a:t>Polyglot environments with rix</a:t>
+              <a:t>rix: reproducible development environments with Nix (1/2)</a:t>
             </a:r>
           </a:p>
         </p:txBody>
@@ -3975,11 +3654,38 @@
               <a:rPr>
                 <a:latin typeface="Courier"/>
               </a:rPr>
+              <a:t>{rix}</a:t>
+            </a:r>
+            <a:r>
+              <a:rPr/>
+              <a:t> (</a:t>
+            </a:r>
+            <a:r>
+              <a:rPr>
+                <a:hlinkClick r:id="rId2"/>
+              </a:rPr>
+              <a:t>website</a:t>
+            </a:r>
+            <a:r>
+              <a:rPr/>
+              <a:t>) simplifies writing Nix expressions!</a:t>
+            </a:r>
+          </a:p>
+          <a:p>
+            <a:pPr lvl="0"/>
+            <a:r>
+              <a:rPr/>
+              <a:t>Just use the provided </a:t>
+            </a:r>
+            <a:r>
+              <a:rPr>
+                <a:latin typeface="Courier"/>
+              </a:rPr>
               <a:t>rix()</a:t>
             </a:r>
             <a:r>
               <a:rPr/>
-              <a:t> supports Python and Julia alongside R:</a:t>
+              <a:t> function:</a:t>
             </a:r>
           </a:p>
           <a:p>
@@ -4002,6 +3708,26 @@
                 </a:solidFill>
                 <a:latin typeface="Courier"/>
               </a:rPr>
+              <a:t>library</a:t>
+            </a:r>
+            <a:r>
+              <a:rPr>
+                <a:solidFill>
+                  <a:srgbClr val="003B4F"/>
+                </a:solidFill>
+                <a:latin typeface="Courier"/>
+              </a:rPr>
+              <a:t>(rix)</a:t>
+            </a:r>
+            <a:br/>
+            <a:br/>
+            <a:r>
+              <a:rPr>
+                <a:solidFill>
+                  <a:srgbClr val="4758AB"/>
+                </a:solidFill>
+                <a:latin typeface="Courier"/>
+              </a:rPr>
               <a:t>rix</a:t>
             </a:r>
             <a:r>
@@ -4038,7 +3764,7 @@
                 </a:solidFill>
                 <a:latin typeface="Courier"/>
               </a:rPr>
-              <a:t>"2025-06-09"</a:t>
+              <a:t>"2025-06-13"</a:t>
             </a:r>
             <a:r>
               <a:rPr>
@@ -4102,7 +3828,7 @@
                 </a:solidFill>
                 <a:latin typeface="Courier"/>
               </a:rPr>
-              <a:t>"tidyr"</a:t>
+              <a:t>"dplyr"</a:t>
             </a:r>
             <a:r>
               <a:rPr>
@@ -4120,7 +3846,7 @@
                 </a:solidFill>
                 <a:latin typeface="Courier"/>
               </a:rPr>
-              <a:t>"dplyr"</a:t>
+              <a:t>"ggplot2"</a:t>
             </a:r>
             <a:r>
               <a:rPr>
@@ -4129,7 +3855,173 @@
                 </a:solidFill>
                 <a:latin typeface="Courier"/>
               </a:rPr>
-              <a:t>, </a:t>
+              <a:t>),</a:t>
+            </a:r>
+            <a:br/>
+            <a:r>
+              <a:rPr>
+                <a:solidFill>
+                  <a:srgbClr val="003B4F"/>
+                </a:solidFill>
+                <a:latin typeface="Courier"/>
+              </a:rPr>
+              <a:t>    </a:t>
+            </a:r>
+            <a:r>
+              <a:rPr>
+                <a:solidFill>
+                  <a:srgbClr val="657422"/>
+                </a:solidFill>
+                <a:latin typeface="Courier"/>
+              </a:rPr>
+              <a:t>system_pkgs =</a:t>
+            </a:r>
+            <a:r>
+              <a:rPr>
+                <a:solidFill>
+                  <a:srgbClr val="003B4F"/>
+                </a:solidFill>
+                <a:latin typeface="Courier"/>
+              </a:rPr>
+              <a:t> </a:t>
+            </a:r>
+            <a:r>
+              <a:rPr>
+                <a:solidFill>
+                  <a:srgbClr val="8F5902"/>
+                </a:solidFill>
+                <a:latin typeface="Courier"/>
+              </a:rPr>
+              <a:t>NULL</a:t>
+            </a:r>
+            <a:r>
+              <a:rPr>
+                <a:solidFill>
+                  <a:srgbClr val="003B4F"/>
+                </a:solidFill>
+                <a:latin typeface="Courier"/>
+              </a:rPr>
+              <a:t>,</a:t>
+            </a:r>
+            <a:br/>
+            <a:r>
+              <a:rPr>
+                <a:solidFill>
+                  <a:srgbClr val="003B4F"/>
+                </a:solidFill>
+                <a:latin typeface="Courier"/>
+              </a:rPr>
+              <a:t>    </a:t>
+            </a:r>
+            <a:r>
+              <a:rPr>
+                <a:solidFill>
+                  <a:srgbClr val="657422"/>
+                </a:solidFill>
+                <a:latin typeface="Courier"/>
+              </a:rPr>
+              <a:t>git_pkgs =</a:t>
+            </a:r>
+            <a:r>
+              <a:rPr>
+                <a:solidFill>
+                  <a:srgbClr val="003B4F"/>
+                </a:solidFill>
+                <a:latin typeface="Courier"/>
+              </a:rPr>
+              <a:t> </a:t>
+            </a:r>
+            <a:r>
+              <a:rPr>
+                <a:solidFill>
+                  <a:srgbClr val="8F5902"/>
+                </a:solidFill>
+                <a:latin typeface="Courier"/>
+              </a:rPr>
+              <a:t>NULL</a:t>
+            </a:r>
+            <a:r>
+              <a:rPr>
+                <a:solidFill>
+                  <a:srgbClr val="003B4F"/>
+                </a:solidFill>
+                <a:latin typeface="Courier"/>
+              </a:rPr>
+              <a:t>,</a:t>
+            </a:r>
+            <a:br/>
+            <a:r>
+              <a:rPr>
+                <a:solidFill>
+                  <a:srgbClr val="003B4F"/>
+                </a:solidFill>
+                <a:latin typeface="Courier"/>
+              </a:rPr>
+              <a:t>    </a:t>
+            </a:r>
+            <a:r>
+              <a:rPr>
+                <a:solidFill>
+                  <a:srgbClr val="657422"/>
+                </a:solidFill>
+                <a:latin typeface="Courier"/>
+              </a:rPr>
+              <a:t>tex_pkgs =</a:t>
+            </a:r>
+            <a:r>
+              <a:rPr>
+                <a:solidFill>
+                  <a:srgbClr val="003B4F"/>
+                </a:solidFill>
+                <a:latin typeface="Courier"/>
+              </a:rPr>
+              <a:t> </a:t>
+            </a:r>
+            <a:r>
+              <a:rPr>
+                <a:solidFill>
+                  <a:srgbClr val="8F5902"/>
+                </a:solidFill>
+                <a:latin typeface="Courier"/>
+              </a:rPr>
+              <a:t>NULL</a:t>
+            </a:r>
+            <a:r>
+              <a:rPr>
+                <a:solidFill>
+                  <a:srgbClr val="003B4F"/>
+                </a:solidFill>
+                <a:latin typeface="Courier"/>
+              </a:rPr>
+              <a:t>,</a:t>
+            </a:r>
+            <a:br/>
+            <a:r>
+              <a:rPr>
+                <a:solidFill>
+                  <a:srgbClr val="003B4F"/>
+                </a:solidFill>
+                <a:latin typeface="Courier"/>
+              </a:rPr>
+              <a:t>    </a:t>
+            </a:r>
+            <a:r>
+              <a:rPr>
+                <a:solidFill>
+                  <a:srgbClr val="657422"/>
+                </a:solidFill>
+                <a:latin typeface="Courier"/>
+              </a:rPr>
+              <a:t>ide =</a:t>
+            </a:r>
+            <a:r>
+              <a:rPr>
+                <a:solidFill>
+                  <a:srgbClr val="003B4F"/>
+                </a:solidFill>
+                <a:latin typeface="Courier"/>
+              </a:rPr>
+              <a:t> </a:t>
             </a:r>
             <a:r>
               <a:rPr>
@@ -4138,7 +4030,7 @@
                 </a:solidFill>
                 <a:latin typeface="Courier"/>
               </a:rPr>
-              <a:t>"ggplot2"</a:t>
+              <a:t>"code"</a:t>
             </a:r>
             <a:r>
               <a:rPr>
@@ -4147,7 +4039,35 @@
                 </a:solidFill>
                 <a:latin typeface="Courier"/>
               </a:rPr>
-              <a:t>, </a:t>
+              <a:t>,</a:t>
+            </a:r>
+            <a:br/>
+            <a:r>
+              <a:rPr>
+                <a:solidFill>
+                  <a:srgbClr val="003B4F"/>
+                </a:solidFill>
+                <a:latin typeface="Courier"/>
+              </a:rPr>
+              <a:t>    </a:t>
+            </a:r>
+            <a:r>
+              <a:rPr>
+                <a:solidFill>
+                  <a:srgbClr val="657422"/>
+                </a:solidFill>
+                <a:latin typeface="Courier"/>
+              </a:rPr>
+              <a:t>project_path =</a:t>
+            </a:r>
+            <a:r>
+              <a:rPr>
+                <a:solidFill>
+                  <a:srgbClr val="003B4F"/>
+                </a:solidFill>
+                <a:latin typeface="Courier"/>
+              </a:rPr>
+              <a:t> </a:t>
             </a:r>
             <a:r>
               <a:rPr>
@@ -4156,7 +4076,7 @@
                 </a:solidFill>
                 <a:latin typeface="Courier"/>
               </a:rPr>
-              <a:t>"languageserver"</a:t>
+              <a:t>"."</a:t>
             </a:r>
             <a:r>
               <a:rPr>
@@ -4165,355 +4085,7 @@
                 </a:solidFill>
                 <a:latin typeface="Courier"/>
               </a:rPr>
-              <a:t>),</a:t>
-            </a:r>
-            <a:br/>
-            <a:r>
-              <a:rPr>
-                <a:solidFill>
-                  <a:srgbClr val="003B4F"/>
-                </a:solidFill>
-                <a:latin typeface="Courier"/>
-              </a:rPr>
-              <a:t>    </a:t>
-            </a:r>
-            <a:r>
-              <a:rPr>
-                <a:solidFill>
-                  <a:srgbClr val="657422"/>
-                </a:solidFill>
-                <a:latin typeface="Courier"/>
-              </a:rPr>
-              <a:t>py_conf =</a:t>
-            </a:r>
-            <a:r>
-              <a:rPr>
-                <a:solidFill>
-                  <a:srgbClr val="003B4F"/>
-                </a:solidFill>
-                <a:latin typeface="Courier"/>
-              </a:rPr>
-              <a:t> </a:t>
-            </a:r>
-            <a:r>
-              <a:rPr>
-                <a:solidFill>
-                  <a:srgbClr val="4758AB"/>
-                </a:solidFill>
-                <a:latin typeface="Courier"/>
-              </a:rPr>
-              <a:t>list</a:t>
-            </a:r>
-            <a:r>
-              <a:rPr>
-                <a:solidFill>
-                  <a:srgbClr val="003B4F"/>
-                </a:solidFill>
-                <a:latin typeface="Courier"/>
-              </a:rPr>
-              <a:t>(</a:t>
-            </a:r>
-            <a:br/>
-            <a:r>
-              <a:rPr>
-                <a:solidFill>
-                  <a:srgbClr val="003B4F"/>
-                </a:solidFill>
-                <a:latin typeface="Courier"/>
-              </a:rPr>
-              <a:t>      </a:t>
-            </a:r>
-            <a:r>
-              <a:rPr>
-                <a:solidFill>
-                  <a:srgbClr val="657422"/>
-                </a:solidFill>
-                <a:latin typeface="Courier"/>
-              </a:rPr>
-              <a:t>py_version =</a:t>
-            </a:r>
-            <a:r>
-              <a:rPr>
-                <a:solidFill>
-                  <a:srgbClr val="003B4F"/>
-                </a:solidFill>
-                <a:latin typeface="Courier"/>
-              </a:rPr>
-              <a:t> </a:t>
-            </a:r>
-            <a:r>
-              <a:rPr>
-                <a:solidFill>
-                  <a:srgbClr val="20794D"/>
-                </a:solidFill>
-                <a:latin typeface="Courier"/>
-              </a:rPr>
-              <a:t>"3.13"</a:t>
-            </a:r>
-            <a:r>
-              <a:rPr>
-                <a:solidFill>
-                  <a:srgbClr val="003B4F"/>
-                </a:solidFill>
-                <a:latin typeface="Courier"/>
-              </a:rPr>
-              <a:t>, </a:t>
-            </a:r>
-            <a:br/>
-            <a:r>
-              <a:rPr>
-                <a:solidFill>
-                  <a:srgbClr val="003B4F"/>
-                </a:solidFill>
-                <a:latin typeface="Courier"/>
-              </a:rPr>
-              <a:t>      </a:t>
-            </a:r>
-            <a:r>
-              <a:rPr>
-                <a:solidFill>
-                  <a:srgbClr val="657422"/>
-                </a:solidFill>
-                <a:latin typeface="Courier"/>
-              </a:rPr>
-              <a:t>py_pkgs =</a:t>
-            </a:r>
-            <a:r>
-              <a:rPr>
-                <a:solidFill>
-                  <a:srgbClr val="003B4F"/>
-                </a:solidFill>
-                <a:latin typeface="Courier"/>
-              </a:rPr>
-              <a:t> </a:t>
-            </a:r>
-            <a:r>
-              <a:rPr>
-                <a:solidFill>
-                  <a:srgbClr val="4758AB"/>
-                </a:solidFill>
-                <a:latin typeface="Courier"/>
-              </a:rPr>
-              <a:t>c</a:t>
-            </a:r>
-            <a:r>
-              <a:rPr>
-                <a:solidFill>
-                  <a:srgbClr val="003B4F"/>
-                </a:solidFill>
-                <a:latin typeface="Courier"/>
-              </a:rPr>
-              <a:t>(</a:t>
-            </a:r>
-            <a:r>
-              <a:rPr>
-                <a:solidFill>
-                  <a:srgbClr val="20794D"/>
-                </a:solidFill>
-                <a:latin typeface="Courier"/>
-              </a:rPr>
-              <a:t>"polars"</a:t>
-            </a:r>
-            <a:r>
-              <a:rPr>
-                <a:solidFill>
-                  <a:srgbClr val="003B4F"/>
-                </a:solidFill>
-                <a:latin typeface="Courier"/>
-              </a:rPr>
-              <a:t>, </a:t>
-            </a:r>
-            <a:r>
-              <a:rPr>
-                <a:solidFill>
-                  <a:srgbClr val="20794D"/>
-                </a:solidFill>
-                <a:latin typeface="Courier"/>
-              </a:rPr>
-              <a:t>"scikit-learn"</a:t>
-            </a:r>
-            <a:r>
-              <a:rPr>
-                <a:solidFill>
-                  <a:srgbClr val="003B4F"/>
-                </a:solidFill>
-                <a:latin typeface="Courier"/>
-              </a:rPr>
               <a:t>)</a:t>
-            </a:r>
-            <a:br/>
-            <a:r>
-              <a:rPr>
-                <a:solidFill>
-                  <a:srgbClr val="003B4F"/>
-                </a:solidFill>
-                <a:latin typeface="Courier"/>
-              </a:rPr>
-              <a:t>    ),</a:t>
-            </a:r>
-            <a:br/>
-            <a:r>
-              <a:rPr>
-                <a:solidFill>
-                  <a:srgbClr val="003B4F"/>
-                </a:solidFill>
-                <a:latin typeface="Courier"/>
-              </a:rPr>
-              <a:t>    </a:t>
-            </a:r>
-            <a:r>
-              <a:rPr>
-                <a:solidFill>
-                  <a:srgbClr val="657422"/>
-                </a:solidFill>
-                <a:latin typeface="Courier"/>
-              </a:rPr>
-              <a:t>ide =</a:t>
-            </a:r>
-            <a:r>
-              <a:rPr>
-                <a:solidFill>
-                  <a:srgbClr val="003B4F"/>
-                </a:solidFill>
-                <a:latin typeface="Courier"/>
-              </a:rPr>
-              <a:t> </a:t>
-            </a:r>
-            <a:r>
-              <a:rPr>
-                <a:solidFill>
-                  <a:srgbClr val="20794D"/>
-                </a:solidFill>
-                <a:latin typeface="Courier"/>
-              </a:rPr>
-              <a:t>"none"</a:t>
-            </a:r>
-            <a:r>
-              <a:rPr>
-                <a:solidFill>
-                  <a:srgbClr val="003B4F"/>
-                </a:solidFill>
-                <a:latin typeface="Courier"/>
-              </a:rPr>
-              <a:t>,</a:t>
-            </a:r>
-            <a:br/>
-            <a:r>
-              <a:rPr>
-                <a:solidFill>
-                  <a:srgbClr val="003B4F"/>
-                </a:solidFill>
-                <a:latin typeface="Courier"/>
-              </a:rPr>
-              <a:t>    </a:t>
-            </a:r>
-            <a:r>
-              <a:rPr>
-                <a:solidFill>
-                  <a:srgbClr val="657422"/>
-                </a:solidFill>
-                <a:latin typeface="Courier"/>
-              </a:rPr>
-              <a:t>project_path =</a:t>
-            </a:r>
-            <a:r>
-              <a:rPr>
-                <a:solidFill>
-                  <a:srgbClr val="003B4F"/>
-                </a:solidFill>
-                <a:latin typeface="Courier"/>
-              </a:rPr>
-              <a:t> </a:t>
-            </a:r>
-            <a:r>
-              <a:rPr>
-                <a:solidFill>
-                  <a:srgbClr val="20794D"/>
-                </a:solidFill>
-                <a:latin typeface="Courier"/>
-              </a:rPr>
-              <a:t>"."</a:t>
-            </a:r>
-            <a:r>
-              <a:rPr>
-                <a:solidFill>
-                  <a:srgbClr val="003B4F"/>
-                </a:solidFill>
-                <a:latin typeface="Courier"/>
-              </a:rPr>
-              <a:t>,</a:t>
-            </a:r>
-            <a:br/>
-            <a:r>
-              <a:rPr>
-                <a:solidFill>
-                  <a:srgbClr val="003B4F"/>
-                </a:solidFill>
-                <a:latin typeface="Courier"/>
-              </a:rPr>
-              <a:t>    </a:t>
-            </a:r>
-            <a:r>
-              <a:rPr>
-                <a:solidFill>
-                  <a:srgbClr val="657422"/>
-                </a:solidFill>
-                <a:latin typeface="Courier"/>
-              </a:rPr>
-              <a:t>overwrite =</a:t>
-            </a:r>
-            <a:r>
-              <a:rPr>
-                <a:solidFill>
-                  <a:srgbClr val="003B4F"/>
-                </a:solidFill>
-                <a:latin typeface="Courier"/>
-              </a:rPr>
-              <a:t> </a:t>
-            </a:r>
-            <a:r>
-              <a:rPr>
-                <a:solidFill>
-                  <a:srgbClr val="8F5902"/>
-                </a:solidFill>
-                <a:latin typeface="Courier"/>
-              </a:rPr>
-              <a:t>TRUE</a:t>
-            </a:r>
-            <a:r>
-              <a:rPr>
-                <a:solidFill>
-                  <a:srgbClr val="003B4F"/>
-                </a:solidFill>
-                <a:latin typeface="Courier"/>
-              </a:rPr>
-              <a:t>)</a:t>
-            </a:r>
-          </a:p>
-          <a:p>
-            <a:pPr lvl="0"/>
-            <a:r>
-              <a:rPr/>
-              <a:t>Julia: use </a:t>
-            </a:r>
-            <a:r>
-              <a:rPr>
-                <a:latin typeface="Courier"/>
-              </a:rPr>
-              <a:t>jl_conf = list(jl_version = "1.10", jl_pkgs = c(...))</a:t>
-            </a:r>
-          </a:p>
-          <a:p>
-            <a:pPr lvl="0"/>
-            <a:r>
-              <a:rPr/>
-              <a:t>See: </a:t>
-            </a:r>
-            <a:r>
-              <a:rPr>
-                <a:latin typeface="Courier"/>
-              </a:rPr>
-              <a:t>scripts/nix_expressions/02_native_positron_example/</a:t>
             </a:r>
           </a:p>
         </p:txBody>
@@ -4560,7 +4132,7 @@
             </a:pPr>
             <a:r>
               <a:rPr/>
-              <a:t>Demo</a:t>
+              <a:t>rix: reproducible development environments with Nix (2/2)</a:t>
             </a:r>
           </a:p>
         </p:txBody>
@@ -4582,99 +4154,71 @@
           <a:p>
             <a:pPr lvl="0"/>
             <a:r>
-              <a:rPr/>
-              <a:t>Basics: </a:t>
-            </a:r>
-            <a:r>
-              <a:rPr>
-                <a:latin typeface="Courier"/>
-              </a:rPr>
-              <a:t>scripts/nix_expressions/01_rix_intro/</a:t>
-            </a:r>
-          </a:p>
-          <a:p>
-            <a:pPr lvl="0"/>
-            <a:r>
-              <a:rPr/>
-              <a:t>Native VS Code/Positron on Windows: </a:t>
-            </a:r>
-            <a:r>
-              <a:rPr>
-                <a:latin typeface="Courier"/>
-              </a:rPr>
-              <a:t>scripts/nix_expressions/02_native_positron_example/</a:t>
-            </a:r>
-          </a:p>
-          <a:p>
-            <a:pPr lvl="0"/>
-            <a:r>
-              <a:rPr/>
-              <a:t>Nix and </a:t>
-            </a:r>
-            <a:r>
-              <a:rPr>
-                <a:latin typeface="Courier"/>
-              </a:rPr>
-              <a:t>{targets}</a:t>
-            </a:r>
-            <a:r>
-              <a:rPr/>
-              <a:t>: </a:t>
-            </a:r>
-            <a:r>
-              <a:rPr>
-                <a:latin typeface="Courier"/>
-              </a:rPr>
-              <a:t>scripts/nix_expressions/03_nix_targets_pipeline</a:t>
-            </a:r>
-          </a:p>
-          <a:p>
-            <a:pPr lvl="0"/>
-            <a:r>
-              <a:rPr/>
-              <a:t>Nix and Docker: </a:t>
-            </a:r>
-            <a:r>
-              <a:rPr>
-                <a:latin typeface="Courier"/>
-              </a:rPr>
-              <a:t>scripts/nix_expressions/04_docker/</a:t>
-            </a:r>
-          </a:p>
-          <a:p>
-            <a:pPr lvl="0"/>
-            <a:r>
-              <a:rPr/>
-              <a:t>Nix and </a:t>
-            </a:r>
-            <a:r>
-              <a:rPr>
-                <a:latin typeface="Courier"/>
-              </a:rPr>
-              <a:t>{shiny}</a:t>
-            </a:r>
-            <a:r>
-              <a:rPr/>
-              <a:t>: </a:t>
-            </a:r>
-            <a:r>
-              <a:rPr>
-                <a:latin typeface="Courier"/>
-              </a:rPr>
-              <a:t>scripts/nix_expressions/05_shiny</a:t>
-            </a:r>
-          </a:p>
-          <a:p>
-            <a:pPr lvl="0"/>
-            <a:r>
-              <a:rPr/>
-              <a:t>GitHub Actions: </a:t>
-            </a:r>
-            <a:r>
-              <a:rPr>
-                <a:hlinkClick r:id="rId2"/>
-              </a:rPr>
-              <a:t>see here</a:t>
+              <a:rPr>
+                <a:latin typeface="Courier"/>
+              </a:rPr>
+              <a:t>rix::rix()</a:t>
+            </a:r>
+            <a:r>
+              <a:rPr/>
+              <a:t> generates a </a:t>
+            </a:r>
+            <a:r>
+              <a:rPr>
+                <a:latin typeface="Courier"/>
+              </a:rPr>
+              <a:t>default.nix</a:t>
+            </a:r>
+            <a:r>
+              <a:rPr/>
+              <a:t> file</a:t>
+            </a:r>
+          </a:p>
+          <a:p>
+            <a:pPr lvl="0"/>
+            <a:r>
+              <a:rPr/>
+              <a:t>Build the expressions with </a:t>
+            </a:r>
+            <a:r>
+              <a:rPr>
+                <a:latin typeface="Courier"/>
+              </a:rPr>
+              <a:t>nix-build</a:t>
+            </a:r>
+            <a:r>
+              <a:rPr/>
+              <a:t> (in terminal) or </a:t>
+            </a:r>
+            <a:r>
+              <a:rPr>
+                <a:latin typeface="Courier"/>
+              </a:rPr>
+              <a:t>rix::nix_build()</a:t>
+            </a:r>
+            <a:r>
+              <a:rPr/>
+              <a:t> from R</a:t>
+            </a:r>
+          </a:p>
+          <a:p>
+            <a:pPr lvl="0"/>
+            <a:r>
+              <a:rPr/>
+              <a:t>Access the development environment with </a:t>
+            </a:r>
+            <a:r>
+              <a:rPr>
+                <a:latin typeface="Courier"/>
+              </a:rPr>
+              <a:t>nix-shell</a:t>
+            </a:r>
+          </a:p>
+          <a:p>
+            <a:pPr lvl="0"/>
+            <a:r>
+              <a:rPr/>
+              <a:t>Expressions can be generated even without Nix installed (with some limitations)</a:t>
             </a:r>
           </a:p>
         </p:txBody>
@@ -4721,13 +4265,7 @@
             </a:pPr>
             <a:r>
               <a:rPr/>
-              <a:t>Polyglot pipelines with </a:t>
-            </a:r>
-            <a:r>
-              <a:rPr>
-                <a:latin typeface="Courier"/>
-              </a:rPr>
-              <a:t>{rixpress}</a:t>
+              <a:t>Polyglot environments with rix</a:t>
             </a:r>
           </a:p>
         </p:txBody>
@@ -4752,56 +4290,545 @@
               <a:rPr>
                 <a:latin typeface="Courier"/>
               </a:rPr>
-              <a:t>{rixpress}</a:t>
-            </a:r>
-            <a:r>
-              <a:rPr/>
-              <a:t> allows chaining processing steps in R, Python and Julia</a:t>
-            </a:r>
-          </a:p>
-          <a:p>
-            <a:pPr lvl="0"/>
-            <a:r>
-              <a:rPr/>
-              <a:t>Uses </a:t>
-            </a:r>
-            <a:r>
-              <a:rPr>
-                <a:latin typeface="Courier"/>
-              </a:rPr>
-              <a:t>{rix}</a:t>
-            </a:r>
-            <a:r>
-              <a:rPr/>
-              <a:t> to create a reproducible (via Nix) execution environment for the pipeline</a:t>
-            </a:r>
-          </a:p>
-          <a:p>
-            <a:pPr lvl="0"/>
-            <a:r>
-              <a:rPr/>
-              <a:t>Each pipeline step is a </a:t>
-            </a:r>
-            <a:r>
-              <a:rPr b="1"/>
-              <a:t>Nix derivation</a:t>
-            </a:r>
-          </a:p>
-          <a:p>
-            <a:pPr lvl="0"/>
-            <a:r>
-              <a:rPr/>
-              <a:t>Data transfer: automatic via </a:t>
-            </a:r>
-            <a:r>
-              <a:rPr>
-                <a:latin typeface="Courier"/>
-              </a:rPr>
-              <a:t>reticulate</a:t>
-            </a:r>
-            <a:r>
-              <a:rPr/>
-              <a:t> or universal format (JSON)</a:t>
+              <a:t>rix()</a:t>
+            </a:r>
+            <a:r>
+              <a:rPr/>
+              <a:t> supports Python and Julia alongside R:</a:t>
+            </a:r>
+          </a:p>
+          <a:p>
+            <a:pPr lvl="0" indent="0" marL="0">
+              <a:buNone/>
+            </a:pPr>
+            <a:r>
+              <a:rPr/>
+              <a:t>. . .</a:t>
+            </a:r>
+          </a:p>
+          <a:p>
+            <a:pPr lvl="0" indent="0">
+              <a:buNone/>
+            </a:pPr>
+            <a:r>
+              <a:rPr>
+                <a:solidFill>
+                  <a:srgbClr val="4758AB"/>
+                </a:solidFill>
+                <a:latin typeface="Courier"/>
+              </a:rPr>
+              <a:t>rix</a:t>
+            </a:r>
+            <a:r>
+              <a:rPr>
+                <a:solidFill>
+                  <a:srgbClr val="003B4F"/>
+                </a:solidFill>
+                <a:latin typeface="Courier"/>
+              </a:rPr>
+              <a:t>(</a:t>
+            </a:r>
+            <a:r>
+              <a:rPr>
+                <a:solidFill>
+                  <a:srgbClr val="657422"/>
+                </a:solidFill>
+                <a:latin typeface="Courier"/>
+              </a:rPr>
+              <a:t>date =</a:t>
+            </a:r>
+            <a:r>
+              <a:rPr>
+                <a:solidFill>
+                  <a:srgbClr val="003B4F"/>
+                </a:solidFill>
+                <a:latin typeface="Courier"/>
+              </a:rPr>
+              <a:t> </a:t>
+            </a:r>
+            <a:r>
+              <a:rPr>
+                <a:solidFill>
+                  <a:srgbClr val="20794D"/>
+                </a:solidFill>
+                <a:latin typeface="Courier"/>
+              </a:rPr>
+              <a:t>"2025-06-09"</a:t>
+            </a:r>
+            <a:r>
+              <a:rPr>
+                <a:solidFill>
+                  <a:srgbClr val="003B4F"/>
+                </a:solidFill>
+                <a:latin typeface="Courier"/>
+              </a:rPr>
+              <a:t>,</a:t>
+            </a:r>
+            <a:br/>
+            <a:r>
+              <a:rPr>
+                <a:solidFill>
+                  <a:srgbClr val="003B4F"/>
+                </a:solidFill>
+                <a:latin typeface="Courier"/>
+              </a:rPr>
+              <a:t>    </a:t>
+            </a:r>
+            <a:r>
+              <a:rPr>
+                <a:solidFill>
+                  <a:srgbClr val="657422"/>
+                </a:solidFill>
+                <a:latin typeface="Courier"/>
+              </a:rPr>
+              <a:t>r_pkgs =</a:t>
+            </a:r>
+            <a:r>
+              <a:rPr>
+                <a:solidFill>
+                  <a:srgbClr val="003B4F"/>
+                </a:solidFill>
+                <a:latin typeface="Courier"/>
+              </a:rPr>
+              <a:t> </a:t>
+            </a:r>
+            <a:r>
+              <a:rPr>
+                <a:solidFill>
+                  <a:srgbClr val="4758AB"/>
+                </a:solidFill>
+                <a:latin typeface="Courier"/>
+              </a:rPr>
+              <a:t>c</a:t>
+            </a:r>
+            <a:r>
+              <a:rPr>
+                <a:solidFill>
+                  <a:srgbClr val="003B4F"/>
+                </a:solidFill>
+                <a:latin typeface="Courier"/>
+              </a:rPr>
+              <a:t>(</a:t>
+            </a:r>
+            <a:r>
+              <a:rPr>
+                <a:solidFill>
+                  <a:srgbClr val="20794D"/>
+                </a:solidFill>
+                <a:latin typeface="Courier"/>
+              </a:rPr>
+              <a:t>"tidyr"</a:t>
+            </a:r>
+            <a:r>
+              <a:rPr>
+                <a:solidFill>
+                  <a:srgbClr val="003B4F"/>
+                </a:solidFill>
+                <a:latin typeface="Courier"/>
+              </a:rPr>
+              <a:t>, </a:t>
+            </a:r>
+            <a:r>
+              <a:rPr>
+                <a:solidFill>
+                  <a:srgbClr val="20794D"/>
+                </a:solidFill>
+                <a:latin typeface="Courier"/>
+              </a:rPr>
+              <a:t>"dplyr"</a:t>
+            </a:r>
+            <a:r>
+              <a:rPr>
+                <a:solidFill>
+                  <a:srgbClr val="003B4F"/>
+                </a:solidFill>
+                <a:latin typeface="Courier"/>
+              </a:rPr>
+              <a:t>, </a:t>
+            </a:r>
+            <a:r>
+              <a:rPr>
+                <a:solidFill>
+                  <a:srgbClr val="20794D"/>
+                </a:solidFill>
+                <a:latin typeface="Courier"/>
+              </a:rPr>
+              <a:t>"ggplot2"</a:t>
+            </a:r>
+            <a:r>
+              <a:rPr>
+                <a:solidFill>
+                  <a:srgbClr val="003B4F"/>
+                </a:solidFill>
+                <a:latin typeface="Courier"/>
+              </a:rPr>
+              <a:t>, </a:t>
+            </a:r>
+            <a:r>
+              <a:rPr>
+                <a:solidFill>
+                  <a:srgbClr val="20794D"/>
+                </a:solidFill>
+                <a:latin typeface="Courier"/>
+              </a:rPr>
+              <a:t>"languageserver"</a:t>
+            </a:r>
+            <a:r>
+              <a:rPr>
+                <a:solidFill>
+                  <a:srgbClr val="003B4F"/>
+                </a:solidFill>
+                <a:latin typeface="Courier"/>
+              </a:rPr>
+              <a:t>),</a:t>
+            </a:r>
+            <a:br/>
+            <a:r>
+              <a:rPr>
+                <a:solidFill>
+                  <a:srgbClr val="003B4F"/>
+                </a:solidFill>
+                <a:latin typeface="Courier"/>
+              </a:rPr>
+              <a:t>    </a:t>
+            </a:r>
+            <a:r>
+              <a:rPr>
+                <a:solidFill>
+                  <a:srgbClr val="657422"/>
+                </a:solidFill>
+                <a:latin typeface="Courier"/>
+              </a:rPr>
+              <a:t>py_conf =</a:t>
+            </a:r>
+            <a:r>
+              <a:rPr>
+                <a:solidFill>
+                  <a:srgbClr val="003B4F"/>
+                </a:solidFill>
+                <a:latin typeface="Courier"/>
+              </a:rPr>
+              <a:t> </a:t>
+            </a:r>
+            <a:r>
+              <a:rPr>
+                <a:solidFill>
+                  <a:srgbClr val="4758AB"/>
+                </a:solidFill>
+                <a:latin typeface="Courier"/>
+              </a:rPr>
+              <a:t>list</a:t>
+            </a:r>
+            <a:r>
+              <a:rPr>
+                <a:solidFill>
+                  <a:srgbClr val="003B4F"/>
+                </a:solidFill>
+                <a:latin typeface="Courier"/>
+              </a:rPr>
+              <a:t>(</a:t>
+            </a:r>
+            <a:br/>
+            <a:r>
+              <a:rPr>
+                <a:solidFill>
+                  <a:srgbClr val="003B4F"/>
+                </a:solidFill>
+                <a:latin typeface="Courier"/>
+              </a:rPr>
+              <a:t>      </a:t>
+            </a:r>
+            <a:r>
+              <a:rPr>
+                <a:solidFill>
+                  <a:srgbClr val="657422"/>
+                </a:solidFill>
+                <a:latin typeface="Courier"/>
+              </a:rPr>
+              <a:t>py_version =</a:t>
+            </a:r>
+            <a:r>
+              <a:rPr>
+                <a:solidFill>
+                  <a:srgbClr val="003B4F"/>
+                </a:solidFill>
+                <a:latin typeface="Courier"/>
+              </a:rPr>
+              <a:t> </a:t>
+            </a:r>
+            <a:r>
+              <a:rPr>
+                <a:solidFill>
+                  <a:srgbClr val="20794D"/>
+                </a:solidFill>
+                <a:latin typeface="Courier"/>
+              </a:rPr>
+              <a:t>"3.13"</a:t>
+            </a:r>
+            <a:r>
+              <a:rPr>
+                <a:solidFill>
+                  <a:srgbClr val="003B4F"/>
+                </a:solidFill>
+                <a:latin typeface="Courier"/>
+              </a:rPr>
+              <a:t>, </a:t>
+            </a:r>
+            <a:br/>
+            <a:r>
+              <a:rPr>
+                <a:solidFill>
+                  <a:srgbClr val="003B4F"/>
+                </a:solidFill>
+                <a:latin typeface="Courier"/>
+              </a:rPr>
+              <a:t>      </a:t>
+            </a:r>
+            <a:r>
+              <a:rPr>
+                <a:solidFill>
+                  <a:srgbClr val="657422"/>
+                </a:solidFill>
+                <a:latin typeface="Courier"/>
+              </a:rPr>
+              <a:t>py_pkgs =</a:t>
+            </a:r>
+            <a:r>
+              <a:rPr>
+                <a:solidFill>
+                  <a:srgbClr val="003B4F"/>
+                </a:solidFill>
+                <a:latin typeface="Courier"/>
+              </a:rPr>
+              <a:t> </a:t>
+            </a:r>
+            <a:r>
+              <a:rPr>
+                <a:solidFill>
+                  <a:srgbClr val="4758AB"/>
+                </a:solidFill>
+                <a:latin typeface="Courier"/>
+              </a:rPr>
+              <a:t>c</a:t>
+            </a:r>
+            <a:r>
+              <a:rPr>
+                <a:solidFill>
+                  <a:srgbClr val="003B4F"/>
+                </a:solidFill>
+                <a:latin typeface="Courier"/>
+              </a:rPr>
+              <a:t>(</a:t>
+            </a:r>
+            <a:r>
+              <a:rPr>
+                <a:solidFill>
+                  <a:srgbClr val="20794D"/>
+                </a:solidFill>
+                <a:latin typeface="Courier"/>
+              </a:rPr>
+              <a:t>"polars"</a:t>
+            </a:r>
+            <a:r>
+              <a:rPr>
+                <a:solidFill>
+                  <a:srgbClr val="003B4F"/>
+                </a:solidFill>
+                <a:latin typeface="Courier"/>
+              </a:rPr>
+              <a:t>, </a:t>
+            </a:r>
+            <a:r>
+              <a:rPr>
+                <a:solidFill>
+                  <a:srgbClr val="20794D"/>
+                </a:solidFill>
+                <a:latin typeface="Courier"/>
+              </a:rPr>
+              <a:t>"scikit-learn"</a:t>
+            </a:r>
+            <a:r>
+              <a:rPr>
+                <a:solidFill>
+                  <a:srgbClr val="003B4F"/>
+                </a:solidFill>
+                <a:latin typeface="Courier"/>
+              </a:rPr>
+              <a:t>)</a:t>
+            </a:r>
+            <a:br/>
+            <a:r>
+              <a:rPr>
+                <a:solidFill>
+                  <a:srgbClr val="003B4F"/>
+                </a:solidFill>
+                <a:latin typeface="Courier"/>
+              </a:rPr>
+              <a:t>    ),</a:t>
+            </a:r>
+            <a:br/>
+            <a:r>
+              <a:rPr>
+                <a:solidFill>
+                  <a:srgbClr val="003B4F"/>
+                </a:solidFill>
+                <a:latin typeface="Courier"/>
+              </a:rPr>
+              <a:t>    </a:t>
+            </a:r>
+            <a:r>
+              <a:rPr>
+                <a:solidFill>
+                  <a:srgbClr val="657422"/>
+                </a:solidFill>
+                <a:latin typeface="Courier"/>
+              </a:rPr>
+              <a:t>ide =</a:t>
+            </a:r>
+            <a:r>
+              <a:rPr>
+                <a:solidFill>
+                  <a:srgbClr val="003B4F"/>
+                </a:solidFill>
+                <a:latin typeface="Courier"/>
+              </a:rPr>
+              <a:t> </a:t>
+            </a:r>
+            <a:r>
+              <a:rPr>
+                <a:solidFill>
+                  <a:srgbClr val="20794D"/>
+                </a:solidFill>
+                <a:latin typeface="Courier"/>
+              </a:rPr>
+              <a:t>"none"</a:t>
+            </a:r>
+            <a:r>
+              <a:rPr>
+                <a:solidFill>
+                  <a:srgbClr val="003B4F"/>
+                </a:solidFill>
+                <a:latin typeface="Courier"/>
+              </a:rPr>
+              <a:t>,</a:t>
+            </a:r>
+            <a:br/>
+            <a:r>
+              <a:rPr>
+                <a:solidFill>
+                  <a:srgbClr val="003B4F"/>
+                </a:solidFill>
+                <a:latin typeface="Courier"/>
+              </a:rPr>
+              <a:t>    </a:t>
+            </a:r>
+            <a:r>
+              <a:rPr>
+                <a:solidFill>
+                  <a:srgbClr val="657422"/>
+                </a:solidFill>
+                <a:latin typeface="Courier"/>
+              </a:rPr>
+              <a:t>project_path =</a:t>
+            </a:r>
+            <a:r>
+              <a:rPr>
+                <a:solidFill>
+                  <a:srgbClr val="003B4F"/>
+                </a:solidFill>
+                <a:latin typeface="Courier"/>
+              </a:rPr>
+              <a:t> </a:t>
+            </a:r>
+            <a:r>
+              <a:rPr>
+                <a:solidFill>
+                  <a:srgbClr val="20794D"/>
+                </a:solidFill>
+                <a:latin typeface="Courier"/>
+              </a:rPr>
+              <a:t>"."</a:t>
+            </a:r>
+            <a:r>
+              <a:rPr>
+                <a:solidFill>
+                  <a:srgbClr val="003B4F"/>
+                </a:solidFill>
+                <a:latin typeface="Courier"/>
+              </a:rPr>
+              <a:t>,</a:t>
+            </a:r>
+            <a:br/>
+            <a:r>
+              <a:rPr>
+                <a:solidFill>
+                  <a:srgbClr val="003B4F"/>
+                </a:solidFill>
+                <a:latin typeface="Courier"/>
+              </a:rPr>
+              <a:t>    </a:t>
+            </a:r>
+            <a:r>
+              <a:rPr>
+                <a:solidFill>
+                  <a:srgbClr val="657422"/>
+                </a:solidFill>
+                <a:latin typeface="Courier"/>
+              </a:rPr>
+              <a:t>overwrite =</a:t>
+            </a:r>
+            <a:r>
+              <a:rPr>
+                <a:solidFill>
+                  <a:srgbClr val="003B4F"/>
+                </a:solidFill>
+                <a:latin typeface="Courier"/>
+              </a:rPr>
+              <a:t> </a:t>
+            </a:r>
+            <a:r>
+              <a:rPr>
+                <a:solidFill>
+                  <a:srgbClr val="8F5902"/>
+                </a:solidFill>
+                <a:latin typeface="Courier"/>
+              </a:rPr>
+              <a:t>TRUE</a:t>
+            </a:r>
+            <a:r>
+              <a:rPr>
+                <a:solidFill>
+                  <a:srgbClr val="003B4F"/>
+                </a:solidFill>
+                <a:latin typeface="Courier"/>
+              </a:rPr>
+              <a:t>)</a:t>
+            </a:r>
+          </a:p>
+          <a:p>
+            <a:pPr lvl="0"/>
+            <a:r>
+              <a:rPr/>
+              <a:t>Julia: use </a:t>
+            </a:r>
+            <a:r>
+              <a:rPr>
+                <a:latin typeface="Courier"/>
+              </a:rPr>
+              <a:t>jl_conf = list(jl_version = "1.10", jl_pkgs = c(...))</a:t>
+            </a:r>
+          </a:p>
+          <a:p>
+            <a:pPr lvl="0"/>
+            <a:r>
+              <a:rPr/>
+              <a:t>See: </a:t>
+            </a:r>
+            <a:r>
+              <a:rPr>
+                <a:latin typeface="Courier"/>
+              </a:rPr>
+              <a:t>scripts/nix_expressions/02_native_positron_example/</a:t>
             </a:r>
           </a:p>
         </p:txBody>
@@ -4848,7 +4875,7 @@
             </a:pPr>
             <a:r>
               <a:rPr/>
-              <a:t>An example of a polyglot pipeline</a:t>
+              <a:t>Demo</a:t>
             </a:r>
           </a:p>
         </p:txBody>
@@ -4868,422 +4895,101 @@
           <a:bodyPr/>
           <a:lstStyle/>
           <a:p>
-            <a:pPr lvl="0" indent="0">
-              <a:buNone/>
-            </a:pPr>
-            <a:r>
-              <a:rPr>
-                <a:solidFill>
-                  <a:srgbClr val="4758AB"/>
-                </a:solidFill>
-                <a:latin typeface="Courier"/>
-              </a:rPr>
-              <a:t>list</a:t>
-            </a:r>
-            <a:r>
-              <a:rPr>
-                <a:solidFill>
-                  <a:srgbClr val="003B4F"/>
-                </a:solidFill>
-                <a:latin typeface="Courier"/>
-              </a:rPr>
-              <a:t>(</a:t>
-            </a:r>
-            <a:br/>
-            <a:r>
-              <a:rPr>
-                <a:solidFill>
-                  <a:srgbClr val="003B4F"/>
-                </a:solidFill>
-                <a:latin typeface="Courier"/>
-              </a:rPr>
-              <a:t>  </a:t>
-            </a:r>
-            <a:r>
-              <a:rPr>
-                <a:solidFill>
-                  <a:srgbClr val="4758AB"/>
-                </a:solidFill>
-                <a:latin typeface="Courier"/>
-              </a:rPr>
-              <a:t>rxp_py_file</a:t>
-            </a:r>
-            <a:r>
-              <a:rPr>
-                <a:solidFill>
-                  <a:srgbClr val="003B4F"/>
-                </a:solidFill>
-                <a:latin typeface="Courier"/>
-              </a:rPr>
-              <a:t>(…),    </a:t>
-            </a:r>
-            <a:r>
-              <a:rPr>
-                <a:solidFill>
-                  <a:srgbClr val="5E5E5E"/>
-                </a:solidFill>
-                <a:latin typeface="Courier"/>
-              </a:rPr>
-              <a:t># Read a CSV with Python</a:t>
-            </a:r>
-            <a:br/>
-            <a:r>
-              <a:rPr>
-                <a:solidFill>
-                  <a:srgbClr val="003B4F"/>
-                </a:solidFill>
-                <a:latin typeface="Courier"/>
-              </a:rPr>
-              <a:t>  </a:t>
-            </a:r>
-            <a:r>
-              <a:rPr>
-                <a:solidFill>
-                  <a:srgbClr val="4758AB"/>
-                </a:solidFill>
-                <a:latin typeface="Courier"/>
-              </a:rPr>
-              <a:t>rxp_py</a:t>
-            </a:r>
-            <a:r>
-              <a:rPr>
-                <a:solidFill>
-                  <a:srgbClr val="003B4F"/>
-                </a:solidFill>
-                <a:latin typeface="Courier"/>
-              </a:rPr>
-              <a:t>(…),         </a:t>
-            </a:r>
-            <a:r>
-              <a:rPr>
-                <a:solidFill>
-                  <a:srgbClr val="5E5E5E"/>
-                </a:solidFill>
-                <a:latin typeface="Courier"/>
-              </a:rPr>
-              <a:t># Filter with Polars</a:t>
-            </a:r>
-            <a:br/>
-            <a:r>
-              <a:rPr>
-                <a:solidFill>
-                  <a:srgbClr val="003B4F"/>
-                </a:solidFill>
-                <a:latin typeface="Courier"/>
-              </a:rPr>
-              <a:t>  </a:t>
-            </a:r>
-            <a:r>
-              <a:rPr>
-                <a:solidFill>
-                  <a:srgbClr val="4758AB"/>
-                </a:solidFill>
-                <a:latin typeface="Courier"/>
-              </a:rPr>
-              <a:t>rxp_py2r</a:t>
-            </a:r>
-            <a:r>
-              <a:rPr>
-                <a:solidFill>
-                  <a:srgbClr val="003B4F"/>
-                </a:solidFill>
-                <a:latin typeface="Courier"/>
-              </a:rPr>
-              <a:t>(…),       </a:t>
-            </a:r>
-            <a:r>
-              <a:rPr>
-                <a:solidFill>
-                  <a:srgbClr val="5E5E5E"/>
-                </a:solidFill>
-                <a:latin typeface="Courier"/>
-              </a:rPr>
-              <a:t># Python → R transfer</a:t>
-            </a:r>
-            <a:br/>
-            <a:r>
-              <a:rPr>
-                <a:solidFill>
-                  <a:srgbClr val="003B4F"/>
-                </a:solidFill>
-                <a:latin typeface="Courier"/>
-              </a:rPr>
-              <a:t>  </a:t>
-            </a:r>
-            <a:r>
-              <a:rPr>
-                <a:solidFill>
-                  <a:srgbClr val="4758AB"/>
-                </a:solidFill>
-                <a:latin typeface="Courier"/>
-              </a:rPr>
-              <a:t>rxp_r</a:t>
-            </a:r>
-            <a:r>
-              <a:rPr>
-                <a:solidFill>
-                  <a:srgbClr val="003B4F"/>
-                </a:solidFill>
-                <a:latin typeface="Courier"/>
-              </a:rPr>
-              <a:t>(…),          </a:t>
-            </a:r>
-            <a:r>
-              <a:rPr>
-                <a:solidFill>
-                  <a:srgbClr val="5E5E5E"/>
-                </a:solidFill>
-                <a:latin typeface="Courier"/>
-              </a:rPr>
-              <a:t># Transformation in R</a:t>
-            </a:r>
-            <a:br/>
-            <a:r>
-              <a:rPr>
-                <a:solidFill>
-                  <a:srgbClr val="003B4F"/>
-                </a:solidFill>
-                <a:latin typeface="Courier"/>
-              </a:rPr>
-              <a:t>  </a:t>
-            </a:r>
-            <a:r>
-              <a:rPr>
-                <a:solidFill>
-                  <a:srgbClr val="4758AB"/>
-                </a:solidFill>
-                <a:latin typeface="Courier"/>
-              </a:rPr>
-              <a:t>rxp_r2py</a:t>
-            </a:r>
-            <a:r>
-              <a:rPr>
-                <a:solidFill>
-                  <a:srgbClr val="003B4F"/>
-                </a:solidFill>
-                <a:latin typeface="Courier"/>
-              </a:rPr>
-              <a:t>(…),       </a:t>
-            </a:r>
-            <a:r>
-              <a:rPr>
-                <a:solidFill>
-                  <a:srgbClr val="5E5E5E"/>
-                </a:solidFill>
-                <a:latin typeface="Courier"/>
-              </a:rPr>
-              <a:t># R → Python transfer</a:t>
-            </a:r>
-            <a:br/>
-            <a:r>
-              <a:rPr>
-                <a:solidFill>
-                  <a:srgbClr val="003B4F"/>
-                </a:solidFill>
-                <a:latin typeface="Courier"/>
-              </a:rPr>
-              <a:t>  </a:t>
-            </a:r>
-            <a:r>
-              <a:rPr>
-                <a:solidFill>
-                  <a:srgbClr val="4758AB"/>
-                </a:solidFill>
-                <a:latin typeface="Courier"/>
-              </a:rPr>
-              <a:t>rxp_py</a:t>
-            </a:r>
-            <a:r>
-              <a:rPr>
-                <a:solidFill>
-                  <a:srgbClr val="003B4F"/>
-                </a:solidFill>
-                <a:latin typeface="Courier"/>
-              </a:rPr>
-              <a:t>(…),         </a:t>
-            </a:r>
-            <a:r>
-              <a:rPr>
-                <a:solidFill>
-                  <a:srgbClr val="5E5E5E"/>
-                </a:solidFill>
-                <a:latin typeface="Courier"/>
-              </a:rPr>
-              <a:t># Another Python step</a:t>
-            </a:r>
-            <a:br/>
-            <a:r>
-              <a:rPr>
-                <a:solidFill>
-                  <a:srgbClr val="003B4F"/>
-                </a:solidFill>
-                <a:latin typeface="Courier"/>
-              </a:rPr>
-              <a:t>  </a:t>
-            </a:r>
-            <a:r>
-              <a:rPr>
-                <a:solidFill>
-                  <a:srgbClr val="4758AB"/>
-                </a:solidFill>
-                <a:latin typeface="Courier"/>
-              </a:rPr>
-              <a:t>rxp_py2r</a:t>
-            </a:r>
-            <a:r>
-              <a:rPr>
-                <a:solidFill>
-                  <a:srgbClr val="003B4F"/>
-                </a:solidFill>
-                <a:latin typeface="Courier"/>
-              </a:rPr>
-              <a:t>(…),       </a:t>
-            </a:r>
-            <a:r>
-              <a:rPr>
-                <a:solidFill>
-                  <a:srgbClr val="5E5E5E"/>
-                </a:solidFill>
-                <a:latin typeface="Courier"/>
-              </a:rPr>
-              <a:t># Back to R</a:t>
-            </a:r>
-            <a:br/>
-            <a:r>
-              <a:rPr>
-                <a:solidFill>
-                  <a:srgbClr val="003B4F"/>
-                </a:solidFill>
-                <a:latin typeface="Courier"/>
-              </a:rPr>
-              <a:t>  </a:t>
-            </a:r>
-            <a:r>
-              <a:rPr>
-                <a:solidFill>
-                  <a:srgbClr val="4758AB"/>
-                </a:solidFill>
-                <a:latin typeface="Courier"/>
-              </a:rPr>
-              <a:t>rxp_r</a:t>
-            </a:r>
-            <a:r>
-              <a:rPr>
-                <a:solidFill>
-                  <a:srgbClr val="003B4F"/>
-                </a:solidFill>
-                <a:latin typeface="Courier"/>
-              </a:rPr>
-              <a:t>(…)           </a:t>
-            </a:r>
-            <a:r>
-              <a:rPr>
-                <a:solidFill>
-                  <a:srgbClr val="5E5E5E"/>
-                </a:solidFill>
-                <a:latin typeface="Courier"/>
-              </a:rPr>
-              <a:t># Final step</a:t>
-            </a:r>
-            <a:br/>
-            <a:r>
-              <a:rPr>
-                <a:solidFill>
-                  <a:srgbClr val="003B4F"/>
-                </a:solidFill>
-                <a:latin typeface="Courier"/>
-              </a:rPr>
-              <a:t>) </a:t>
-            </a:r>
-            <a:r>
-              <a:rPr>
-                <a:solidFill>
-                  <a:srgbClr val="5E5E5E"/>
-                </a:solidFill>
-                <a:latin typeface="Courier"/>
-              </a:rPr>
-              <a:t>|&gt;</a:t>
-            </a:r>
-            <a:r>
-              <a:rPr>
-                <a:solidFill>
-                  <a:srgbClr val="003B4F"/>
-                </a:solidFill>
-                <a:latin typeface="Courier"/>
-              </a:rPr>
-              <a:t> </a:t>
-            </a:r>
-            <a:r>
-              <a:rPr>
-                <a:solidFill>
-                  <a:srgbClr val="4758AB"/>
-                </a:solidFill>
-                <a:latin typeface="Courier"/>
-              </a:rPr>
-              <a:t>rixpress</a:t>
-            </a:r>
-            <a:r>
-              <a:rPr>
-                <a:solidFill>
-                  <a:srgbClr val="003B4F"/>
-                </a:solidFill>
-                <a:latin typeface="Courier"/>
-              </a:rPr>
-              <a:t>()</a:t>
-            </a:r>
-          </a:p>
-          <a:p>
-            <a:pPr lvl="0"/>
-            <a:r>
-              <a:rPr/>
-              <a:t>Each step is named and typed (</a:t>
-            </a:r>
-            <a:r>
-              <a:rPr>
-                <a:latin typeface="Courier"/>
-              </a:rPr>
-              <a:t>py</a:t>
-            </a:r>
-            <a:r>
-              <a:rPr/>
-              <a:t>, </a:t>
-            </a:r>
-            <a:r>
-              <a:rPr>
-                <a:latin typeface="Courier"/>
-              </a:rPr>
-              <a:t>r</a:t>
-            </a:r>
-            <a:r>
-              <a:rPr/>
-              <a:t>, </a:t>
-            </a:r>
-            <a:r>
-              <a:rPr>
-                <a:latin typeface="Courier"/>
-              </a:rPr>
-              <a:t>r2py</a:t>
-            </a:r>
-            <a:r>
-              <a:rPr/>
-              <a:t>, etc.)</a:t>
-            </a:r>
-          </a:p>
-          <a:p>
-            <a:pPr lvl="0"/>
-            <a:r>
-              <a:rPr/>
-              <a:t>Ability to add files (</a:t>
-            </a:r>
-            <a:r>
-              <a:rPr>
-                <a:latin typeface="Courier"/>
-              </a:rPr>
-              <a:t>functions.R</a:t>
-            </a:r>
-            <a:r>
-              <a:rPr/>
-              <a:t>, images…)</a:t>
+            <a:pPr lvl="0"/>
+            <a:r>
+              <a:rPr/>
+              <a:t>Basics: </a:t>
+            </a:r>
+            <a:r>
+              <a:rPr>
+                <a:latin typeface="Courier"/>
+              </a:rPr>
+              <a:t>scripts/nix_expressions/01_rix_intro/</a:t>
+            </a:r>
+          </a:p>
+          <a:p>
+            <a:pPr lvl="0"/>
+            <a:r>
+              <a:rPr/>
+              <a:t>Native VS Code/Positron on Windows: </a:t>
+            </a:r>
+            <a:r>
+              <a:rPr>
+                <a:latin typeface="Courier"/>
+              </a:rPr>
+              <a:t>scripts/nix_expressions/02_native_positron_example/</a:t>
+            </a:r>
+          </a:p>
+          <a:p>
+            <a:pPr lvl="0"/>
+            <a:r>
+              <a:rPr/>
+              <a:t>Nix and </a:t>
+            </a:r>
+            <a:r>
+              <a:rPr>
+                <a:latin typeface="Courier"/>
+              </a:rPr>
+              <a:t>{targets}</a:t>
+            </a:r>
+            <a:r>
+              <a:rPr/>
+              <a:t>: </a:t>
+            </a:r>
+            <a:r>
+              <a:rPr>
+                <a:latin typeface="Courier"/>
+              </a:rPr>
+              <a:t>scripts/nix_expressions/03_nix_targets_pipeline</a:t>
+            </a:r>
+          </a:p>
+          <a:p>
+            <a:pPr lvl="0"/>
+            <a:r>
+              <a:rPr/>
+              <a:t>Nix and Docker: </a:t>
+            </a:r>
+            <a:r>
+              <a:rPr>
+                <a:latin typeface="Courier"/>
+              </a:rPr>
+              <a:t>scripts/nix_expressions/04_docker/</a:t>
+            </a:r>
+          </a:p>
+          <a:p>
+            <a:pPr lvl="0"/>
+            <a:r>
+              <a:rPr/>
+              <a:t>Nix and </a:t>
+            </a:r>
+            <a:r>
+              <a:rPr>
+                <a:latin typeface="Courier"/>
+              </a:rPr>
+              <a:t>{shiny}</a:t>
+            </a:r>
+            <a:r>
+              <a:rPr/>
+              <a:t>: </a:t>
+            </a:r>
+            <a:r>
+              <a:rPr>
+                <a:latin typeface="Courier"/>
+              </a:rPr>
+              <a:t>scripts/nix_expressions/05_shiny</a:t>
+            </a:r>
+          </a:p>
+          <a:p>
+            <a:pPr lvl="0"/>
+            <a:r>
+              <a:rPr/>
+              <a:t>GitHub Actions: </a:t>
+            </a:r>
+            <a:r>
+              <a:rPr>
+                <a:hlinkClick r:id="rId2"/>
+              </a:rPr>
+              <a:t>see here</a:t>
             </a:r>
           </a:p>
         </p:txBody>
@@ -5330,7 +5036,13 @@
             </a:pPr>
             <a:r>
               <a:rPr/>
-              <a:t>To learn more about rixpress:</a:t>
+              <a:t>Polyglot pipelines with </a:t>
+            </a:r>
+            <a:r>
+              <a:rPr>
+                <a:latin typeface="Courier"/>
+              </a:rPr>
+              <a:t>{rixpress}</a:t>
             </a:r>
           </a:p>
         </p:txBody>
@@ -5353,27 +5065,58 @@
             <a:pPr lvl="0"/>
             <a:r>
               <a:rPr>
-                <a:hlinkClick r:id="rId2"/>
-              </a:rPr>
-              <a:t>GitHub Repository</a:t>
-            </a:r>
-          </a:p>
-          <a:p>
-            <a:pPr lvl="0"/>
-            <a:r>
-              <a:rPr>
-                <a:hlinkClick r:id="rId3"/>
-              </a:rPr>
-              <a:t>Website</a:t>
-            </a:r>
-          </a:p>
-          <a:p>
-            <a:pPr lvl="0"/>
-            <a:r>
-              <a:rPr>
-                <a:hlinkClick r:id="rId4"/>
-              </a:rPr>
-              <a:t>Repository of demos</a:t>
+                <a:latin typeface="Courier"/>
+              </a:rPr>
+              <a:t>{rixpress}</a:t>
+            </a:r>
+            <a:r>
+              <a:rPr/>
+              <a:t> allows chaining processing steps in R, Python and Julia</a:t>
+            </a:r>
+          </a:p>
+          <a:p>
+            <a:pPr lvl="0"/>
+            <a:r>
+              <a:rPr/>
+              <a:t>Uses </a:t>
+            </a:r>
+            <a:r>
+              <a:rPr>
+                <a:latin typeface="Courier"/>
+              </a:rPr>
+              <a:t>{rix}</a:t>
+            </a:r>
+            <a:r>
+              <a:rPr/>
+              <a:t> to create a reproducible (via Nix) execution environment for the pipeline</a:t>
+            </a:r>
+          </a:p>
+          <a:p>
+            <a:pPr lvl="0"/>
+            <a:r>
+              <a:rPr/>
+              <a:t>Each pipeline step is a </a:t>
+            </a:r>
+            <a:r>
+              <a:rPr b="1"/>
+              <a:t>Nix derivation</a:t>
+            </a:r>
+          </a:p>
+          <a:p>
+            <a:pPr lvl="0"/>
+            <a:r>
+              <a:rPr/>
+              <a:t>Data transfer: automatic via </a:t>
+            </a:r>
+            <a:r>
+              <a:rPr>
+                <a:latin typeface="Courier"/>
+              </a:rPr>
+              <a:t>reticulate</a:t>
+            </a:r>
+            <a:r>
+              <a:rPr/>
+              <a:t> or universal format (JSON)</a:t>
             </a:r>
           </a:p>
         </p:txBody>
@@ -5420,7 +5163,7 @@
             </a:pPr>
             <a:r>
               <a:rPr/>
-              <a:t>T, a new DSL for polyglot data science</a:t>
+              <a:t>An example of a polyglot pipeline</a:t>
             </a:r>
           </a:p>
         </p:txBody>
@@ -5440,31 +5183,422 @@
           <a:bodyPr/>
           <a:lstStyle/>
           <a:p>
-            <a:pPr lvl="0"/>
-            <a:r>
-              <a:rPr/>
-              <a:t>Reproducibility is often an afterthought, with ad-hoc tools</a:t>
-            </a:r>
-          </a:p>
-          <a:p>
-            <a:pPr lvl="0"/>
-            <a:r>
-              <a:rPr/>
-              <a:t>Nix eases the pain, but humans have to play ball! (biggest challenge)</a:t>
-            </a:r>
-          </a:p>
-          <a:p>
-            <a:pPr lvl="0"/>
-            <a:r>
-              <a:rPr/>
-              <a:t>What could a “reproducible by design” language look like?</a:t>
-            </a:r>
-          </a:p>
-          <a:p>
-            <a:pPr lvl="0"/>
-            <a:r>
-              <a:rPr/>
-              <a:t>This is T, a language whose package manager is Nix and pipelines are first-class citizens</a:t>
+            <a:pPr lvl="0" indent="0">
+              <a:buNone/>
+            </a:pPr>
+            <a:r>
+              <a:rPr>
+                <a:solidFill>
+                  <a:srgbClr val="4758AB"/>
+                </a:solidFill>
+                <a:latin typeface="Courier"/>
+              </a:rPr>
+              <a:t>list</a:t>
+            </a:r>
+            <a:r>
+              <a:rPr>
+                <a:solidFill>
+                  <a:srgbClr val="003B4F"/>
+                </a:solidFill>
+                <a:latin typeface="Courier"/>
+              </a:rPr>
+              <a:t>(</a:t>
+            </a:r>
+            <a:br/>
+            <a:r>
+              <a:rPr>
+                <a:solidFill>
+                  <a:srgbClr val="003B4F"/>
+                </a:solidFill>
+                <a:latin typeface="Courier"/>
+              </a:rPr>
+              <a:t>  </a:t>
+            </a:r>
+            <a:r>
+              <a:rPr>
+                <a:solidFill>
+                  <a:srgbClr val="4758AB"/>
+                </a:solidFill>
+                <a:latin typeface="Courier"/>
+              </a:rPr>
+              <a:t>rxp_py_file</a:t>
+            </a:r>
+            <a:r>
+              <a:rPr>
+                <a:solidFill>
+                  <a:srgbClr val="003B4F"/>
+                </a:solidFill>
+                <a:latin typeface="Courier"/>
+              </a:rPr>
+              <a:t>(…),    </a:t>
+            </a:r>
+            <a:r>
+              <a:rPr>
+                <a:solidFill>
+                  <a:srgbClr val="5E5E5E"/>
+                </a:solidFill>
+                <a:latin typeface="Courier"/>
+              </a:rPr>
+              <a:t># Read a CSV with Python</a:t>
+            </a:r>
+            <a:br/>
+            <a:r>
+              <a:rPr>
+                <a:solidFill>
+                  <a:srgbClr val="003B4F"/>
+                </a:solidFill>
+                <a:latin typeface="Courier"/>
+              </a:rPr>
+              <a:t>  </a:t>
+            </a:r>
+            <a:r>
+              <a:rPr>
+                <a:solidFill>
+                  <a:srgbClr val="4758AB"/>
+                </a:solidFill>
+                <a:latin typeface="Courier"/>
+              </a:rPr>
+              <a:t>rxp_py</a:t>
+            </a:r>
+            <a:r>
+              <a:rPr>
+                <a:solidFill>
+                  <a:srgbClr val="003B4F"/>
+                </a:solidFill>
+                <a:latin typeface="Courier"/>
+              </a:rPr>
+              <a:t>(…),         </a:t>
+            </a:r>
+            <a:r>
+              <a:rPr>
+                <a:solidFill>
+                  <a:srgbClr val="5E5E5E"/>
+                </a:solidFill>
+                <a:latin typeface="Courier"/>
+              </a:rPr>
+              <a:t># Filter with Polars</a:t>
+            </a:r>
+            <a:br/>
+            <a:r>
+              <a:rPr>
+                <a:solidFill>
+                  <a:srgbClr val="003B4F"/>
+                </a:solidFill>
+                <a:latin typeface="Courier"/>
+              </a:rPr>
+              <a:t>  </a:t>
+            </a:r>
+            <a:r>
+              <a:rPr>
+                <a:solidFill>
+                  <a:srgbClr val="4758AB"/>
+                </a:solidFill>
+                <a:latin typeface="Courier"/>
+              </a:rPr>
+              <a:t>rxp_py2r</a:t>
+            </a:r>
+            <a:r>
+              <a:rPr>
+                <a:solidFill>
+                  <a:srgbClr val="003B4F"/>
+                </a:solidFill>
+                <a:latin typeface="Courier"/>
+              </a:rPr>
+              <a:t>(…),       </a:t>
+            </a:r>
+            <a:r>
+              <a:rPr>
+                <a:solidFill>
+                  <a:srgbClr val="5E5E5E"/>
+                </a:solidFill>
+                <a:latin typeface="Courier"/>
+              </a:rPr>
+              <a:t># Python → R transfer</a:t>
+            </a:r>
+            <a:br/>
+            <a:r>
+              <a:rPr>
+                <a:solidFill>
+                  <a:srgbClr val="003B4F"/>
+                </a:solidFill>
+                <a:latin typeface="Courier"/>
+              </a:rPr>
+              <a:t>  </a:t>
+            </a:r>
+            <a:r>
+              <a:rPr>
+                <a:solidFill>
+                  <a:srgbClr val="4758AB"/>
+                </a:solidFill>
+                <a:latin typeface="Courier"/>
+              </a:rPr>
+              <a:t>rxp_r</a:t>
+            </a:r>
+            <a:r>
+              <a:rPr>
+                <a:solidFill>
+                  <a:srgbClr val="003B4F"/>
+                </a:solidFill>
+                <a:latin typeface="Courier"/>
+              </a:rPr>
+              <a:t>(…),          </a:t>
+            </a:r>
+            <a:r>
+              <a:rPr>
+                <a:solidFill>
+                  <a:srgbClr val="5E5E5E"/>
+                </a:solidFill>
+                <a:latin typeface="Courier"/>
+              </a:rPr>
+              <a:t># Transformation in R</a:t>
+            </a:r>
+            <a:br/>
+            <a:r>
+              <a:rPr>
+                <a:solidFill>
+                  <a:srgbClr val="003B4F"/>
+                </a:solidFill>
+                <a:latin typeface="Courier"/>
+              </a:rPr>
+              <a:t>  </a:t>
+            </a:r>
+            <a:r>
+              <a:rPr>
+                <a:solidFill>
+                  <a:srgbClr val="4758AB"/>
+                </a:solidFill>
+                <a:latin typeface="Courier"/>
+              </a:rPr>
+              <a:t>rxp_r2py</a:t>
+            </a:r>
+            <a:r>
+              <a:rPr>
+                <a:solidFill>
+                  <a:srgbClr val="003B4F"/>
+                </a:solidFill>
+                <a:latin typeface="Courier"/>
+              </a:rPr>
+              <a:t>(…),       </a:t>
+            </a:r>
+            <a:r>
+              <a:rPr>
+                <a:solidFill>
+                  <a:srgbClr val="5E5E5E"/>
+                </a:solidFill>
+                <a:latin typeface="Courier"/>
+              </a:rPr>
+              <a:t># R → Python transfer</a:t>
+            </a:r>
+            <a:br/>
+            <a:r>
+              <a:rPr>
+                <a:solidFill>
+                  <a:srgbClr val="003B4F"/>
+                </a:solidFill>
+                <a:latin typeface="Courier"/>
+              </a:rPr>
+              <a:t>  </a:t>
+            </a:r>
+            <a:r>
+              <a:rPr>
+                <a:solidFill>
+                  <a:srgbClr val="4758AB"/>
+                </a:solidFill>
+                <a:latin typeface="Courier"/>
+              </a:rPr>
+              <a:t>rxp_py</a:t>
+            </a:r>
+            <a:r>
+              <a:rPr>
+                <a:solidFill>
+                  <a:srgbClr val="003B4F"/>
+                </a:solidFill>
+                <a:latin typeface="Courier"/>
+              </a:rPr>
+              <a:t>(…),         </a:t>
+            </a:r>
+            <a:r>
+              <a:rPr>
+                <a:solidFill>
+                  <a:srgbClr val="5E5E5E"/>
+                </a:solidFill>
+                <a:latin typeface="Courier"/>
+              </a:rPr>
+              <a:t># Another Python step</a:t>
+            </a:r>
+            <a:br/>
+            <a:r>
+              <a:rPr>
+                <a:solidFill>
+                  <a:srgbClr val="003B4F"/>
+                </a:solidFill>
+                <a:latin typeface="Courier"/>
+              </a:rPr>
+              <a:t>  </a:t>
+            </a:r>
+            <a:r>
+              <a:rPr>
+                <a:solidFill>
+                  <a:srgbClr val="4758AB"/>
+                </a:solidFill>
+                <a:latin typeface="Courier"/>
+              </a:rPr>
+              <a:t>rxp_py2r</a:t>
+            </a:r>
+            <a:r>
+              <a:rPr>
+                <a:solidFill>
+                  <a:srgbClr val="003B4F"/>
+                </a:solidFill>
+                <a:latin typeface="Courier"/>
+              </a:rPr>
+              <a:t>(…),       </a:t>
+            </a:r>
+            <a:r>
+              <a:rPr>
+                <a:solidFill>
+                  <a:srgbClr val="5E5E5E"/>
+                </a:solidFill>
+                <a:latin typeface="Courier"/>
+              </a:rPr>
+              <a:t># Back to R</a:t>
+            </a:r>
+            <a:br/>
+            <a:r>
+              <a:rPr>
+                <a:solidFill>
+                  <a:srgbClr val="003B4F"/>
+                </a:solidFill>
+                <a:latin typeface="Courier"/>
+              </a:rPr>
+              <a:t>  </a:t>
+            </a:r>
+            <a:r>
+              <a:rPr>
+                <a:solidFill>
+                  <a:srgbClr val="4758AB"/>
+                </a:solidFill>
+                <a:latin typeface="Courier"/>
+              </a:rPr>
+              <a:t>rxp_r</a:t>
+            </a:r>
+            <a:r>
+              <a:rPr>
+                <a:solidFill>
+                  <a:srgbClr val="003B4F"/>
+                </a:solidFill>
+                <a:latin typeface="Courier"/>
+              </a:rPr>
+              <a:t>(…)           </a:t>
+            </a:r>
+            <a:r>
+              <a:rPr>
+                <a:solidFill>
+                  <a:srgbClr val="5E5E5E"/>
+                </a:solidFill>
+                <a:latin typeface="Courier"/>
+              </a:rPr>
+              <a:t># Final step</a:t>
+            </a:r>
+            <a:br/>
+            <a:r>
+              <a:rPr>
+                <a:solidFill>
+                  <a:srgbClr val="003B4F"/>
+                </a:solidFill>
+                <a:latin typeface="Courier"/>
+              </a:rPr>
+              <a:t>) </a:t>
+            </a:r>
+            <a:r>
+              <a:rPr>
+                <a:solidFill>
+                  <a:srgbClr val="5E5E5E"/>
+                </a:solidFill>
+                <a:latin typeface="Courier"/>
+              </a:rPr>
+              <a:t>|&gt;</a:t>
+            </a:r>
+            <a:r>
+              <a:rPr>
+                <a:solidFill>
+                  <a:srgbClr val="003B4F"/>
+                </a:solidFill>
+                <a:latin typeface="Courier"/>
+              </a:rPr>
+              <a:t> </a:t>
+            </a:r>
+            <a:r>
+              <a:rPr>
+                <a:solidFill>
+                  <a:srgbClr val="4758AB"/>
+                </a:solidFill>
+                <a:latin typeface="Courier"/>
+              </a:rPr>
+              <a:t>rixpress</a:t>
+            </a:r>
+            <a:r>
+              <a:rPr>
+                <a:solidFill>
+                  <a:srgbClr val="003B4F"/>
+                </a:solidFill>
+                <a:latin typeface="Courier"/>
+              </a:rPr>
+              <a:t>()</a:t>
+            </a:r>
+          </a:p>
+          <a:p>
+            <a:pPr lvl="0"/>
+            <a:r>
+              <a:rPr/>
+              <a:t>Each step is named and typed (</a:t>
+            </a:r>
+            <a:r>
+              <a:rPr>
+                <a:latin typeface="Courier"/>
+              </a:rPr>
+              <a:t>py</a:t>
+            </a:r>
+            <a:r>
+              <a:rPr/>
+              <a:t>, </a:t>
+            </a:r>
+            <a:r>
+              <a:rPr>
+                <a:latin typeface="Courier"/>
+              </a:rPr>
+              <a:t>r</a:t>
+            </a:r>
+            <a:r>
+              <a:rPr/>
+              <a:t>, </a:t>
+            </a:r>
+            <a:r>
+              <a:rPr>
+                <a:latin typeface="Courier"/>
+              </a:rPr>
+              <a:t>r2py</a:t>
+            </a:r>
+            <a:r>
+              <a:rPr/>
+              <a:t>, etc.)</a:t>
+            </a:r>
+          </a:p>
+          <a:p>
+            <a:pPr lvl="0"/>
+            <a:r>
+              <a:rPr/>
+              <a:t>Ability to add files (</a:t>
+            </a:r>
+            <a:r>
+              <a:rPr>
+                <a:latin typeface="Courier"/>
+              </a:rPr>
+              <a:t>functions.R</a:t>
+            </a:r>
+            <a:r>
+              <a:rPr/>
+              <a:t>, images…)</a:t>
             </a:r>
           </a:p>
         </p:txBody>
@@ -5511,7 +5645,7 @@
             </a:pPr>
             <a:r>
               <a:rPr/>
-              <a:t>T is reproducible by design</a:t>
+              <a:t>To learn more about rixpress:</a:t>
             </a:r>
           </a:p>
         </p:txBody>
@@ -5533,63 +5667,28 @@
           <a:p>
             <a:pPr lvl="0"/>
             <a:r>
-              <a:rPr/>
-              <a:t>A new T project is a Nix project:</a:t>
-            </a:r>
-          </a:p>
-          <a:p>
-            <a:pPr lvl="0" indent="0" marL="0">
-              <a:buNone/>
-            </a:pPr>
-            <a:r>
-              <a:rPr/>
-              <a:t>. . .</a:t>
-            </a:r>
-          </a:p>
-          <a:p>
-            <a:pPr lvl="0" indent="0">
-              <a:buNone/>
-            </a:pPr>
-            <a:r>
-              <a:rPr>
-                <a:solidFill>
-                  <a:srgbClr val="003B4F"/>
-                </a:solidFill>
-                <a:latin typeface="Courier"/>
-              </a:rPr>
-              <a:t>nix shell github:b-rodrigues/tlang</a:t>
-            </a:r>
-          </a:p>
-          <a:p>
-            <a:pPr lvl="0" indent="0" marL="0">
-              <a:buNone/>
-            </a:pPr>
-            <a:r>
-              <a:rPr/>
-              <a:t>. . .</a:t>
-            </a:r>
-          </a:p>
-          <a:p>
-            <a:pPr lvl="0" indent="0">
-              <a:buNone/>
-            </a:pPr>
-            <a:r>
-              <a:rPr>
-                <a:solidFill>
-                  <a:srgbClr val="003B4F"/>
-                </a:solidFill>
-                <a:latin typeface="Courier"/>
-              </a:rPr>
-              <a:t>t init </a:t>
-            </a:r>
-            <a:r>
-              <a:rPr>
-                <a:solidFill>
-                  <a:srgbClr val="657422"/>
-                </a:solidFill>
-                <a:latin typeface="Courier"/>
-              </a:rPr>
-              <a:t>--project</a:t>
+              <a:rPr>
+                <a:hlinkClick r:id="rId2"/>
+              </a:rPr>
+              <a:t>GitHub Repository</a:t>
+            </a:r>
+          </a:p>
+          <a:p>
+            <a:pPr lvl="0"/>
+            <a:r>
+              <a:rPr>
+                <a:hlinkClick r:id="rId3"/>
+              </a:rPr>
+              <a:t>Website</a:t>
+            </a:r>
+          </a:p>
+          <a:p>
+            <a:pPr lvl="0"/>
+            <a:r>
+              <a:rPr>
+                <a:hlinkClick r:id="rId4"/>
+              </a:rPr>
+              <a:t>Repository of demos</a:t>
             </a:r>
           </a:p>
         </p:txBody>
@@ -5708,7 +5807,7 @@
             </a:pPr>
             <a:r>
               <a:rPr/>
-              <a:t>T is reproducible by design</a:t>
+              <a:t>T, a new DSL for polyglot data science</a:t>
             </a:r>
           </a:p>
         </p:txBody>
@@ -5728,24 +5827,31 @@
           <a:bodyPr/>
           <a:lstStyle/>
           <a:p>
-            <a:pPr lvl="0" indent="0">
-              <a:buNone/>
-            </a:pPr>
-            <a:r>
-              <a:rPr>
-                <a:latin typeface="Courier"/>
-              </a:rPr>
-              <a:t>my_analysis/
-├── tproject.toml       # Project configuration and dependencies
-├── flake.nix           # Reproducible environment definition
-├── README.md           # Project overview
-├── AGENTS.md           # Onboarding guide for AI Agents
-├── T-LANGUAGE-REFERENCE.md # Tiered language reference for LLMs (git-ignored)
-├── src/
-│   └── pipeline.t      # Your main analysis script
-├── data/               # Place your raw data files here
-├── outputs/            # Output directory for results
-└── tests/              # Unit tests for your analysis</a:t>
+            <a:pPr lvl="0"/>
+            <a:r>
+              <a:rPr/>
+              <a:t>Reproducibility is often an afterthought, with ad-hoc tools</a:t>
+            </a:r>
+          </a:p>
+          <a:p>
+            <a:pPr lvl="0"/>
+            <a:r>
+              <a:rPr/>
+              <a:t>Nix eases the pain, but humans have to play ball! (biggest challenge)</a:t>
+            </a:r>
+          </a:p>
+          <a:p>
+            <a:pPr lvl="0"/>
+            <a:r>
+              <a:rPr/>
+              <a:t>What could a “reproducible by design” language look like?</a:t>
+            </a:r>
+          </a:p>
+          <a:p>
+            <a:pPr lvl="0"/>
+            <a:r>
+              <a:rPr/>
+              <a:t>This is T, a language whose package manager is Nix and pipelines are first-class citizens</a:t>
             </a:r>
           </a:p>
         </p:txBody>
@@ -5815,59 +5921,62 @@
             <a:pPr lvl="0"/>
             <a:r>
               <a:rPr/>
-              <a:t>Add R, Python or Julia dependecies to </a:t>
-            </a:r>
-            <a:r>
-              <a:rPr>
-                <a:latin typeface="Courier"/>
-              </a:rPr>
-              <a:t>tproject.toml</a:t>
-            </a:r>
-          </a:p>
-          <a:p>
-            <a:pPr lvl="0"/>
-            <a:r>
-              <a:rPr/>
-              <a:t>Run </a:t>
-            </a:r>
-            <a:r>
-              <a:rPr>
-                <a:latin typeface="Courier"/>
-              </a:rPr>
-              <a:t>t update</a:t>
-            </a:r>
-          </a:p>
-          <a:p>
-            <a:pPr lvl="0"/>
-            <a:r>
-              <a:rPr/>
-              <a:t>Exit the temporary shell and run </a:t>
-            </a:r>
-            <a:r>
-              <a:rPr>
-                <a:latin typeface="Courier"/>
-              </a:rPr>
-              <a:t>nix develop</a:t>
-            </a:r>
-          </a:p>
-          <a:p>
-            <a:pPr lvl="0"/>
-            <a:r>
-              <a:rPr/>
-              <a:t>Environment is set up, ready to use!</a:t>
-            </a:r>
-          </a:p>
-          <a:p>
-            <a:pPr lvl="0"/>
-            <a:r>
-              <a:rPr/>
-              <a:t>What pipelines look like </a:t>
-            </a:r>
-            <a:r>
-              <a:rPr>
-                <a:hlinkClick r:id="rId2"/>
-              </a:rPr>
-              <a:t>see here</a:t>
+              <a:t>A new T project is a Nix project:</a:t>
+            </a:r>
+          </a:p>
+          <a:p>
+            <a:pPr lvl="0" indent="0" marL="0">
+              <a:buNone/>
+            </a:pPr>
+            <a:r>
+              <a:rPr/>
+              <a:t>. . .</a:t>
+            </a:r>
+          </a:p>
+          <a:p>
+            <a:pPr lvl="0" indent="0">
+              <a:buNone/>
+            </a:pPr>
+            <a:r>
+              <a:rPr>
+                <a:solidFill>
+                  <a:srgbClr val="003B4F"/>
+                </a:solidFill>
+                <a:latin typeface="Courier"/>
+              </a:rPr>
+              <a:t>nix shell github:b-rodrigues/tlang</a:t>
+            </a:r>
+          </a:p>
+          <a:p>
+            <a:pPr lvl="0" indent="0" marL="0">
+              <a:buNone/>
+            </a:pPr>
+            <a:r>
+              <a:rPr/>
+              <a:t>. . .</a:t>
+            </a:r>
+          </a:p>
+          <a:p>
+            <a:pPr lvl="0" indent="0">
+              <a:buNone/>
+            </a:pPr>
+            <a:r>
+              <a:rPr>
+                <a:solidFill>
+                  <a:srgbClr val="003B4F"/>
+                </a:solidFill>
+                <a:latin typeface="Courier"/>
+              </a:rPr>
+              <a:t>t init </a:t>
+            </a:r>
+            <a:r>
+              <a:rPr>
+                <a:solidFill>
+                  <a:srgbClr val="657422"/>
+                </a:solidFill>
+                <a:latin typeface="Courier"/>
+              </a:rPr>
+              <a:t>--project</a:t>
             </a:r>
           </a:p>
         </p:txBody>
@@ -5914,7 +6023,7 @@
             </a:pPr>
             <a:r>
               <a:rPr/>
-              <a:t>Learning a new language in 2026?!</a:t>
+              <a:t>T is reproducible by design</a:t>
             </a:r>
           </a:p>
         </p:txBody>
@@ -5934,65 +6043,24 @@
           <a:bodyPr/>
           <a:lstStyle/>
           <a:p>
-            <a:pPr lvl="0"/>
-            <a:r>
-              <a:rPr/>
-              <a:t>Learning a new language just for pipelines? Never!!</a:t>
-            </a:r>
-          </a:p>
-          <a:p>
-            <a:pPr lvl="0"/>
-            <a:r>
-              <a:rPr/>
-              <a:t>T is built to be </a:t>
-            </a:r>
-            <a:r>
-              <a:rPr i="1"/>
-              <a:t>llm-friendly</a:t>
-            </a:r>
-          </a:p>
-          <a:p>
-            <a:pPr lvl="0"/>
-            <a:r>
-              <a:rPr/>
-              <a:t>Projects ship </a:t>
-            </a:r>
-            <a:r>
-              <a:rPr>
-                <a:latin typeface="Courier"/>
-              </a:rPr>
-              <a:t>AGENTS.md</a:t>
-            </a:r>
-            <a:r>
-              <a:rPr/>
-              <a:t>, </a:t>
-            </a:r>
-            <a:r>
-              <a:rPr>
-                <a:latin typeface="Courier"/>
-              </a:rPr>
-              <a:t>T-LANGUAGE-REFERENCE.md</a:t>
-            </a:r>
-            <a:r>
-              <a:rPr/>
-              <a:t> and </a:t>
-            </a:r>
-            <a:r>
-              <a:rPr>
-                <a:latin typeface="Courier"/>
-              </a:rPr>
-              <a:t>src/pipeline.t</a:t>
-            </a:r>
-            <a:r>
-              <a:rPr/>
-              <a:t> itself is a cheatsheet</a:t>
-            </a:r>
-          </a:p>
-          <a:p>
-            <a:pPr lvl="0"/>
-            <a:r>
-              <a:rPr/>
-              <a:t>LLMs should be able to wire your project using T without much issue!</a:t>
+            <a:pPr lvl="0" indent="0">
+              <a:buNone/>
+            </a:pPr>
+            <a:r>
+              <a:rPr>
+                <a:latin typeface="Courier"/>
+              </a:rPr>
+              <a:t>my_analysis/
+├── tproject.toml       # Project configuration and dependencies
+├── flake.nix           # Reproducible environment definition
+├── README.md           # Project overview
+├── AGENTS.md           # Onboarding guide for AI Agents
+├── T-LANGUAGE-REFERENCE.md # Tiered language reference for LLMs (git-ignored)
+├── src/
+│   └── pipeline.t      # Your main analysis script
+├── data/               # Place your raw data files here
+├── outputs/            # Output directory for results
+└── tests/              # Unit tests for your analysis</a:t>
             </a:r>
           </a:p>
         </p:txBody>
@@ -6039,7 +6107,7 @@
             </a:pPr>
             <a:r>
               <a:rPr/>
-              <a:t>Caveat Emptor</a:t>
+              <a:t>T is reproducible by design</a:t>
             </a:r>
           </a:p>
         </p:txBody>
@@ -6062,28 +6130,59 @@
             <a:pPr lvl="0"/>
             <a:r>
               <a:rPr/>
-              <a:t>This is a 100% vibe-coded side-project by yours truly…</a:t>
-            </a:r>
-          </a:p>
-          <a:p>
-            <a:pPr lvl="0"/>
-            <a:r>
-              <a:rPr/>
-              <a:t>…but throughly tested (2000+ unit tests and 60+ end-to-end tests)</a:t>
-            </a:r>
-          </a:p>
-          <a:p>
-            <a:pPr lvl="0"/>
-            <a:r>
-              <a:rPr/>
-              <a:t>I wanted to stress-test the idea of a “reproducible by design” language</a:t>
-            </a:r>
-          </a:p>
-          <a:p>
-            <a:pPr lvl="0"/>
-            <a:r>
-              <a:rPr/>
-              <a:t>Challenges: input/output between languages</a:t>
+              <a:t>Add R, Python or Julia dependecies to </a:t>
+            </a:r>
+            <a:r>
+              <a:rPr>
+                <a:latin typeface="Courier"/>
+              </a:rPr>
+              <a:t>tproject.toml</a:t>
+            </a:r>
+          </a:p>
+          <a:p>
+            <a:pPr lvl="0"/>
+            <a:r>
+              <a:rPr/>
+              <a:t>Run </a:t>
+            </a:r>
+            <a:r>
+              <a:rPr>
+                <a:latin typeface="Courier"/>
+              </a:rPr>
+              <a:t>t update</a:t>
+            </a:r>
+          </a:p>
+          <a:p>
+            <a:pPr lvl="0"/>
+            <a:r>
+              <a:rPr/>
+              <a:t>Exit the temporary shell and run </a:t>
+            </a:r>
+            <a:r>
+              <a:rPr>
+                <a:latin typeface="Courier"/>
+              </a:rPr>
+              <a:t>nix develop</a:t>
+            </a:r>
+          </a:p>
+          <a:p>
+            <a:pPr lvl="0"/>
+            <a:r>
+              <a:rPr/>
+              <a:t>Environment is set up, ready to use!</a:t>
+            </a:r>
+          </a:p>
+          <a:p>
+            <a:pPr lvl="0"/>
+            <a:r>
+              <a:rPr/>
+              <a:t>What pipelines look like </a:t>
+            </a:r>
+            <a:r>
+              <a:rPr>
+                <a:hlinkClick r:id="rId2"/>
+              </a:rPr>
+              <a:t>see here</a:t>
             </a:r>
           </a:p>
         </p:txBody>
@@ -6094,6 +6193,222 @@
 </file>
 
 <file path=ppt/slides/slide24.xml><?xml version="1.0" encoding="utf-8"?>
+<p:sld xmlns:a="http://schemas.openxmlformats.org/drawingml/2006/main" xmlns:r="http://schemas.openxmlformats.org/officeDocument/2006/relationships" xmlns:p="http://schemas.openxmlformats.org/presentationml/2006/main">
+  <p:cSld>
+    <p:spTree>
+      <p:nvGrpSpPr>
+        <p:cNvPr id="1" name=""/>
+        <p:cNvGrpSpPr/>
+        <p:nvPr/>
+      </p:nvGrpSpPr>
+      <p:grpSpPr>
+        <a:xfrm>
+          <a:off x="0" y="0"/>
+          <a:ext cx="0" cy="0"/>
+          <a:chOff x="0" y="0"/>
+          <a:chExt cx="0" cy="0"/>
+        </a:xfrm>
+      </p:grpSpPr>
+      <p:sp>
+        <p:nvSpPr>
+          <p:cNvPr id="2" name="Title 1"/>
+          <p:cNvSpPr>
+            <a:spLocks noGrp="1"/>
+          </p:cNvSpPr>
+          <p:nvPr>
+            <p:ph type="title"/>
+          </p:nvPr>
+        </p:nvSpPr>
+        <p:spPr/>
+        <p:txBody>
+          <a:bodyPr/>
+          <a:lstStyle/>
+          <a:p>
+            <a:pPr lvl="0" indent="0" marL="0">
+              <a:buNone/>
+            </a:pPr>
+            <a:r>
+              <a:rPr/>
+              <a:t>Learning a new language in 2026?!</a:t>
+            </a:r>
+          </a:p>
+        </p:txBody>
+      </p:sp>
+      <p:sp>
+        <p:nvSpPr>
+          <p:cNvPr id="3" name="Content Placeholder 2"/>
+          <p:cNvSpPr>
+            <a:spLocks noGrp="1"/>
+          </p:cNvSpPr>
+          <p:nvPr>
+            <p:ph idx="1"/>
+          </p:nvPr>
+        </p:nvSpPr>
+        <p:spPr/>
+        <p:txBody>
+          <a:bodyPr/>
+          <a:lstStyle/>
+          <a:p>
+            <a:pPr lvl="0"/>
+            <a:r>
+              <a:rPr/>
+              <a:t>Learning a new language just for pipelines? Never!!</a:t>
+            </a:r>
+          </a:p>
+          <a:p>
+            <a:pPr lvl="0"/>
+            <a:r>
+              <a:rPr/>
+              <a:t>T is built to be </a:t>
+            </a:r>
+            <a:r>
+              <a:rPr i="1"/>
+              <a:t>llm-friendly</a:t>
+            </a:r>
+          </a:p>
+          <a:p>
+            <a:pPr lvl="0"/>
+            <a:r>
+              <a:rPr/>
+              <a:t>Projects ship </a:t>
+            </a:r>
+            <a:r>
+              <a:rPr>
+                <a:latin typeface="Courier"/>
+              </a:rPr>
+              <a:t>AGENTS.md</a:t>
+            </a:r>
+            <a:r>
+              <a:rPr/>
+              <a:t>, </a:t>
+            </a:r>
+            <a:r>
+              <a:rPr>
+                <a:latin typeface="Courier"/>
+              </a:rPr>
+              <a:t>T-LANGUAGE-REFERENCE.md</a:t>
+            </a:r>
+            <a:r>
+              <a:rPr/>
+              <a:t> and </a:t>
+            </a:r>
+            <a:r>
+              <a:rPr>
+                <a:latin typeface="Courier"/>
+              </a:rPr>
+              <a:t>src/pipeline.t</a:t>
+            </a:r>
+            <a:r>
+              <a:rPr/>
+              <a:t> itself is a cheatsheet</a:t>
+            </a:r>
+          </a:p>
+          <a:p>
+            <a:pPr lvl="0"/>
+            <a:r>
+              <a:rPr/>
+              <a:t>LLMs should be able to wire your project using T without much issue!</a:t>
+            </a:r>
+          </a:p>
+        </p:txBody>
+      </p:sp>
+    </p:spTree>
+  </p:cSld>
+</p:sld>
+</file>
+
+<file path=ppt/slides/slide25.xml><?xml version="1.0" encoding="utf-8"?>
+<p:sld xmlns:a="http://schemas.openxmlformats.org/drawingml/2006/main" xmlns:r="http://schemas.openxmlformats.org/officeDocument/2006/relationships" xmlns:p="http://schemas.openxmlformats.org/presentationml/2006/main">
+  <p:cSld>
+    <p:spTree>
+      <p:nvGrpSpPr>
+        <p:cNvPr id="1" name=""/>
+        <p:cNvGrpSpPr/>
+        <p:nvPr/>
+      </p:nvGrpSpPr>
+      <p:grpSpPr>
+        <a:xfrm>
+          <a:off x="0" y="0"/>
+          <a:ext cx="0" cy="0"/>
+          <a:chOff x="0" y="0"/>
+          <a:chExt cx="0" cy="0"/>
+        </a:xfrm>
+      </p:grpSpPr>
+      <p:sp>
+        <p:nvSpPr>
+          <p:cNvPr id="2" name="Title 1"/>
+          <p:cNvSpPr>
+            <a:spLocks noGrp="1"/>
+          </p:cNvSpPr>
+          <p:nvPr>
+            <p:ph type="title"/>
+          </p:nvPr>
+        </p:nvSpPr>
+        <p:spPr/>
+        <p:txBody>
+          <a:bodyPr/>
+          <a:lstStyle/>
+          <a:p>
+            <a:pPr lvl="0" indent="0" marL="0">
+              <a:buNone/>
+            </a:pPr>
+            <a:r>
+              <a:rPr/>
+              <a:t>Caveat Emptor</a:t>
+            </a:r>
+          </a:p>
+        </p:txBody>
+      </p:sp>
+      <p:sp>
+        <p:nvSpPr>
+          <p:cNvPr id="3" name="Content Placeholder 2"/>
+          <p:cNvSpPr>
+            <a:spLocks noGrp="1"/>
+          </p:cNvSpPr>
+          <p:nvPr>
+            <p:ph idx="1"/>
+          </p:nvPr>
+        </p:nvSpPr>
+        <p:spPr/>
+        <p:txBody>
+          <a:bodyPr/>
+          <a:lstStyle/>
+          <a:p>
+            <a:pPr lvl="0"/>
+            <a:r>
+              <a:rPr/>
+              <a:t>This is a 100% vibe-coded side-project by yours truly…</a:t>
+            </a:r>
+          </a:p>
+          <a:p>
+            <a:pPr lvl="0"/>
+            <a:r>
+              <a:rPr/>
+              <a:t>…but throughly tested (2000+ unit tests and 60+ end-to-end tests)</a:t>
+            </a:r>
+          </a:p>
+          <a:p>
+            <a:pPr lvl="0"/>
+            <a:r>
+              <a:rPr/>
+              <a:t>I wanted to stress-test the idea of a “reproducible by design” language</a:t>
+            </a:r>
+          </a:p>
+          <a:p>
+            <a:pPr lvl="0"/>
+            <a:r>
+              <a:rPr/>
+              <a:t>Challenges: input/output between languages</a:t>
+            </a:r>
+          </a:p>
+        </p:txBody>
+      </p:sp>
+    </p:spTree>
+  </p:cSld>
+</p:sld>
+</file>
+
+<file path=ppt/slides/slide26.xml><?xml version="1.0" encoding="utf-8"?>
 <p:sld xmlns:a="http://schemas.openxmlformats.org/drawingml/2006/main" xmlns:r="http://schemas.openxmlformats.org/officeDocument/2006/relationships" xmlns:p="http://schemas.openxmlformats.org/presentationml/2006/main">
   <p:cSld>
     <p:spTree>
@@ -6457,6 +6772,90 @@
             <p:ph type="title"/>
           </p:nvPr>
         </p:nvSpPr>
+        <p:spPr/>
+        <p:txBody>
+          <a:bodyPr/>
+          <a:lstStyle/>
+          <a:p>
+            <a:pPr lvl="0" indent="0" marL="0">
+              <a:buNone/>
+            </a:pPr>
+            <a:r>
+              <a:rPr/>
+              <a:t>Intro: Luxembourg?</a:t>
+            </a:r>
+          </a:p>
+        </p:txBody>
+      </p:sp>
+      <p:sp>
+        <p:nvSpPr>
+          <p:cNvPr id="3" name="Content Placeholder 2"/>
+          <p:cNvSpPr>
+            <a:spLocks noGrp="1"/>
+          </p:cNvSpPr>
+          <p:nvPr>
+            <p:ph idx="1"/>
+          </p:nvPr>
+        </p:nvSpPr>
+        <p:spPr/>
+        <p:txBody>
+          <a:bodyPr/>
+          <a:lstStyle/>
+          <a:p>
+            <a:pPr lvl="0"/>
+            <a:r>
+              <a:rPr/>
+              <a:t>Sole Grand-Duchy in the World</a:t>
+            </a:r>
+          </a:p>
+          <a:p>
+            <a:pPr lvl="0"/>
+            <a:r>
+              <a:rPr/>
+              <a:t>3 official languages (Luxembourguish, German, French)</a:t>
+            </a:r>
+          </a:p>
+          <a:p>
+            <a:pPr lvl="0"/>
+            <a:r>
+              <a:rPr/>
+              <a:t>A founder of the European Union</a:t>
+            </a:r>
+          </a:p>
+        </p:txBody>
+      </p:sp>
+    </p:spTree>
+  </p:cSld>
+</p:sld>
+</file>
+
+<file path=ppt/slides/slide6.xml><?xml version="1.0" encoding="utf-8"?>
+<p:sld xmlns:a="http://schemas.openxmlformats.org/drawingml/2006/main" xmlns:r="http://schemas.openxmlformats.org/officeDocument/2006/relationships" xmlns:p="http://schemas.openxmlformats.org/presentationml/2006/main">
+  <p:cSld>
+    <p:spTree>
+      <p:nvGrpSpPr>
+        <p:cNvPr id="1" name=""/>
+        <p:cNvGrpSpPr/>
+        <p:nvPr/>
+      </p:nvGrpSpPr>
+      <p:grpSpPr>
+        <a:xfrm>
+          <a:off x="0" y="0"/>
+          <a:ext cx="0" cy="0"/>
+          <a:chOff x="0" y="0"/>
+          <a:chExt cx="0" cy="0"/>
+        </a:xfrm>
+      </p:grpSpPr>
+      <p:sp>
+        <p:nvSpPr>
+          <p:cNvPr id="2" name="Title 1"/>
+          <p:cNvSpPr>
+            <a:spLocks noGrp="1"/>
+          </p:cNvSpPr>
+          <p:nvPr>
+            <p:ph type="title"/>
+          </p:nvPr>
+        </p:nvSpPr>
         <p:spPr>
           <a:xfrm>
             <a:off x="457201" y="204787"/>
@@ -6495,28 +6894,142 @@
             <a:pPr lvl="0"/>
             <a:r>
               <a:rPr/>
-              <a:t>Sole Grand-Duchy in the World</a:t>
-            </a:r>
-          </a:p>
-          <a:p>
-            <a:pPr lvl="0"/>
-            <a:r>
-              <a:rPr/>
-              <a:t>3 official languages (Luxembourguish, German, French)</a:t>
-            </a:r>
-          </a:p>
-          <a:p>
-            <a:pPr lvl="0"/>
-            <a:r>
-              <a:rPr/>
-              <a:t>A founder of the European Union</a:t>
-            </a:r>
-          </a:p>
-          <a:p>
-            <a:pPr lvl="0"/>
-            <a:r>
-              <a:rPr/>
-              <a:t>René Arend, a luxembourguish chef invented the McNugget and McRib</a:t>
+              <a:t>The US and Luxembourg are good friends</a:t>
+            </a:r>
+          </a:p>
+          <a:p>
+            <a:pPr lvl="0"/>
+            <a:r>
+              <a:rPr/>
+              <a:t>19th and 20th century, lots of immigration</a:t>
+            </a:r>
+          </a:p>
+          <a:p>
+            <a:pPr lvl="0"/>
+            <a:r>
+              <a:rPr/>
+              <a:t>One of my dreams is to visit Luxembourg (WI)</a:t>
+            </a:r>
+          </a:p>
+          <a:p>
+            <a:pPr lvl="0" indent="0" marL="0">
+              <a:buNone/>
+            </a:pPr>
+            <a:r>
+              <a:rPr/>
+              <a:t>. . .</a:t>
+            </a:r>
+          </a:p>
+        </p:txBody>
+      </p:sp>
+      <p:pic>
+        <p:nvPicPr>
+          <p:cNvPr descr="img/luxembourg-wi.png" id="0" name="Picture 1"/>
+          <p:cNvPicPr>
+            <a:picLocks noGrp="1" noChangeAspect="1"/>
+          </p:cNvPicPr>
+          <p:nvPr/>
+        </p:nvPicPr>
+        <p:blipFill>
+          <a:blip r:embed="rId2"/>
+          <a:stretch>
+            <a:fillRect/>
+          </a:stretch>
+        </p:blipFill>
+        <p:spPr bwMode="auto">
+          <a:xfrm>
+            <a:off x="3568700" y="304800"/>
+            <a:ext cx="5105400" cy="4178300"/>
+          </a:xfrm>
+          <a:prstGeom prst="rect">
+            <a:avLst/>
+          </a:prstGeom>
+          <a:noFill/>
+          <a:ln w="9525">
+            <a:noFill/>
+            <a:headEnd/>
+            <a:tailEnd/>
+          </a:ln>
+        </p:spPr>
+      </p:pic>
+    </p:spTree>
+  </p:cSld>
+</p:sld>
+</file>
+
+<file path=ppt/slides/slide7.xml><?xml version="1.0" encoding="utf-8"?>
+<p:sld xmlns:a="http://schemas.openxmlformats.org/drawingml/2006/main" xmlns:r="http://schemas.openxmlformats.org/officeDocument/2006/relationships" xmlns:p="http://schemas.openxmlformats.org/presentationml/2006/main">
+  <p:cSld>
+    <p:spTree>
+      <p:nvGrpSpPr>
+        <p:cNvPr id="1" name=""/>
+        <p:cNvGrpSpPr/>
+        <p:nvPr/>
+      </p:nvGrpSpPr>
+      <p:grpSpPr>
+        <a:xfrm>
+          <a:off x="0" y="0"/>
+          <a:ext cx="0" cy="0"/>
+          <a:chOff x="0" y="0"/>
+          <a:chExt cx="0" cy="0"/>
+        </a:xfrm>
+      </p:grpSpPr>
+      <p:sp>
+        <p:nvSpPr>
+          <p:cNvPr id="2" name="Title 1"/>
+          <p:cNvSpPr>
+            <a:spLocks noGrp="1"/>
+          </p:cNvSpPr>
+          <p:nvPr>
+            <p:ph type="title"/>
+          </p:nvPr>
+        </p:nvSpPr>
+        <p:spPr>
+          <a:xfrm>
+            <a:off x="457201" y="204787"/>
+            <a:ext cx="3008313" cy="871538"/>
+          </a:xfrm>
+        </p:spPr>
+        <p:txBody>
+          <a:bodyPr/>
+          <a:lstStyle/>
+          <a:p>
+            <a:pPr lvl="0" indent="0" marL="0">
+              <a:buNone/>
+            </a:pPr>
+            <a:r>
+              <a:rPr/>
+              <a:t>Intro: Luxembourg?</a:t>
+            </a:r>
+          </a:p>
+        </p:txBody>
+      </p:sp>
+      <p:sp>
+        <p:nvSpPr>
+          <p:cNvPr id="4" name="Text Placeholder 3"/>
+          <p:cNvSpPr>
+            <a:spLocks noGrp="1"/>
+          </p:cNvSpPr>
+          <p:nvPr>
+            <p:ph idx="2" sz="half" type="body"/>
+          </p:nvPr>
+        </p:nvSpPr>
+        <p:spPr/>
+        <p:txBody>
+          <a:bodyPr/>
+          <a:lstStyle/>
+          <a:p>
+            <a:pPr lvl="0"/>
+            <a:r>
+              <a:rPr/>
+              <a:t>The USA liberated Luxembourg from the Nazis in 1944 (September 10th)</a:t>
+            </a:r>
+          </a:p>
+          <a:p>
+            <a:pPr lvl="0"/>
+            <a:r>
+              <a:rPr/>
+              <a:t>René Arend, a luxembourguish chef invented the McNugget and McRib (I’d say we’re even)</a:t>
             </a:r>
           </a:p>
           <a:p>
@@ -6565,179 +7078,6 @@
 </p:sld>
 </file>
 
-<file path=ppt/slides/slide6.xml><?xml version="1.0" encoding="utf-8"?>
-<p:sld xmlns:a="http://schemas.openxmlformats.org/drawingml/2006/main" xmlns:r="http://schemas.openxmlformats.org/officeDocument/2006/relationships" xmlns:p="http://schemas.openxmlformats.org/presentationml/2006/main">
-  <p:cSld>
-    <p:spTree>
-      <p:nvGrpSpPr>
-        <p:cNvPr id="1" name=""/>
-        <p:cNvGrpSpPr/>
-        <p:nvPr/>
-      </p:nvGrpSpPr>
-      <p:grpSpPr>
-        <a:xfrm>
-          <a:off x="0" y="0"/>
-          <a:ext cx="0" cy="0"/>
-          <a:chOff x="0" y="0"/>
-          <a:chExt cx="0" cy="0"/>
-        </a:xfrm>
-      </p:grpSpPr>
-      <p:sp>
-        <p:nvSpPr>
-          <p:cNvPr id="2" name="Title 1"/>
-          <p:cNvSpPr>
-            <a:spLocks noGrp="1"/>
-          </p:cNvSpPr>
-          <p:nvPr>
-            <p:ph type="title"/>
-          </p:nvPr>
-        </p:nvSpPr>
-        <p:spPr/>
-        <p:txBody>
-          <a:bodyPr/>
-          <a:lstStyle/>
-          <a:p>
-            <a:pPr lvl="0" indent="0" marL="0">
-              <a:buNone/>
-            </a:pPr>
-            <a:r>
-              <a:rPr/>
-              <a:t>Intro: where to find the code</a:t>
-            </a:r>
-          </a:p>
-        </p:txBody>
-      </p:sp>
-      <p:sp>
-        <p:nvSpPr>
-          <p:cNvPr id="3" name="Content Placeholder 2"/>
-          <p:cNvSpPr>
-            <a:spLocks noGrp="1"/>
-          </p:cNvSpPr>
-          <p:nvPr>
-            <p:ph idx="1"/>
-          </p:nvPr>
-        </p:nvSpPr>
-        <p:spPr/>
-        <p:txBody>
-          <a:bodyPr/>
-          <a:lstStyle/>
-          <a:p>
-            <a:pPr lvl="0" indent="0" marL="0">
-              <a:buNone/>
-            </a:pPr>
-            <a:r>
-              <a:rPr/>
-              <a:t>Slides available online:</a:t>
-            </a:r>
-          </a:p>
-          <a:p>
-            <a:pPr lvl="0" indent="0" marL="0">
-              <a:buNone/>
-            </a:pPr>
-            <a:r>
-              <a:rPr>
-                <a:hlinkClick r:id="rId2"/>
-              </a:rPr>
-              <a:t>https://b-rodrigues.github.io/repro_r_pharma</a:t>
-            </a:r>
-          </a:p>
-          <a:p>
-            <a:pPr lvl="0" indent="0" marL="0">
-              <a:buNone/>
-            </a:pPr>
-            <a:r>
-              <a:rPr/>
-              <a:t>Code available here:</a:t>
-            </a:r>
-          </a:p>
-          <a:p>
-            <a:pPr lvl="0" indent="0" marL="0">
-              <a:buNone/>
-            </a:pPr>
-            <a:r>
-              <a:rPr>
-                <a:hlinkClick r:id="rId3"/>
-              </a:rPr>
-              <a:t>https://github.com/b-rodrigues/repro_r_pharma</a:t>
-            </a:r>
-          </a:p>
-        </p:txBody>
-      </p:sp>
-    </p:spTree>
-  </p:cSld>
-</p:sld>
-</file>
-
-<file path=ppt/slides/slide7.xml><?xml version="1.0" encoding="utf-8"?>
-<p:sld xmlns:a="http://schemas.openxmlformats.org/drawingml/2006/main" xmlns:r="http://schemas.openxmlformats.org/officeDocument/2006/relationships" xmlns:p="http://schemas.openxmlformats.org/presentationml/2006/main">
-  <p:cSld>
-    <p:spTree>
-      <p:nvGrpSpPr>
-        <p:cNvPr id="1" name=""/>
-        <p:cNvGrpSpPr/>
-        <p:nvPr/>
-      </p:nvGrpSpPr>
-      <p:grpSpPr>
-        <a:xfrm>
-          <a:off x="0" y="0"/>
-          <a:ext cx="0" cy="0"/>
-          <a:chOff x="0" y="0"/>
-          <a:chExt cx="0" cy="0"/>
-        </a:xfrm>
-      </p:grpSpPr>
-      <p:sp>
-        <p:nvSpPr>
-          <p:cNvPr id="2" name="Title 1"/>
-          <p:cNvSpPr>
-            <a:spLocks noGrp="1"/>
-          </p:cNvSpPr>
-          <p:nvPr>
-            <p:ph type="title"/>
-          </p:nvPr>
-        </p:nvSpPr>
-        <p:spPr/>
-        <p:txBody>
-          <a:bodyPr/>
-          <a:lstStyle/>
-          <a:p>
-            <a:pPr lvl="0" indent="0" marL="0">
-              <a:buNone/>
-            </a:pPr>
-            <a:r>
-              <a:rPr/>
-              <a:t>What I’ll be talking about</a:t>
-            </a:r>
-          </a:p>
-        </p:txBody>
-      </p:sp>
-      <p:sp>
-        <p:nvSpPr>
-          <p:cNvPr id="3" name="Content Placeholder 2"/>
-          <p:cNvSpPr>
-            <a:spLocks noGrp="1"/>
-          </p:cNvSpPr>
-          <p:nvPr>
-            <p:ph idx="1"/>
-          </p:nvPr>
-        </p:nvSpPr>
-        <p:spPr/>
-        <p:txBody>
-          <a:bodyPr/>
-          <a:lstStyle/>
-          <a:p>
-            <a:pPr lvl="0"/>
-            <a:r>
-              <a:rPr/>
-              <a:t>Reproducibility of data projects</a:t>
-            </a:r>
-          </a:p>
-        </p:txBody>
-      </p:sp>
-    </p:spTree>
-  </p:cSld>
-</p:sld>
-</file>
-
 <file path=ppt/slides/slide8.xml><?xml version="1.0" encoding="utf-8"?>
 <p:sld xmlns:a="http://schemas.openxmlformats.org/drawingml/2006/main" xmlns:r="http://schemas.openxmlformats.org/officeDocument/2006/relationships" xmlns:p="http://schemas.openxmlformats.org/presentationml/2006/main">
   <p:cSld>
@@ -6775,7 +7115,7 @@
             </a:pPr>
             <a:r>
               <a:rPr/>
-              <a:t>Available solutions for R</a:t>
+              <a:t>Intro: where to find the code</a:t>
             </a:r>
           </a:p>
         </p:txBody>
@@ -6795,83 +7135,43 @@
           <a:bodyPr/>
           <a:lstStyle/>
           <a:p>
-            <a:pPr lvl="0"/>
-            <a:r>
-              <a:rPr>
-                <a:latin typeface="Courier"/>
-              </a:rPr>
-              <a:t>{renv}</a:t>
-            </a:r>
-            <a:r>
-              <a:rPr/>
-              <a:t> or </a:t>
-            </a:r>
-            <a:r>
-              <a:rPr>
-                <a:latin typeface="Courier"/>
-              </a:rPr>
-              <a:t>{groundhog}</a:t>
-            </a:r>
-            <a:r>
-              <a:rPr/>
-              <a:t>: simple to use, but:</a:t>
-            </a:r>
-          </a:p>
-          <a:p>
-            <a:pPr lvl="1"/>
-            <a:r>
-              <a:rPr/>
-              <a:t>Doesn’t save the R version</a:t>
-            </a:r>
-          </a:p>
-          <a:p>
-            <a:pPr lvl="1"/>
-            <a:r>
-              <a:rPr/>
-              <a:t>Installing old packages may fail (system dependencies)</a:t>
-            </a:r>
-          </a:p>
-          <a:p>
-            <a:pPr lvl="0"/>
-            <a:r>
-              <a:rPr/>
-              <a:t>Docker goes further:</a:t>
-            </a:r>
-          </a:p>
-          <a:p>
-            <a:pPr lvl="1"/>
-            <a:r>
-              <a:rPr/>
-              <a:t>Manages R </a:t>
-            </a:r>
-            <a:r>
-              <a:rPr i="1"/>
-              <a:t>and</a:t>
-            </a:r>
-            <a:r>
-              <a:rPr/>
-              <a:t> system dependencies</a:t>
-            </a:r>
-          </a:p>
-          <a:p>
-            <a:pPr lvl="1"/>
-            <a:r>
-              <a:rPr/>
-              <a:t>Containers executable anywhere</a:t>
-            </a:r>
-          </a:p>
-          <a:p>
-            <a:pPr lvl="0"/>
-            <a:r>
-              <a:rPr/>
-              <a:t>But:</a:t>
-            </a:r>
-          </a:p>
-          <a:p>
-            <a:pPr lvl="1"/>
-            <a:r>
-              <a:rPr/>
-              <a:t>Not inherently reproducible</a:t>
+            <a:pPr lvl="0" indent="0" marL="0">
+              <a:buNone/>
+            </a:pPr>
+            <a:r>
+              <a:rPr/>
+              <a:t>Slides available online:</a:t>
+            </a:r>
+          </a:p>
+          <a:p>
+            <a:pPr lvl="0" indent="0" marL="0">
+              <a:buNone/>
+            </a:pPr>
+            <a:r>
+              <a:rPr>
+                <a:hlinkClick r:id="rId2"/>
+              </a:rPr>
+              <a:t>https://b-rodrigues.github.io/repro_r_pharma</a:t>
+            </a:r>
+          </a:p>
+          <a:p>
+            <a:pPr lvl="0" indent="0" marL="0">
+              <a:buNone/>
+            </a:pPr>
+            <a:r>
+              <a:rPr/>
+              <a:t>Code available here:</a:t>
+            </a:r>
+          </a:p>
+          <a:p>
+            <a:pPr lvl="0" indent="0" marL="0">
+              <a:buNone/>
+            </a:pPr>
+            <a:r>
+              <a:rPr>
+                <a:hlinkClick r:id="rId3"/>
+              </a:rPr>
+              <a:t>https://github.com/b-rodrigues/repro_r_pharma</a:t>
             </a:r>
           </a:p>
         </p:txBody>
@@ -6908,12 +7208,7 @@
             <p:ph type="title"/>
           </p:nvPr>
         </p:nvSpPr>
-        <p:spPr>
-          <a:xfrm>
-            <a:off x="457201" y="204787"/>
-            <a:ext cx="3008313" cy="871538"/>
-          </a:xfrm>
-        </p:spPr>
+        <p:spPr/>
         <p:txBody>
           <a:bodyPr/>
           <a:lstStyle/>
@@ -6923,125 +7218,30 @@
             </a:pPr>
             <a:r>
               <a:rPr/>
-              <a:t>The Nix package manager (1/2)</a:t>
-            </a:r>
-          </a:p>
-        </p:txBody>
-      </p:sp>
-      <p:sp>
-        <p:nvSpPr>
-          <p:cNvPr id="4" name="Text Placeholder 3"/>
-          <p:cNvSpPr>
-            <a:spLocks noGrp="1"/>
-          </p:cNvSpPr>
-          <p:nvPr>
-            <p:ph idx="2" sz="half" type="body"/>
-          </p:nvPr>
-        </p:nvSpPr>
-        <p:spPr/>
-        <p:txBody>
-          <a:bodyPr/>
-          <a:lstStyle/>
-          <a:p>
-            <a:pPr lvl="0" indent="0" marL="0">
-              <a:buNone/>
-            </a:pPr>
-            <a:r>
-              <a:rPr/>
-              <a:t>Package manager: tool for installing and managing </a:t>
-            </a:r>
-            <a:r>
-              <a:rPr i="1"/>
-              <a:t>packages</a:t>
-            </a:r>
-          </a:p>
-          <a:p>
-            <a:pPr lvl="0" indent="0" marL="0">
-              <a:buNone/>
-            </a:pPr>
-            <a:r>
-              <a:rPr/>
-              <a:t>Package: any software (not just R packages)</a:t>
-            </a:r>
-          </a:p>
-          <a:p>
-            <a:pPr lvl="0" indent="0" marL="0">
-              <a:buNone/>
-            </a:pPr>
-            <a:r>
-              <a:rPr/>
-              <a:t>A popular package manager:</a:t>
-            </a:r>
-          </a:p>
-          <a:p>
-            <a:pPr lvl="0" indent="0" marL="0">
-              <a:buNone/>
-            </a:pPr>
-            <a:r>
-              <a:rPr/>
-              <a:t>. . .</a:t>
-            </a:r>
-          </a:p>
-        </p:txBody>
-      </p:sp>
-      <p:pic>
-        <p:nvPicPr>
-          <p:cNvPr descr="img/play_store.png" id="0" name="Picture 1"/>
-          <p:cNvPicPr>
-            <a:picLocks noGrp="1" noChangeAspect="1"/>
-          </p:cNvPicPr>
-          <p:nvPr/>
-        </p:nvPicPr>
-        <p:blipFill>
-          <a:blip r:embed="rId2"/>
-          <a:stretch>
-            <a:fillRect/>
-          </a:stretch>
-        </p:blipFill>
-        <p:spPr bwMode="auto">
-          <a:xfrm>
-            <a:off x="5245100" y="203200"/>
-            <a:ext cx="1739900" cy="3873500"/>
-          </a:xfrm>
-          <a:prstGeom prst="rect">
-            <a:avLst/>
-          </a:prstGeom>
-          <a:noFill/>
-          <a:ln w="9525">
-            <a:noFill/>
-            <a:headEnd/>
-            <a:tailEnd/>
-          </a:ln>
-        </p:spPr>
-      </p:pic>
-      <p:sp>
-        <p:nvSpPr>
-          <p:cNvPr id="1" name="TextBox 3"/>
-          <p:cNvSpPr txBox="1"/>
+              <a:t>What I’ll be talking about</a:t>
+            </a:r>
+          </a:p>
+        </p:txBody>
+      </p:sp>
+      <p:sp>
+        <p:nvSpPr>
+          <p:cNvPr id="3" name="Content Placeholder 2"/>
+          <p:cNvSpPr>
+            <a:spLocks noGrp="1"/>
+          </p:cNvSpPr>
           <p:nvPr>
             <p:ph idx="1"/>
           </p:nvPr>
         </p:nvSpPr>
-        <p:spPr>
-          <a:xfrm>
-            <a:off x="3568700" y="4076700"/>
-            <a:ext cx="5105400" cy="508000"/>
-          </a:xfrm>
-          <a:prstGeom prst="rect">
-            <a:avLst/>
-          </a:prstGeom>
-          <a:noFill/>
-        </p:spPr>
-        <p:txBody>
-          <a:bodyPr/>
-          <a:lstStyle/>
-          <a:p>
-            <a:pPr lvl="0" indent="0" marL="0" algn="ctr">
-              <a:buNone/>
-            </a:pPr>
-            <a:r>
-              <a:rPr/>
-              <a:t>Google Play Store</a:t>
+        <p:spPr/>
+        <p:txBody>
+          <a:bodyPr/>
+          <a:lstStyle/>
+          <a:p>
+            <a:pPr lvl="0"/>
+            <a:r>
+              <a:rPr/>
+              <a:t>Reproducibility of data projects</a:t>
             </a:r>
           </a:p>
         </p:txBody>

--- a/docs/index.pptx
+++ b/docs/index.pptx
@@ -31,6 +31,7 @@
     <p:sldId id="279" r:id="rId25"/>
     <p:sldId id="280" r:id="rId26"/>
     <p:sldId id="281" r:id="rId27"/>
+    <p:sldId id="282" r:id="rId28"/>
   </p:sldIdLst>
   <p:sldSz cx="9144000" cy="5143500" type="screen16x9"/>
   <p:notesSz cx="6858000" cy="9144000"/>
@@ -6445,6 +6446,118 @@
             </a:pPr>
             <a:r>
               <a:rPr/>
+              <a:t>How did I build T?</a:t>
+            </a:r>
+          </a:p>
+        </p:txBody>
+      </p:sp>
+      <p:sp>
+        <p:nvSpPr>
+          <p:cNvPr id="3" name="Content Placeholder 2"/>
+          <p:cNvSpPr>
+            <a:spLocks noGrp="1"/>
+          </p:cNvSpPr>
+          <p:nvPr>
+            <p:ph idx="1"/>
+          </p:nvPr>
+        </p:nvSpPr>
+        <p:spPr/>
+        <p:txBody>
+          <a:bodyPr/>
+          <a:lstStyle/>
+          <a:p>
+            <a:pPr lvl="0"/>
+            <a:r>
+              <a:rPr/>
+              <a:t>100% LLM generated Ocaml code</a:t>
+            </a:r>
+          </a:p>
+          <a:p>
+            <a:pPr lvl="0"/>
+            <a:r>
+              <a:rPr/>
+              <a:t>Start with a specification doc</a:t>
+            </a:r>
+          </a:p>
+          <a:p>
+            <a:pPr lvl="0"/>
+            <a:r>
+              <a:rPr/>
+              <a:t>Keep brainstorming, refining…</a:t>
+            </a:r>
+          </a:p>
+          <a:p>
+            <a:pPr lvl="0"/>
+            <a:r>
+              <a:rPr/>
+              <a:t>Give the doc to an LLM</a:t>
+            </a:r>
+          </a:p>
+          <a:p>
+            <a:pPr lvl="0"/>
+            <a:r>
+              <a:rPr/>
+              <a:t>Let another LLM review the work</a:t>
+            </a:r>
+          </a:p>
+          <a:p>
+            <a:pPr lvl="0"/>
+            <a:r>
+              <a:rPr/>
+              <a:t>Implement and review tests</a:t>
+            </a:r>
+          </a:p>
+          <a:p>
+            <a:pPr lvl="0"/>
+            <a:r>
+              <a:rPr/>
+              <a:t>Repeat!</a:t>
+            </a:r>
+          </a:p>
+        </p:txBody>
+      </p:sp>
+    </p:spTree>
+  </p:cSld>
+</p:sld>
+</file>
+
+<file path=ppt/slides/slide27.xml><?xml version="1.0" encoding="utf-8"?>
+<p:sld xmlns:a="http://schemas.openxmlformats.org/drawingml/2006/main" xmlns:r="http://schemas.openxmlformats.org/officeDocument/2006/relationships" xmlns:p="http://schemas.openxmlformats.org/presentationml/2006/main">
+  <p:cSld>
+    <p:spTree>
+      <p:nvGrpSpPr>
+        <p:cNvPr id="1" name=""/>
+        <p:cNvGrpSpPr/>
+        <p:nvPr/>
+      </p:nvGrpSpPr>
+      <p:grpSpPr>
+        <a:xfrm>
+          <a:off x="0" y="0"/>
+          <a:ext cx="0" cy="0"/>
+          <a:chOff x="0" y="0"/>
+          <a:chExt cx="0" cy="0"/>
+        </a:xfrm>
+      </p:grpSpPr>
+      <p:sp>
+        <p:nvSpPr>
+          <p:cNvPr id="2" name="Title 1"/>
+          <p:cNvSpPr>
+            <a:spLocks noGrp="1"/>
+          </p:cNvSpPr>
+          <p:nvPr>
+            <p:ph type="title"/>
+          </p:nvPr>
+        </p:nvSpPr>
+        <p:spPr/>
+        <p:txBody>
+          <a:bodyPr/>
+          <a:lstStyle/>
+          <a:p>
+            <a:pPr lvl="0" indent="0" marL="0">
+              <a:buNone/>
+            </a:pPr>
+            <a:r>
+              <a:rPr/>
               <a:t>Fin</a:t>
             </a:r>
           </a:p>
@@ -7029,7 +7142,7 @@
             <a:pPr lvl="0"/>
             <a:r>
               <a:rPr/>
-              <a:t>René Arend, a luxembourguish chef invented the McNugget and McRib (I’d say we’re even)</a:t>
+              <a:t>René Arend, a luxembourguish chef invented the McNugget and McRib (so I’d say we’re even)</a:t>
             </a:r>
           </a:p>
           <a:p>
